--- a/FINAL_SUBMISSION/Vishwakarma_Stage2_Final.pptx
+++ b/FINAL_SUBMISSION/Vishwakarma_Stage2_Final.pptx
@@ -1226,7 +1226,7 @@
           <a:lstStyle/>
           <a:p>
             <a:r>
-              <a:t>Full list with verification notes: 2_research/literature.csv and research_matrix.csv (36 + 16 entries).</a:t>
+              <a:t>Full list with verification notes: 2_research/literature.csv and research_matrix.csv (41 + 16 entries).</a:t>
             </a:r>
           </a:p>
         </p:txBody>
@@ -1408,7 +1408,7 @@
           <a:lstStyle/>
           <a:p>
             <a:r>
-              <a:t>Sources: Milne 2016 [1]; Dealey 2006 [6] (0.10 and 0.21 g/cm²/24 h by one method, mean 1.3 by the other). Not yet measured and not estimated: nurse minutes per check, dressing cost per patient.</a:t>
+              <a:t>Sources: Milne 2016 [1]; Dealey 2006 [6] (0.10 and 0.21 g/cm²/24 h by one method, mean 1.3 by the other); UK survey of &gt;200 patients commissioned by Mölnlycke, 2018 [13]: average dressing time 18 min, about 5 changes a week (patient-reported, industry-sponsored); Truemeds listings [15]: Mepilex Lite 10x10 cm Rs 242, Mepilex Border 10x10 cm Rs 514 (pack size unclear). Not yet measured: nurse minutes per check in Indian clinics.</a:t>
             </a:r>
           </a:p>
         </p:txBody>
@@ -1466,7 +1466,7 @@
           <a:lstStyle/>
           <a:p>
             <a:r>
-              <a:t>Targets, not results. Who benefits (expected, to verify): fewer needless removals, a logged reason for each change, fewer wasted dressings. Cost target &lt;= Rs 100 per strip (film + laser time; estimate). FAULT covers a broken strip or reader error.</a:t>
+              <a:t>Targets and projections, not results. Payback: strip &lt;= Rs 100 (estimate) / dressing Rs 242-514 [15] = 0.19-0.41, i.e. one avoided change in every 2.4-5.1 dressings. 'Up to 44.9 %' assumes every change waits for CHANGE; some changes are made for other clinical reasons, so the real figure is lower and must be measured. Bluetooth: compiled, not yet tested on hardware (bench test T11). FAULT covers a broken strip or reader error.</a:t>
             </a:r>
           </a:p>
         </p:txBody>
@@ -1524,7 +1524,7 @@
           <a:lstStyle/>
           <a:p>
             <a:r>
-              <a:t>ADS1115 single-shot 128 SPS, auto-range; A1 reads the 3V3 rail. Rx from both phases, averaged, scaled by the check resistor (+/-5 % else FAULT), minus 2 kOhm protection. Idle pins high-Z; zones frozen during FAULT. Compiles for ESP32-C3 with 0 warnings (327,176 bytes).</a:t>
+              <a:t>ADS1115 single-shot 128 SPS, auto-range; A1 reads the 3V3 rail. Rx from both phases, averaged, scaled by the check resistor (+/-5 % else FAULT), minus 2 kOhm protection. Idle pins high-Z; zones frozen during FAULT. Compiles for ESP32-C3 with 0 warnings (650,349 bytes, 49 % of flash, with Bluetooth). BLE payload: state, wet flags, scan number, both zone resistances; unencrypted, test company ID 0xFFFF, bench only. Decoder: 7_firmware/tools/decode_beacon.py.</a:t>
             </a:r>
           </a:p>
         </p:txBody>
@@ -1640,7 +1640,7 @@
           <a:lstStyle/>
           <a:p>
             <a:r>
-              <a:t>Line items: 6_electronics/bom_v0_1.csv (23 lines, each traced to the file that needs it). First order: silver paint, 1 % resistor set, 0.1 % 100 kOhm resistors, ADS1115, ESP32-C3. Ranges = sum of min/max estimates.</a:t>
+              <a:t>Line items: 6_electronics/bom_v0_1.csv (23 lines, each traced to the file that needs it). First order: silver paint, 1 % resistor set, 0.1 % 100 kOhm resistors, ADS1115, ESP32-C3. Quoted 19 Oct 2026 incl. GST: Probots PRO4607 ESP32-C3 SuperMini Rs 242; Probots PRO789 ADS1115 Rs 125; Hubtronics 05880 P75-B1 pack of 100 Rs 354. Total leaves out the borrowed meter, USB cable and E4 dressings. Ranges = sum of min/max estimates.</a:t>
             </a:r>
           </a:p>
         </p:txBody>
@@ -1698,7 +1698,7 @@
           <a:lstStyle/>
           <a:p>
             <a:r>
-              <a:t>5 concepts scored on 13 weighted criteria (3_decisions/decision_matrix.md). Verification fixes: seal moved off the clamp; STEP was in cm, now mm; drawings rebuilt first-angle. FMEA F04 (cracked sense lead reads dry, RPN 224).</a:t>
+              <a:t>5 concepts scored on 13 weighted criteria (3_decisions/decision_matrix.md). Verification fixes: seal moved off the clamp; STEP was in cm, now mm; drawings rebuilt first-angle. FMEA F04 (cracked sense lead reads dry, RPN 224). 4 zones were cut to 2 until E2 proves finer lines. Stage 1 also estimated '60 % fewer changes'; we dropped that number (no source). IP: concept and files are the team's own; no patent filed yet.</a:t>
             </a:r>
           </a:p>
         </p:txBody>
@@ -1756,7 +1756,7 @@
           <a:lstStyle/>
           <a:p>
             <a:r>
-              <a:t>Gates: G1 E2 Rs CV &lt;= 20 %; G2 reader bench test T0-T10; G3 E4 alert within +/-10 %; G4 demo with logged raw data. No patient use. Raman/SEM via a partner lab if access is granted.</a:t>
+              <a:t>Gates: G1 E2 Rs CV &lt;= 20 %; G2 reader bench test T0-T11; G3 E4 alert within +/-10 %; G4 live demo with logged raw data. Programme dates (vishwakarma-awards.org and the Internshala listing, read 19 Oct 2026): prototype video + updated PPT in December (listing: 4 Dec 2026); Health Tech semi-final interviews in January; IIT Indore bootcamp and finale 26 Jan - 1 Feb 2027. No patient use. Raman/SEM via a partner lab if access is granted.</a:t>
             </a:r>
           </a:p>
         </p:txBody>
@@ -1868,7 +1868,7 @@
           <a:lstStyle/>
           <a:p>
             <a:r>
-              <a:t>Target user: nurses and carers (diabetic foot, venous leg, pressure ulcers). Public search: WoundSense reads one point [1]; a lab study mapped 8 points [3]; diaper wetness strips with clip-on readers exist [4]; smart bandages use custom electronics [5]. Why now: some makers define 'full' as a distance from the pad edge [2] and conductive carbon can be laser-written on polyimide in one pass [7]. Project: Dermasense, VK26-IITI-HT-0050, Health Tech.</a:t>
+              <a:t>Target user: nurses and carers (diabetic foot, venous leg, pressure ulcers). Public search: WoundSense reads one point [1]; a lab study mapped 8 points [3]; diaper wetness strips with clip-on readers exist [4]; smart bandages use custom electronics [5]. Visual change indicators exist (ALLEVYN LIFE: 'At 75%, it's time to change' [14]) but need the dressing face to be visible. Why now: some makers define 'full' as a distance from the pad edge [2] and conductive carbon can be laser-written on polyimide in one pass [7]. Project: Dermasense, VK26-IITI-HT-0050, Health Tech.</a:t>
             </a:r>
           </a:p>
         </p:txBody>
@@ -1957,7 +1957,7 @@
           <a:lstStyle/>
           <a:p>
             <a:r>
-              <a:t>Electrode lines/gaps 1.0 mm (provisional until E2). Windows 6 x 3.9 mm. Expected wet 4.2-14.8 kOhm, dry &gt;= 1 MOhm (calc_readout.py). Self-check: 100 kOhm 0.1 % resistor (+/-5 %) and COM loop -&gt; FAULT. Sources: config.h, strip_v0_1_geometry.json.</a:t>
+              <a:t>Electrode lines/gaps 1.0 mm (provisional until E2). Windows 6 x 3.9 mm. Expected wet 4.2-14.8 kOhm, dry &gt;= 1 MOhm (calc_readout.py). Self-check: 100 kOhm 0.1 % resistor (+/-5 %) and COM loop -&gt; FAULT. BLE: one 13-byte advertisement per scan (ble_beacon.h), compiled, not run on hardware. Sources: config.h, strip_v0_1_geometry.json.</a:t>
             </a:r>
           </a:p>
         </p:txBody>
@@ -16051,11 +16051,11 @@
                 <a:spcPct val="108000"/>
               </a:lnSpc>
               <a:spcAft>
-                <a:spcPts val="700"/>
+                <a:spcPts val="500"/>
               </a:spcAft>
             </a:pPr>
             <a:r>
-              <a:rPr sz="1019" b="1">
+              <a:rPr sz="980" b="1">
                 <a:solidFill>
                   <a:srgbClr val="0F172A"/>
                 </a:solidFill>
@@ -16064,7 +16064,7 @@
               <a:t>1. </a:t>
             </a:r>
             <a:r>
-              <a:rPr sz="1019" b="0">
+              <a:rPr sz="980" b="0">
                 <a:solidFill>
                   <a:srgbClr val="334155"/>
                 </a:solidFill>
@@ -16079,11 +16079,11 @@
                 <a:spcPct val="108000"/>
               </a:lnSpc>
               <a:spcAft>
-                <a:spcPts val="700"/>
+                <a:spcPts val="500"/>
               </a:spcAft>
             </a:pPr>
             <a:r>
-              <a:rPr sz="1019" b="1">
+              <a:rPr sz="980" b="1">
                 <a:solidFill>
                   <a:srgbClr val="0F172A"/>
                 </a:solidFill>
@@ -16092,7 +16092,7 @@
               <a:t>2. </a:t>
             </a:r>
             <a:r>
-              <a:rPr sz="1019" b="0">
+              <a:rPr sz="980" b="0">
                 <a:solidFill>
                   <a:srgbClr val="334155"/>
                 </a:solidFill>
@@ -16107,11 +16107,11 @@
                 <a:spcPct val="108000"/>
               </a:lnSpc>
               <a:spcAft>
-                <a:spcPts val="700"/>
+                <a:spcPts val="500"/>
               </a:spcAft>
             </a:pPr>
             <a:r>
-              <a:rPr sz="1019" b="1">
+              <a:rPr sz="980" b="1">
                 <a:solidFill>
                   <a:srgbClr val="0F172A"/>
                 </a:solidFill>
@@ -16120,7 +16120,7 @@
               <a:t>3. </a:t>
             </a:r>
             <a:r>
-              <a:rPr sz="1019" b="0">
+              <a:rPr sz="980" b="0">
                 <a:solidFill>
                   <a:srgbClr val="334155"/>
                 </a:solidFill>
@@ -16135,11 +16135,11 @@
                 <a:spcPct val="108000"/>
               </a:lnSpc>
               <a:spcAft>
-                <a:spcPts val="700"/>
+                <a:spcPts val="500"/>
               </a:spcAft>
             </a:pPr>
             <a:r>
-              <a:rPr sz="1019" b="1">
+              <a:rPr sz="980" b="1">
                 <a:solidFill>
                   <a:srgbClr val="0F172A"/>
                 </a:solidFill>
@@ -16148,7 +16148,7 @@
               <a:t>4. </a:t>
             </a:r>
             <a:r>
-              <a:rPr sz="1019" b="0">
+              <a:rPr sz="980" b="0">
                 <a:solidFill>
                   <a:srgbClr val="334155"/>
                 </a:solidFill>
@@ -16163,11 +16163,11 @@
                 <a:spcPct val="108000"/>
               </a:lnSpc>
               <a:spcAft>
-                <a:spcPts val="700"/>
+                <a:spcPts val="500"/>
               </a:spcAft>
             </a:pPr>
             <a:r>
-              <a:rPr sz="1019" b="1">
+              <a:rPr sz="980" b="1">
                 <a:solidFill>
                   <a:srgbClr val="0F172A"/>
                 </a:solidFill>
@@ -16176,7 +16176,7 @@
               <a:t>5. </a:t>
             </a:r>
             <a:r>
-              <a:rPr sz="1019" b="0">
+              <a:rPr sz="980" b="0">
                 <a:solidFill>
                   <a:srgbClr val="334155"/>
                 </a:solidFill>
@@ -16191,11 +16191,11 @@
                 <a:spcPct val="108000"/>
               </a:lnSpc>
               <a:spcAft>
-                <a:spcPts val="700"/>
+                <a:spcPts val="500"/>
               </a:spcAft>
             </a:pPr>
             <a:r>
-              <a:rPr sz="1019" b="1">
+              <a:rPr sz="980" b="1">
                 <a:solidFill>
                   <a:srgbClr val="0F172A"/>
                 </a:solidFill>
@@ -16204,7 +16204,7 @@
               <a:t>6. </a:t>
             </a:r>
             <a:r>
-              <a:rPr sz="1019" b="0">
+              <a:rPr sz="980" b="0">
                 <a:solidFill>
                   <a:srgbClr val="334155"/>
                 </a:solidFill>
@@ -16219,11 +16219,11 @@
                 <a:spcPct val="108000"/>
               </a:lnSpc>
               <a:spcAft>
-                <a:spcPts val="700"/>
+                <a:spcPts val="500"/>
               </a:spcAft>
             </a:pPr>
             <a:r>
-              <a:rPr sz="1019" b="1">
+              <a:rPr sz="980" b="1">
                 <a:solidFill>
                   <a:srgbClr val="0F172A"/>
                 </a:solidFill>
@@ -16232,7 +16232,7 @@
               <a:t>7. </a:t>
             </a:r>
             <a:r>
-              <a:rPr sz="1019" b="0">
+              <a:rPr sz="980" b="0">
                 <a:solidFill>
                   <a:srgbClr val="334155"/>
                 </a:solidFill>
@@ -16247,11 +16247,11 @@
                 <a:spcPct val="108000"/>
               </a:lnSpc>
               <a:spcAft>
-                <a:spcPts val="700"/>
+                <a:spcPts val="500"/>
               </a:spcAft>
             </a:pPr>
             <a:r>
-              <a:rPr sz="1019" b="1">
+              <a:rPr sz="980" b="1">
                 <a:solidFill>
                   <a:srgbClr val="0F172A"/>
                 </a:solidFill>
@@ -16260,7 +16260,7 @@
               <a:t>8. </a:t>
             </a:r>
             <a:r>
-              <a:rPr sz="1019" b="0">
+              <a:rPr sz="980" b="0">
                 <a:solidFill>
                   <a:srgbClr val="334155"/>
                 </a:solidFill>
@@ -16275,11 +16275,11 @@
                 <a:spcPct val="108000"/>
               </a:lnSpc>
               <a:spcAft>
-                <a:spcPts val="700"/>
+                <a:spcPts val="500"/>
               </a:spcAft>
             </a:pPr>
             <a:r>
-              <a:rPr sz="1019" b="1">
+              <a:rPr sz="980" b="1">
                 <a:solidFill>
                   <a:srgbClr val="0F172A"/>
                 </a:solidFill>
@@ -16288,7 +16288,7 @@
               <a:t>9. </a:t>
             </a:r>
             <a:r>
-              <a:rPr sz="1019" b="0">
+              <a:rPr sz="980" b="0">
                 <a:solidFill>
                   <a:srgbClr val="334155"/>
                 </a:solidFill>
@@ -16303,11 +16303,11 @@
                 <a:spcPct val="108000"/>
               </a:lnSpc>
               <a:spcAft>
-                <a:spcPts val="700"/>
+                <a:spcPts val="500"/>
               </a:spcAft>
             </a:pPr>
             <a:r>
-              <a:rPr sz="1019" b="1">
+              <a:rPr sz="980" b="1">
                 <a:solidFill>
                   <a:srgbClr val="0F172A"/>
                 </a:solidFill>
@@ -16316,7 +16316,7 @@
               <a:t>10. </a:t>
             </a:r>
             <a:r>
-              <a:rPr sz="1019" b="0">
+              <a:rPr sz="980" b="0">
                 <a:solidFill>
                   <a:srgbClr val="334155"/>
                 </a:solidFill>
@@ -16331,11 +16331,11 @@
                 <a:spcPct val="108000"/>
               </a:lnSpc>
               <a:spcAft>
-                <a:spcPts val="700"/>
+                <a:spcPts val="500"/>
               </a:spcAft>
             </a:pPr>
             <a:r>
-              <a:rPr sz="1019" b="1">
+              <a:rPr sz="980" b="1">
                 <a:solidFill>
                   <a:srgbClr val="0F172A"/>
                 </a:solidFill>
@@ -16344,7 +16344,7 @@
               <a:t>11. </a:t>
             </a:r>
             <a:r>
-              <a:rPr sz="1019" b="0">
+              <a:rPr sz="980" b="0">
                 <a:solidFill>
                   <a:srgbClr val="334155"/>
                 </a:solidFill>
@@ -16359,11 +16359,11 @@
                 <a:spcPct val="108000"/>
               </a:lnSpc>
               <a:spcAft>
-                <a:spcPts val="700"/>
+                <a:spcPts val="500"/>
               </a:spcAft>
             </a:pPr>
             <a:r>
-              <a:rPr sz="1019" b="1">
+              <a:rPr sz="980" b="1">
                 <a:solidFill>
                   <a:srgbClr val="0F172A"/>
                 </a:solidFill>
@@ -16372,13 +16372,97 @@
               <a:t>12. </a:t>
             </a:r>
             <a:r>
-              <a:rPr sz="1019" b="0">
+              <a:rPr sz="980" b="0">
                 <a:solidFill>
                   <a:srgbClr val="334155"/>
                 </a:solidFill>
                 <a:latin typeface="DM Sans"/>
               </a:rPr>
               <a:t>Texas Instruments ADS1115 datasheet (SBAS444); Espressif ESP32-C3 datasheet · vendor documents</a:t>
+            </a:r>
+          </a:p>
+          <a:p>
+            <a:pPr>
+              <a:lnSpc>
+                <a:spcPct val="108000"/>
+              </a:lnSpc>
+              <a:spcAft>
+                <a:spcPts val="500"/>
+              </a:spcAft>
+            </a:pPr>
+            <a:r>
+              <a:rPr sz="980" b="1">
+                <a:solidFill>
+                  <a:srgbClr val="0F172A"/>
+                </a:solidFill>
+                <a:latin typeface="DM Sans"/>
+              </a:rPr>
+              <a:t>13. </a:t>
+            </a:r>
+            <a:r>
+              <a:rPr sz="980" b="0">
+                <a:solidFill>
+                  <a:srgbClr val="334155"/>
+                </a:solidFill>
+                <a:latin typeface="DM Sans"/>
+              </a:rPr>
+              <a:t>Wounds UK news (22 Aug 2018) on a Mölnlycke-commissioned survey of &gt;200 UK patients with chronic wounds: average dressing time 18 min · patient-reported, industry-sponsored; web page read</a:t>
+            </a:r>
+          </a:p>
+          <a:p>
+            <a:pPr>
+              <a:lnSpc>
+                <a:spcPct val="108000"/>
+              </a:lnSpc>
+              <a:spcAft>
+                <a:spcPts val="500"/>
+              </a:spcAft>
+            </a:pPr>
+            <a:r>
+              <a:rPr sz="980" b="1">
+                <a:solidFill>
+                  <a:srgbClr val="0F172A"/>
+                </a:solidFill>
+                <a:latin typeface="DM Sans"/>
+              </a:rPr>
+              <a:t>14. </a:t>
+            </a:r>
+            <a:r>
+              <a:rPr sz="980" b="0">
+                <a:solidFill>
+                  <a:srgbClr val="334155"/>
+                </a:solidFill>
+                <a:latin typeface="DM Sans"/>
+              </a:rPr>
+              <a:t>Smith+Nephew, ALLEVYN LIFE product page: visual change indicator ('At 75%, it's time to change your dressing') · manufacturer web page, read 19 Oct 2026</a:t>
+            </a:r>
+          </a:p>
+          <a:p>
+            <a:pPr>
+              <a:lnSpc>
+                <a:spcPct val="108000"/>
+              </a:lnSpc>
+              <a:spcAft>
+                <a:spcPts val="500"/>
+              </a:spcAft>
+            </a:pPr>
+            <a:r>
+              <a:rPr sz="980" b="1">
+                <a:solidFill>
+                  <a:srgbClr val="0F172A"/>
+                </a:solidFill>
+                <a:latin typeface="DM Sans"/>
+              </a:rPr>
+              <a:t>15. </a:t>
+            </a:r>
+            <a:r>
+              <a:rPr sz="980" b="0">
+                <a:solidFill>
+                  <a:srgbClr val="334155"/>
+                </a:solidFill>
+                <a:latin typeface="DM Sans"/>
+              </a:rPr>
+              <a:t>Truemeds.in retail listings: Mepilex Lite 10 × 10 cm ₹242; Mepilex Border 10 × 10 cm ₹514 (pack size unclear) · retail pages, read 19 Oct 2026</a:t>
             </a:r>
           </a:p>
         </p:txBody>
@@ -18543,7 +18627,7 @@
                 </a:solidFill>
                 <a:latin typeface="DM Sans"/>
               </a:rPr>
-              <a:t>published numbers only; nurse time will be measured in our interviews.</a:t>
+              <a:t>published figures only (a UK patient survey, Indian retail prices); we will time real checks with nurses.</a:t>
             </a:r>
             <a:endParaRPr/>
           </a:p>
@@ -18684,13 +18768,13 @@
               <a:buNone/>
             </a:pPr>
             <a:r>
-              <a:rPr sz="1300" b="0">
+              <a:rPr sz="1500" b="0">
                 <a:solidFill>
                   <a:srgbClr val="0369A1"/>
                 </a:solidFill>
                 <a:latin typeface="Poppins SemiBold"/>
               </a:rPr>
-              <a:t>0.1–1.3 g/cm²·day</a:t>
+              <a:t>≈ 18 min</a:t>
             </a:r>
             <a:endParaRPr/>
           </a:p>
@@ -18737,7 +18821,7 @@
                 </a:solidFill>
                 <a:latin typeface="DM Sans Medium"/>
               </a:rPr>
-              <a:t>REPORTED EXUDATE RATES, 2 METHODS⁶</a:t>
+              <a:t>A DRESSING VISIT, PATIENT-REPORTED¹³</a:t>
             </a:r>
             <a:endParaRPr/>
           </a:p>
@@ -18787,7 +18871,7 @@
                 </a:solidFill>
                 <a:latin typeface="Poppins SemiBold"/>
               </a:rPr>
-              <a:t>Hidden</a:t>
+              <a:t>₹240–510</a:t>
             </a:r>
             <a:endParaRPr/>
           </a:p>
@@ -18834,7 +18918,7 @@
                 </a:solidFill>
                 <a:latin typeface="DM Sans Medium"/>
               </a:rPr>
-              <a:t>EXUDATE FRONT UNDER BANDAGE OR GARMENT</a:t>
+              <a:t>ONE 10 × 10 CM FOAM DRESSING, RETAIL¹⁵</a:t>
             </a:r>
             <a:endParaRPr/>
           </a:p>
@@ -18884,7 +18968,7 @@
                 </a:solidFill>
                 <a:latin typeface="Poppins SemiBold"/>
               </a:rPr>
-              <a:t>Lift to look</a:t>
+              <a:t>0.1–1.3 g/cm²·day</a:t>
             </a:r>
             <a:endParaRPr/>
           </a:p>
@@ -18931,7 +19015,7 @@
                 </a:solidFill>
                 <a:latin typeface="DM Sans Medium"/>
               </a:rPr>
-              <a:t>THE ONLY WAY TO CHECK A COVERED PAD</a:t>
+              <a:t>REPORTED EXUDATE RATES, 2 METHODS⁶</a:t>
             </a:r>
             <a:endParaRPr/>
           </a:p>
@@ -19248,7 +19332,7 @@
                 </a:solidFill>
                 <a:latin typeface="DM Sans"/>
               </a:rPr>
-              <a:t>every check means unwrap, look, re-secure.</a:t>
+              <a:t>every check means unwrap, look, re-secure: about 18 min a visit¹³.</a:t>
             </a:r>
           </a:p>
           <a:p>
@@ -19285,7 +19369,7 @@
                 </a:solidFill>
                 <a:latin typeface="DM Sans"/>
               </a:rPr>
-              <a:t>44.9 % of changes came while moisture was still optimal¹.</a:t>
+              <a:t>44.9 % of changes came while moisture was still optimal¹; each discards a dressing¹⁵.</a:t>
             </a:r>
           </a:p>
           <a:p>
@@ -19752,13 +19836,13 @@
               <a:buNone/>
             </a:pPr>
             <a:r>
-              <a:rPr sz="1500" b="0">
+              <a:rPr sz="1300" b="0">
                 <a:solidFill>
                   <a:srgbClr val="0369A1"/>
                 </a:solidFill>
                 <a:latin typeface="Poppins SemiBold"/>
               </a:rPr>
-              <a:t>2 zones</a:t>
+              <a:t>up to 44.9 %</a:t>
             </a:r>
             <a:endParaRPr/>
           </a:p>
@@ -19805,7 +19889,7 @@
                 </a:solidFill>
                 <a:latin typeface="DM Sans Medium"/>
               </a:rPr>
-              <a:t>CENTRE C + MAKER'S CHANGE LINE A</a:t>
+              <a:t>EARLY CHANGES A RELIABLE ALERT COULD AVOID¹</a:t>
             </a:r>
             <a:endParaRPr/>
           </a:p>
@@ -19855,7 +19939,7 @@
                 </a:solidFill>
                 <a:latin typeface="Poppins SemiBold"/>
               </a:rPr>
-              <a:t>4 states</a:t>
+              <a:t>≤ ₹100</a:t>
             </a:r>
             <a:endParaRPr/>
           </a:p>
@@ -19902,7 +19986,7 @@
                 </a:solidFill>
                 <a:latin typeface="DM Sans Medium"/>
               </a:rPr>
-              <a:t>OK · CHANGE · CHECK · FAULT</a:t>
+              <a:t>TARGET STRIP COST (ESTIMATE)</a:t>
             </a:r>
             <a:endParaRPr/>
           </a:p>
@@ -20441,7 +20525,7 @@
                 </a:solidFill>
                 <a:latin typeface="DM Sans"/>
               </a:rPr>
-              <a:t>CHANGE:  </a:t>
+              <a:t>Clear signal:  </a:t>
             </a:r>
             <a:r>
               <a:rPr sz="1200" b="0">
@@ -20450,7 +20534,7 @@
                 </a:solidFill>
                 <a:latin typeface="DM Sans"/>
               </a:rPr>
-              <a:t>when the change line is wet.</a:t>
+              <a:t>CHANGE when the line is wet; CHECK if it wets first.</a:t>
             </a:r>
           </a:p>
           <a:p>
@@ -20478,7 +20562,7 @@
                 </a:solidFill>
                 <a:latin typeface="DM Sans"/>
               </a:rPr>
-              <a:t>CHECK:  </a:t>
+              <a:t>Remote:  </a:t>
             </a:r>
             <a:r>
               <a:rPr sz="1200" b="0">
@@ -20487,7 +20571,7 @@
                 </a:solidFill>
                 <a:latin typeface="DM Sans"/>
               </a:rPr>
-              <a:t>if the line wets before the centre (leak).</a:t>
+              <a:t>the state is broadcast over Bluetooth to a phone.</a:t>
             </a:r>
           </a:p>
           <a:p>
@@ -20515,7 +20599,7 @@
                 </a:solidFill>
                 <a:latin typeface="DM Sans"/>
               </a:rPr>
-              <a:t>Target:  </a:t>
+              <a:t>Payback:  </a:t>
             </a:r>
             <a:r>
               <a:rPr sz="1200" b="0">
@@ -20524,7 +20608,7 @@
                 </a:solidFill>
                 <a:latin typeface="DM Sans"/>
               </a:rPr>
-              <a:t>alert within ±10 % of the visible front (E4).</a:t>
+              <a:t>a ≤ ₹100 strip pays for itself if 1 in 2–5 changes is avoided¹⁵.</a:t>
             </a:r>
           </a:p>
         </p:txBody>
@@ -20765,7 +20849,7 @@
                 </a:solidFill>
                 <a:latin typeface="DM Sans"/>
               </a:rPr>
-              <a:t>19 logic tests and 10 PC tests pass; not yet run on a wired board.</a:t>
+              <a:t>23 compile-time and 16 PC tests pass; not yet run on a wired board.</a:t>
             </a:r>
             <a:endParaRPr/>
           </a:p>
@@ -21221,7 +21305,7 @@
                 </a:solidFill>
                 <a:latin typeface="DM Sans"/>
               </a:rPr>
-              <a:t>Log:  </a:t>
+              <a:t>Share:  </a:t>
             </a:r>
             <a:r>
               <a:rPr sz="1200" b="0">
@@ -21230,7 +21314,7 @@
                 </a:solidFill>
                 <a:latin typeface="DM Sans"/>
               </a:rPr>
-              <a:t>one CSV line per scan over USB.</a:t>
+              <a:t>CSV over USB, and a Bluetooth broadcast to a phone.</a:t>
             </a:r>
           </a:p>
         </p:txBody>
@@ -22177,7 +22261,7 @@
                 </a:solidFill>
                 <a:latin typeface="DM Sans"/>
               </a:rPr>
-              <a:t>nothing ordered yet; all parts sold in India; prices to confirm.</a:t>
+              <a:t>reader parts and pins quoted 19 Oct, in stock in India; the rest are estimates.</a:t>
             </a:r>
             <a:endParaRPr/>
           </a:p>
@@ -22370,8 +22454,8 @@
         </p:nvSpPr>
         <p:spPr>
           <a:xfrm>
-            <a:off x="9705441" y="457200"/>
-            <a:ext cx="1953158" cy="246888"/>
+            <a:off x="9332366" y="457200"/>
+            <a:ext cx="2326233" cy="246888"/>
           </a:xfrm>
           <a:prstGeom prst="roundRect">
             <a:avLst>
@@ -22412,7 +22496,7 @@
                 </a:solidFill>
                 <a:latin typeface="DM Sans"/>
               </a:rPr>
-              <a:t>ESTIMATES · NOT YET ORDERED</a:t>
+              <a:t>3 PRICES QUOTED · NOTHING ORDERED</a:t>
             </a:r>
           </a:p>
         </p:txBody>
@@ -22450,8 +22534,8 @@
           <p:nvPr/>
         </p:nvGraphicFramePr>
         <p:xfrm>
-          <a:off x="6446520" y="1554480"/>
-          <a:ext cx="5010911" cy="3438144"/>
+          <a:off x="6446520" y="1517904"/>
+          <a:ext cx="5010912" cy="3374136"/>
         </p:xfrm>
         <a:graphic>
           <a:graphicData uri="http://schemas.openxmlformats.org/drawingml/2006/table">
@@ -22460,17 +22544,19 @@
                 <a:tableStyleId>{2D5ABB26-0587-4C30-8999-92F81FD0307C}</a:tableStyleId>
               </a:tblPr>
               <a:tblGrid>
-                <a:gridCol w="3407420"/>
-                <a:gridCol w="1603491"/>
+                <a:gridCol w="2103120"/>
+                <a:gridCol w="411480"/>
+                <a:gridCol w="1325880"/>
+                <a:gridCol w="1170432"/>
               </a:tblGrid>
-              <a:tr h="429768">
+              <a:tr h="374904">
                 <a:tc>
                   <a:txBody>
                     <a:bodyPr wrap="square"/>
                     <a:lstStyle/>
                     <a:p>
                       <a:r>
-                        <a:rPr sz="950" b="1">
+                        <a:rPr sz="919" b="1">
                           <a:solidFill>
                             <a:srgbClr val="0F172A"/>
                           </a:solidFill>
@@ -22504,13 +22590,81 @@
                     <a:lstStyle/>
                     <a:p>
                       <a:r>
-                        <a:rPr sz="950" b="1">
+                        <a:rPr sz="919" b="1">
                           <a:solidFill>
                             <a:srgbClr val="0F172A"/>
                           </a:solidFill>
                           <a:latin typeface="DM Sans"/>
                         </a:rPr>
-                        <a:t>Est. ₹</a:t>
+                        <a:t>Qty</a:t>
+                      </a:r>
+                    </a:p>
+                  </a:txBody>
+                  <a:tcPr marL="36576" marR="36576" marT="22860" marB="18288" anchor="ctr">
+                    <a:noFill/>
+                    <a:lnL w="12700">
+                      <a:noFill/>
+                    </a:lnL>
+                    <a:lnR w="12700">
+                      <a:noFill/>
+                    </a:lnR>
+                    <a:lnT w="12700">
+                      <a:noFill/>
+                    </a:lnT>
+                    <a:lnB w="12700">
+                      <a:solidFill>
+                        <a:srgbClr val="CBD5E1"/>
+                      </a:solidFill>
+                    </a:lnB>
+                  </a:tcPr>
+                </a:tc>
+                <a:tc>
+                  <a:txBody>
+                    <a:bodyPr wrap="square"/>
+                    <a:lstStyle/>
+                    <a:p>
+                      <a:r>
+                        <a:rPr sz="919" b="1">
+                          <a:solidFill>
+                            <a:srgbClr val="0F172A"/>
+                          </a:solidFill>
+                          <a:latin typeface="DM Sans"/>
+                        </a:rPr>
+                        <a:t>Source</a:t>
+                      </a:r>
+                    </a:p>
+                  </a:txBody>
+                  <a:tcPr marL="36576" marR="36576" marT="22860" marB="18288" anchor="ctr">
+                    <a:noFill/>
+                    <a:lnL w="12700">
+                      <a:noFill/>
+                    </a:lnL>
+                    <a:lnR w="12700">
+                      <a:noFill/>
+                    </a:lnR>
+                    <a:lnT w="12700">
+                      <a:noFill/>
+                    </a:lnT>
+                    <a:lnB w="12700">
+                      <a:solidFill>
+                        <a:srgbClr val="CBD5E1"/>
+                      </a:solidFill>
+                    </a:lnB>
+                  </a:tcPr>
+                </a:tc>
+                <a:tc>
+                  <a:txBody>
+                    <a:bodyPr wrap="square"/>
+                    <a:lstStyle/>
+                    <a:p>
+                      <a:r>
+                        <a:rPr sz="919" b="1">
+                          <a:solidFill>
+                            <a:srgbClr val="0F172A"/>
+                          </a:solidFill>
+                          <a:latin typeface="DM Sans"/>
+                        </a:rPr>
+                        <a:t>₹</a:t>
                       </a:r>
                     </a:p>
                   </a:txBody>
@@ -22533,20 +22687,20 @@
                   </a:tcPr>
                 </a:tc>
               </a:tr>
-              <a:tr h="429768">
+              <a:tr h="374904">
                 <a:tc>
                   <a:txBody>
                     <a:bodyPr wrap="square"/>
                     <a:lstStyle/>
                     <a:p>
                       <a:r>
-                        <a:rPr sz="1050" b="1">
+                        <a:rPr sz="980" b="1">
                           <a:solidFill>
                             <a:srgbClr val="0F172A"/>
                           </a:solidFill>
                           <a:latin typeface="DM Sans"/>
                         </a:rPr>
-                        <a:t>Reader: ESP32-C3 + ADS1115</a:t>
+                        <a:t>ESP32-C3 SuperMini</a:t>
                       </a:r>
                     </a:p>
                   </a:txBody>
@@ -22574,49 +22728,13 @@
                     <a:lstStyle/>
                     <a:p>
                       <a:r>
-                        <a:rPr sz="1050" b="0">
+                        <a:rPr sz="980" b="0">
                           <a:solidFill>
                             <a:srgbClr val="334155"/>
                           </a:solidFill>
                           <a:latin typeface="DM Sans"/>
                         </a:rPr>
-                        <a:t>450–900</a:t>
-                      </a:r>
-                    </a:p>
-                  </a:txBody>
-                  <a:tcPr marL="36576" marR="36576" marT="22860" marB="18288" anchor="ctr">
-                    <a:noFill/>
-                    <a:lnL w="7620">
-                      <a:noFill/>
-                    </a:lnL>
-                    <a:lnR w="7620">
-                      <a:noFill/>
-                    </a:lnR>
-                    <a:lnT w="7620">
-                      <a:noFill/>
-                    </a:lnT>
-                    <a:lnB w="7620">
-                      <a:solidFill>
-                        <a:srgbClr val="E2E8F0"/>
-                      </a:solidFill>
-                    </a:lnB>
-                  </a:tcPr>
-                </a:tc>
-              </a:tr>
-              <a:tr h="429768">
-                <a:tc>
-                  <a:txBody>
-                    <a:bodyPr wrap="square"/>
-                    <a:lstStyle/>
-                    <a:p>
-                      <a:r>
-                        <a:rPr sz="1050" b="1">
-                          <a:solidFill>
-                            <a:srgbClr val="0F172A"/>
-                          </a:solidFill>
-                          <a:latin typeface="DM Sans"/>
-                        </a:rPr>
-                        <a:t>Resistors, capacitor, LEDs, board</a:t>
+                        <a:t>1</a:t>
                       </a:r>
                     </a:p>
                   </a:txBody>
@@ -22644,7 +22762,455 @@
                     <a:lstStyle/>
                     <a:p>
                       <a:r>
-                        <a:rPr sz="1050" b="0">
+                        <a:rPr sz="980" b="0">
+                          <a:solidFill>
+                            <a:srgbClr val="334155"/>
+                          </a:solidFill>
+                          <a:latin typeface="DM Sans"/>
+                        </a:rPr>
+                        <a:t>Probots · quoted</a:t>
+                      </a:r>
+                    </a:p>
+                  </a:txBody>
+                  <a:tcPr marL="36576" marR="36576" marT="22860" marB="18288" anchor="ctr">
+                    <a:noFill/>
+                    <a:lnL w="7620">
+                      <a:noFill/>
+                    </a:lnL>
+                    <a:lnR w="7620">
+                      <a:noFill/>
+                    </a:lnR>
+                    <a:lnT w="7620">
+                      <a:noFill/>
+                    </a:lnT>
+                    <a:lnB w="7620">
+                      <a:solidFill>
+                        <a:srgbClr val="E2E8F0"/>
+                      </a:solidFill>
+                    </a:lnB>
+                  </a:tcPr>
+                </a:tc>
+                <a:tc>
+                  <a:txBody>
+                    <a:bodyPr wrap="square"/>
+                    <a:lstStyle/>
+                    <a:p>
+                      <a:r>
+                        <a:rPr sz="980" b="0">
+                          <a:solidFill>
+                            <a:srgbClr val="334155"/>
+                          </a:solidFill>
+                          <a:latin typeface="DM Sans"/>
+                        </a:rPr>
+                        <a:t>242</a:t>
+                      </a:r>
+                    </a:p>
+                  </a:txBody>
+                  <a:tcPr marL="36576" marR="36576" marT="22860" marB="18288" anchor="ctr">
+                    <a:noFill/>
+                    <a:lnL w="7620">
+                      <a:noFill/>
+                    </a:lnL>
+                    <a:lnR w="7620">
+                      <a:noFill/>
+                    </a:lnR>
+                    <a:lnT w="7620">
+                      <a:noFill/>
+                    </a:lnT>
+                    <a:lnB w="7620">
+                      <a:solidFill>
+                        <a:srgbClr val="E2E8F0"/>
+                      </a:solidFill>
+                    </a:lnB>
+                  </a:tcPr>
+                </a:tc>
+              </a:tr>
+              <a:tr h="374904">
+                <a:tc>
+                  <a:txBody>
+                    <a:bodyPr wrap="square"/>
+                    <a:lstStyle/>
+                    <a:p>
+                      <a:r>
+                        <a:rPr sz="980" b="1">
+                          <a:solidFill>
+                            <a:srgbClr val="0F172A"/>
+                          </a:solidFill>
+                          <a:latin typeface="DM Sans"/>
+                        </a:rPr>
+                        <a:t>ADS1115 16-bit ADC</a:t>
+                      </a:r>
+                    </a:p>
+                  </a:txBody>
+                  <a:tcPr marL="36576" marR="36576" marT="22860" marB="18288" anchor="ctr">
+                    <a:noFill/>
+                    <a:lnL w="7620">
+                      <a:noFill/>
+                    </a:lnL>
+                    <a:lnR w="7620">
+                      <a:noFill/>
+                    </a:lnR>
+                    <a:lnT w="7620">
+                      <a:noFill/>
+                    </a:lnT>
+                    <a:lnB w="7620">
+                      <a:solidFill>
+                        <a:srgbClr val="E2E8F0"/>
+                      </a:solidFill>
+                    </a:lnB>
+                  </a:tcPr>
+                </a:tc>
+                <a:tc>
+                  <a:txBody>
+                    <a:bodyPr wrap="square"/>
+                    <a:lstStyle/>
+                    <a:p>
+                      <a:r>
+                        <a:rPr sz="980" b="0">
+                          <a:solidFill>
+                            <a:srgbClr val="334155"/>
+                          </a:solidFill>
+                          <a:latin typeface="DM Sans"/>
+                        </a:rPr>
+                        <a:t>1</a:t>
+                      </a:r>
+                    </a:p>
+                  </a:txBody>
+                  <a:tcPr marL="36576" marR="36576" marT="22860" marB="18288" anchor="ctr">
+                    <a:noFill/>
+                    <a:lnL w="7620">
+                      <a:noFill/>
+                    </a:lnL>
+                    <a:lnR w="7620">
+                      <a:noFill/>
+                    </a:lnR>
+                    <a:lnT w="7620">
+                      <a:noFill/>
+                    </a:lnT>
+                    <a:lnB w="7620">
+                      <a:solidFill>
+                        <a:srgbClr val="E2E8F0"/>
+                      </a:solidFill>
+                    </a:lnB>
+                  </a:tcPr>
+                </a:tc>
+                <a:tc>
+                  <a:txBody>
+                    <a:bodyPr wrap="square"/>
+                    <a:lstStyle/>
+                    <a:p>
+                      <a:r>
+                        <a:rPr sz="980" b="0">
+                          <a:solidFill>
+                            <a:srgbClr val="334155"/>
+                          </a:solidFill>
+                          <a:latin typeface="DM Sans"/>
+                        </a:rPr>
+                        <a:t>Probots · quoted</a:t>
+                      </a:r>
+                    </a:p>
+                  </a:txBody>
+                  <a:tcPr marL="36576" marR="36576" marT="22860" marB="18288" anchor="ctr">
+                    <a:noFill/>
+                    <a:lnL w="7620">
+                      <a:noFill/>
+                    </a:lnL>
+                    <a:lnR w="7620">
+                      <a:noFill/>
+                    </a:lnR>
+                    <a:lnT w="7620">
+                      <a:noFill/>
+                    </a:lnT>
+                    <a:lnB w="7620">
+                      <a:solidFill>
+                        <a:srgbClr val="E2E8F0"/>
+                      </a:solidFill>
+                    </a:lnB>
+                  </a:tcPr>
+                </a:tc>
+                <a:tc>
+                  <a:txBody>
+                    <a:bodyPr wrap="square"/>
+                    <a:lstStyle/>
+                    <a:p>
+                      <a:r>
+                        <a:rPr sz="980" b="0">
+                          <a:solidFill>
+                            <a:srgbClr val="334155"/>
+                          </a:solidFill>
+                          <a:latin typeface="DM Sans"/>
+                        </a:rPr>
+                        <a:t>125</a:t>
+                      </a:r>
+                    </a:p>
+                  </a:txBody>
+                  <a:tcPr marL="36576" marR="36576" marT="22860" marB="18288" anchor="ctr">
+                    <a:noFill/>
+                    <a:lnL w="7620">
+                      <a:noFill/>
+                    </a:lnL>
+                    <a:lnR w="7620">
+                      <a:noFill/>
+                    </a:lnR>
+                    <a:lnT w="7620">
+                      <a:noFill/>
+                    </a:lnT>
+                    <a:lnB w="7620">
+                      <a:solidFill>
+                        <a:srgbClr val="E2E8F0"/>
+                      </a:solidFill>
+                    </a:lnB>
+                  </a:tcPr>
+                </a:tc>
+              </a:tr>
+              <a:tr h="374904">
+                <a:tc>
+                  <a:txBody>
+                    <a:bodyPr wrap="square"/>
+                    <a:lstStyle/>
+                    <a:p>
+                      <a:r>
+                        <a:rPr sz="980" b="1">
+                          <a:solidFill>
+                            <a:srgbClr val="0F172A"/>
+                          </a:solidFill>
+                          <a:latin typeface="DM Sans"/>
+                        </a:rPr>
+                        <a:t>P75-B1 pogo pins</a:t>
+                      </a:r>
+                    </a:p>
+                  </a:txBody>
+                  <a:tcPr marL="36576" marR="36576" marT="22860" marB="18288" anchor="ctr">
+                    <a:noFill/>
+                    <a:lnL w="7620">
+                      <a:noFill/>
+                    </a:lnL>
+                    <a:lnR w="7620">
+                      <a:noFill/>
+                    </a:lnR>
+                    <a:lnT w="7620">
+                      <a:noFill/>
+                    </a:lnT>
+                    <a:lnB w="7620">
+                      <a:solidFill>
+                        <a:srgbClr val="E2E8F0"/>
+                      </a:solidFill>
+                    </a:lnB>
+                  </a:tcPr>
+                </a:tc>
+                <a:tc>
+                  <a:txBody>
+                    <a:bodyPr wrap="square"/>
+                    <a:lstStyle/>
+                    <a:p>
+                      <a:r>
+                        <a:rPr sz="980" b="0">
+                          <a:solidFill>
+                            <a:srgbClr val="334155"/>
+                          </a:solidFill>
+                          <a:latin typeface="DM Sans"/>
+                        </a:rPr>
+                        <a:t>100</a:t>
+                      </a:r>
+                    </a:p>
+                  </a:txBody>
+                  <a:tcPr marL="36576" marR="36576" marT="22860" marB="18288" anchor="ctr">
+                    <a:noFill/>
+                    <a:lnL w="7620">
+                      <a:noFill/>
+                    </a:lnL>
+                    <a:lnR w="7620">
+                      <a:noFill/>
+                    </a:lnR>
+                    <a:lnT w="7620">
+                      <a:noFill/>
+                    </a:lnT>
+                    <a:lnB w="7620">
+                      <a:solidFill>
+                        <a:srgbClr val="E2E8F0"/>
+                      </a:solidFill>
+                    </a:lnB>
+                  </a:tcPr>
+                </a:tc>
+                <a:tc>
+                  <a:txBody>
+                    <a:bodyPr wrap="square"/>
+                    <a:lstStyle/>
+                    <a:p>
+                      <a:r>
+                        <a:rPr sz="980" b="0">
+                          <a:solidFill>
+                            <a:srgbClr val="334155"/>
+                          </a:solidFill>
+                          <a:latin typeface="DM Sans"/>
+                        </a:rPr>
+                        <a:t>Hubtronics · quoted</a:t>
+                      </a:r>
+                    </a:p>
+                  </a:txBody>
+                  <a:tcPr marL="36576" marR="36576" marT="22860" marB="18288" anchor="ctr">
+                    <a:noFill/>
+                    <a:lnL w="7620">
+                      <a:noFill/>
+                    </a:lnL>
+                    <a:lnR w="7620">
+                      <a:noFill/>
+                    </a:lnR>
+                    <a:lnT w="7620">
+                      <a:noFill/>
+                    </a:lnT>
+                    <a:lnB w="7620">
+                      <a:solidFill>
+                        <a:srgbClr val="E2E8F0"/>
+                      </a:solidFill>
+                    </a:lnB>
+                  </a:tcPr>
+                </a:tc>
+                <a:tc>
+                  <a:txBody>
+                    <a:bodyPr wrap="square"/>
+                    <a:lstStyle/>
+                    <a:p>
+                      <a:r>
+                        <a:rPr sz="980" b="0">
+                          <a:solidFill>
+                            <a:srgbClr val="334155"/>
+                          </a:solidFill>
+                          <a:latin typeface="DM Sans"/>
+                        </a:rPr>
+                        <a:t>354</a:t>
+                      </a:r>
+                    </a:p>
+                  </a:txBody>
+                  <a:tcPr marL="36576" marR="36576" marT="22860" marB="18288" anchor="ctr">
+                    <a:noFill/>
+                    <a:lnL w="7620">
+                      <a:noFill/>
+                    </a:lnL>
+                    <a:lnR w="7620">
+                      <a:noFill/>
+                    </a:lnR>
+                    <a:lnT w="7620">
+                      <a:noFill/>
+                    </a:lnT>
+                    <a:lnB w="7620">
+                      <a:solidFill>
+                        <a:srgbClr val="E2E8F0"/>
+                      </a:solidFill>
+                    </a:lnB>
+                  </a:tcPr>
+                </a:tc>
+              </a:tr>
+              <a:tr h="374904">
+                <a:tc>
+                  <a:txBody>
+                    <a:bodyPr wrap="square"/>
+                    <a:lstStyle/>
+                    <a:p>
+                      <a:r>
+                        <a:rPr sz="980" b="1">
+                          <a:solidFill>
+                            <a:srgbClr val="0F172A"/>
+                          </a:solidFill>
+                          <a:latin typeface="DM Sans"/>
+                        </a:rPr>
+                        <a:t>Resistors, C0G cap, LEDs, board</a:t>
+                      </a:r>
+                    </a:p>
+                  </a:txBody>
+                  <a:tcPr marL="36576" marR="36576" marT="22860" marB="18288" anchor="ctr">
+                    <a:noFill/>
+                    <a:lnL w="7620">
+                      <a:noFill/>
+                    </a:lnL>
+                    <a:lnR w="7620">
+                      <a:noFill/>
+                    </a:lnR>
+                    <a:lnT w="7620">
+                      <a:noFill/>
+                    </a:lnT>
+                    <a:lnB w="7620">
+                      <a:solidFill>
+                        <a:srgbClr val="E2E8F0"/>
+                      </a:solidFill>
+                    </a:lnB>
+                  </a:tcPr>
+                </a:tc>
+                <a:tc>
+                  <a:txBody>
+                    <a:bodyPr wrap="square"/>
+                    <a:lstStyle/>
+                    <a:p>
+                      <a:r>
+                        <a:rPr sz="980" b="0">
+                          <a:solidFill>
+                            <a:srgbClr val="334155"/>
+                          </a:solidFill>
+                          <a:latin typeface="DM Sans"/>
+                        </a:rPr>
+                        <a:t>set</a:t>
+                      </a:r>
+                    </a:p>
+                  </a:txBody>
+                  <a:tcPr marL="36576" marR="36576" marT="22860" marB="18288" anchor="ctr">
+                    <a:noFill/>
+                    <a:lnL w="7620">
+                      <a:noFill/>
+                    </a:lnL>
+                    <a:lnR w="7620">
+                      <a:noFill/>
+                    </a:lnR>
+                    <a:lnT w="7620">
+                      <a:noFill/>
+                    </a:lnT>
+                    <a:lnB w="7620">
+                      <a:solidFill>
+                        <a:srgbClr val="E2E8F0"/>
+                      </a:solidFill>
+                    </a:lnB>
+                  </a:tcPr>
+                </a:tc>
+                <a:tc>
+                  <a:txBody>
+                    <a:bodyPr wrap="square"/>
+                    <a:lstStyle/>
+                    <a:p>
+                      <a:r>
+                        <a:rPr sz="980" b="0">
+                          <a:solidFill>
+                            <a:srgbClr val="334155"/>
+                          </a:solidFill>
+                          <a:latin typeface="DM Sans"/>
+                        </a:rPr>
+                        <a:t>local / online</a:t>
+                      </a:r>
+                    </a:p>
+                  </a:txBody>
+                  <a:tcPr marL="36576" marR="36576" marT="22860" marB="18288" anchor="ctr">
+                    <a:noFill/>
+                    <a:lnL w="7620">
+                      <a:noFill/>
+                    </a:lnL>
+                    <a:lnR w="7620">
+                      <a:noFill/>
+                    </a:lnR>
+                    <a:lnT w="7620">
+                      <a:noFill/>
+                    </a:lnT>
+                    <a:lnB w="7620">
+                      <a:solidFill>
+                        <a:srgbClr val="E2E8F0"/>
+                      </a:solidFill>
+                    </a:lnB>
+                  </a:tcPr>
+                </a:tc>
+                <a:tc>
+                  <a:txBody>
+                    <a:bodyPr wrap="square"/>
+                    <a:lstStyle/>
+                    <a:p>
+                      <a:r>
+                        <a:rPr sz="980" b="0">
                           <a:solidFill>
                             <a:srgbClr val="334155"/>
                           </a:solidFill>
@@ -22673,84 +23239,14 @@
                   </a:tcPr>
                 </a:tc>
               </a:tr>
-              <a:tr h="429768">
+              <a:tr h="374904">
                 <a:tc>
                   <a:txBody>
                     <a:bodyPr wrap="square"/>
                     <a:lstStyle/>
                     <a:p>
                       <a:r>
-                        <a:rPr sz="1050" b="1">
-                          <a:solidFill>
-                            <a:srgbClr val="0F172A"/>
-                          </a:solidFill>
-                          <a:latin typeface="DM Sans"/>
-                        </a:rPr>
-                        <a:t>Pogo pins P75-B1</a:t>
-                      </a:r>
-                    </a:p>
-                  </a:txBody>
-                  <a:tcPr marL="36576" marR="36576" marT="22860" marB="18288" anchor="ctr">
-                    <a:noFill/>
-                    <a:lnL w="7620">
-                      <a:noFill/>
-                    </a:lnL>
-                    <a:lnR w="7620">
-                      <a:noFill/>
-                    </a:lnR>
-                    <a:lnT w="7620">
-                      <a:noFill/>
-                    </a:lnT>
-                    <a:lnB w="7620">
-                      <a:solidFill>
-                        <a:srgbClr val="E2E8F0"/>
-                      </a:solidFill>
-                    </a:lnB>
-                  </a:tcPr>
-                </a:tc>
-                <a:tc>
-                  <a:txBody>
-                    <a:bodyPr wrap="square"/>
-                    <a:lstStyle/>
-                    <a:p>
-                      <a:r>
-                        <a:rPr sz="1050" b="0">
-                          <a:solidFill>
-                            <a:srgbClr val="334155"/>
-                          </a:solidFill>
-                          <a:latin typeface="DM Sans"/>
-                        </a:rPr>
-                        <a:t>90–240</a:t>
-                      </a:r>
-                    </a:p>
-                  </a:txBody>
-                  <a:tcPr marL="36576" marR="36576" marT="22860" marB="18288" anchor="ctr">
-                    <a:noFill/>
-                    <a:lnL w="7620">
-                      <a:noFill/>
-                    </a:lnL>
-                    <a:lnR w="7620">
-                      <a:noFill/>
-                    </a:lnR>
-                    <a:lnT w="7620">
-                      <a:noFill/>
-                    </a:lnT>
-                    <a:lnB w="7620">
-                      <a:solidFill>
-                        <a:srgbClr val="E2E8F0"/>
-                      </a:solidFill>
-                    </a:lnB>
-                  </a:tcPr>
-                </a:tc>
-              </a:tr>
-              <a:tr h="429768">
-                <a:tc>
-                  <a:txBody>
-                    <a:bodyPr wrap="square"/>
-                    <a:lstStyle/>
-                    <a:p>
-                      <a:r>
-                        <a:rPr sz="1050" b="1">
+                        <a:rPr sz="980" b="1">
                           <a:solidFill>
                             <a:srgbClr val="0F172A"/>
                           </a:solidFill>
@@ -22784,7 +23280,75 @@
                     <a:lstStyle/>
                     <a:p>
                       <a:r>
-                        <a:rPr sz="1050" b="0">
+                        <a:rPr sz="980" b="0">
+                          <a:solidFill>
+                            <a:srgbClr val="334155"/>
+                          </a:solidFill>
+                          <a:latin typeface="DM Sans"/>
+                        </a:rPr>
+                        <a:t>set</a:t>
+                      </a:r>
+                    </a:p>
+                  </a:txBody>
+                  <a:tcPr marL="36576" marR="36576" marT="22860" marB="18288" anchor="ctr">
+                    <a:noFill/>
+                    <a:lnL w="7620">
+                      <a:noFill/>
+                    </a:lnL>
+                    <a:lnR w="7620">
+                      <a:noFill/>
+                    </a:lnR>
+                    <a:lnT w="7620">
+                      <a:noFill/>
+                    </a:lnT>
+                    <a:lnB w="7620">
+                      <a:solidFill>
+                        <a:srgbClr val="E2E8F0"/>
+                      </a:solidFill>
+                    </a:lnB>
+                  </a:tcPr>
+                </a:tc>
+                <a:tc>
+                  <a:txBody>
+                    <a:bodyPr wrap="square"/>
+                    <a:lstStyle/>
+                    <a:p>
+                      <a:r>
+                        <a:rPr sz="980" b="0">
+                          <a:solidFill>
+                            <a:srgbClr val="334155"/>
+                          </a:solidFill>
+                          <a:latin typeface="DM Sans"/>
+                        </a:rPr>
+                        <a:t>lab / local</a:t>
+                      </a:r>
+                    </a:p>
+                  </a:txBody>
+                  <a:tcPr marL="36576" marR="36576" marT="22860" marB="18288" anchor="ctr">
+                    <a:noFill/>
+                    <a:lnL w="7620">
+                      <a:noFill/>
+                    </a:lnL>
+                    <a:lnR w="7620">
+                      <a:noFill/>
+                    </a:lnR>
+                    <a:lnT w="7620">
+                      <a:noFill/>
+                    </a:lnT>
+                    <a:lnB w="7620">
+                      <a:solidFill>
+                        <a:srgbClr val="E2E8F0"/>
+                      </a:solidFill>
+                    </a:lnB>
+                  </a:tcPr>
+                </a:tc>
+                <a:tc>
+                  <a:txBody>
+                    <a:bodyPr wrap="square"/>
+                    <a:lstStyle/>
+                    <a:p>
+                      <a:r>
+                        <a:rPr sz="980" b="0">
                           <a:solidFill>
                             <a:srgbClr val="334155"/>
                           </a:solidFill>
@@ -22813,14 +23377,14 @@
                   </a:tcPr>
                 </a:tc>
               </a:tr>
-              <a:tr h="429768">
+              <a:tr h="374904">
                 <a:tc>
                   <a:txBody>
                     <a:bodyPr wrap="square"/>
                     <a:lstStyle/>
                     <a:p>
                       <a:r>
-                        <a:rPr sz="1050" b="1">
+                        <a:rPr sz="980" b="1">
                           <a:solidFill>
                             <a:srgbClr val="0F172A"/>
                           </a:solidFill>
@@ -22854,7 +23418,75 @@
                     <a:lstStyle/>
                     <a:p>
                       <a:r>
-                        <a:rPr sz="1050" b="0">
+                        <a:rPr sz="980" b="0">
+                          <a:solidFill>
+                            <a:srgbClr val="334155"/>
+                          </a:solidFill>
+                          <a:latin typeface="DM Sans"/>
+                        </a:rPr>
+                        <a:t>set</a:t>
+                      </a:r>
+                    </a:p>
+                  </a:txBody>
+                  <a:tcPr marL="36576" marR="36576" marT="22860" marB="18288" anchor="ctr">
+                    <a:noFill/>
+                    <a:lnL w="7620">
+                      <a:noFill/>
+                    </a:lnL>
+                    <a:lnR w="7620">
+                      <a:noFill/>
+                    </a:lnR>
+                    <a:lnT w="7620">
+                      <a:noFill/>
+                    </a:lnT>
+                    <a:lnB w="7620">
+                      <a:solidFill>
+                        <a:srgbClr val="E2E8F0"/>
+                      </a:solidFill>
+                    </a:lnB>
+                  </a:tcPr>
+                </a:tc>
+                <a:tc>
+                  <a:txBody>
+                    <a:bodyPr wrap="square"/>
+                    <a:lstStyle/>
+                    <a:p>
+                      <a:r>
+                        <a:rPr sz="980" b="0">
+                          <a:solidFill>
+                            <a:srgbClr val="334155"/>
+                          </a:solidFill>
+                          <a:latin typeface="DM Sans"/>
+                        </a:rPr>
+                        <a:t>lab / online</a:t>
+                      </a:r>
+                    </a:p>
+                  </a:txBody>
+                  <a:tcPr marL="36576" marR="36576" marT="22860" marB="18288" anchor="ctr">
+                    <a:noFill/>
+                    <a:lnL w="7620">
+                      <a:noFill/>
+                    </a:lnL>
+                    <a:lnR w="7620">
+                      <a:noFill/>
+                    </a:lnR>
+                    <a:lnT w="7620">
+                      <a:noFill/>
+                    </a:lnT>
+                    <a:lnB w="7620">
+                      <a:solidFill>
+                        <a:srgbClr val="E2E8F0"/>
+                      </a:solidFill>
+                    </a:lnB>
+                  </a:tcPr>
+                </a:tc>
+                <a:tc>
+                  <a:txBody>
+                    <a:bodyPr wrap="square"/>
+                    <a:lstStyle/>
+                    <a:p>
+                      <a:r>
+                        <a:rPr sz="980" b="0">
                           <a:solidFill>
                             <a:srgbClr val="334155"/>
                           </a:solidFill>
@@ -22883,14 +23515,14 @@
                   </a:tcPr>
                 </a:tc>
               </a:tr>
-              <a:tr h="429768">
+              <a:tr h="374904">
                 <a:tc>
                   <a:txBody>
                     <a:bodyPr wrap="square"/>
                     <a:lstStyle/>
                     <a:p>
                       <a:r>
-                        <a:rPr sz="1050" b="1">
+                        <a:rPr sz="980" b="1">
                           <a:solidFill>
                             <a:srgbClr val="0F172A"/>
                           </a:solidFill>
@@ -22924,7 +23556,75 @@
                     <a:lstStyle/>
                     <a:p>
                       <a:r>
-                        <a:rPr sz="1050" b="0">
+                        <a:rPr sz="980" b="0">
+                          <a:solidFill>
+                            <a:srgbClr val="334155"/>
+                          </a:solidFill>
+                          <a:latin typeface="DM Sans"/>
+                        </a:rPr>
+                        <a:t>set</a:t>
+                      </a:r>
+                    </a:p>
+                  </a:txBody>
+                  <a:tcPr marL="36576" marR="36576" marT="22860" marB="18288" anchor="ctr">
+                    <a:noFill/>
+                    <a:lnL w="7620">
+                      <a:noFill/>
+                    </a:lnL>
+                    <a:lnR w="7620">
+                      <a:noFill/>
+                    </a:lnR>
+                    <a:lnT w="7620">
+                      <a:noFill/>
+                    </a:lnT>
+                    <a:lnB w="7620">
+                      <a:solidFill>
+                        <a:srgbClr val="E2E8F0"/>
+                      </a:solidFill>
+                    </a:lnB>
+                  </a:tcPr>
+                </a:tc>
+                <a:tc>
+                  <a:txBody>
+                    <a:bodyPr wrap="square"/>
+                    <a:lstStyle/>
+                    <a:p>
+                      <a:r>
+                        <a:rPr sz="980" b="0">
+                          <a:solidFill>
+                            <a:srgbClr val="334155"/>
+                          </a:solidFill>
+                          <a:latin typeface="DM Sans"/>
+                        </a:rPr>
+                        <a:t>local</a:t>
+                      </a:r>
+                    </a:p>
+                  </a:txBody>
+                  <a:tcPr marL="36576" marR="36576" marT="22860" marB="18288" anchor="ctr">
+                    <a:noFill/>
+                    <a:lnL w="7620">
+                      <a:noFill/>
+                    </a:lnL>
+                    <a:lnR w="7620">
+                      <a:noFill/>
+                    </a:lnR>
+                    <a:lnT w="7620">
+                      <a:noFill/>
+                    </a:lnT>
+                    <a:lnB w="7620">
+                      <a:solidFill>
+                        <a:srgbClr val="E2E8F0"/>
+                      </a:solidFill>
+                    </a:lnB>
+                  </a:tcPr>
+                </a:tc>
+                <a:tc>
+                  <a:txBody>
+                    <a:bodyPr wrap="square"/>
+                    <a:lstStyle/>
+                    <a:p>
+                      <a:r>
+                        <a:rPr sz="980" b="0">
                           <a:solidFill>
                             <a:srgbClr val="334155"/>
                           </a:solidFill>
@@ -22953,20 +23653,20 @@
                   </a:tcPr>
                 </a:tc>
               </a:tr>
-              <a:tr h="429768">
+              <a:tr h="374904">
                 <a:tc>
                   <a:txBody>
                     <a:bodyPr wrap="square"/>
                     <a:lstStyle/>
                     <a:p>
                       <a:r>
-                        <a:rPr sz="1050" b="1">
+                        <a:rPr sz="980" b="1">
                           <a:solidFill>
                             <a:srgbClr val="0F172A"/>
                           </a:solidFill>
                           <a:latin typeface="DM Sans"/>
                         </a:rPr>
-                        <a:t>Total (estimate)</a:t>
+                        <a:t>Total</a:t>
                       </a:r>
                     </a:p>
                   </a:txBody>
@@ -22994,13 +23694,81 @@
                     <a:lstStyle/>
                     <a:p>
                       <a:r>
-                        <a:rPr sz="1050" b="1">
+                        <a:rPr sz="980" b="0">
+                          <a:solidFill>
+                            <a:srgbClr val="334155"/>
+                          </a:solidFill>
+                          <a:latin typeface="DM Sans"/>
+                        </a:rPr>
+                        <a:t/>
+                      </a:r>
+                    </a:p>
+                  </a:txBody>
+                  <a:tcPr marL="36576" marR="36576" marT="22860" marB="18288" anchor="ctr">
+                    <a:noFill/>
+                    <a:lnL w="7620">
+                      <a:noFill/>
+                    </a:lnL>
+                    <a:lnR w="7620">
+                      <a:noFill/>
+                    </a:lnR>
+                    <a:lnT w="7620">
+                      <a:noFill/>
+                    </a:lnT>
+                    <a:lnB w="7620">
+                      <a:solidFill>
+                        <a:srgbClr val="E2E8F0"/>
+                      </a:solidFill>
+                    </a:lnB>
+                  </a:tcPr>
+                </a:tc>
+                <a:tc>
+                  <a:txBody>
+                    <a:bodyPr wrap="square"/>
+                    <a:lstStyle/>
+                    <a:p>
+                      <a:r>
+                        <a:rPr sz="980" b="0">
+                          <a:solidFill>
+                            <a:srgbClr val="334155"/>
+                          </a:solidFill>
+                          <a:latin typeface="DM Sans"/>
+                        </a:rPr>
+                        <a:t/>
+                      </a:r>
+                    </a:p>
+                  </a:txBody>
+                  <a:tcPr marL="36576" marR="36576" marT="22860" marB="18288" anchor="ctr">
+                    <a:noFill/>
+                    <a:lnL w="7620">
+                      <a:noFill/>
+                    </a:lnL>
+                    <a:lnR w="7620">
+                      <a:noFill/>
+                    </a:lnR>
+                    <a:lnT w="7620">
+                      <a:noFill/>
+                    </a:lnT>
+                    <a:lnB w="7620">
+                      <a:solidFill>
+                        <a:srgbClr val="E2E8F0"/>
+                      </a:solidFill>
+                    </a:lnB>
+                  </a:tcPr>
+                </a:tc>
+                <a:tc>
+                  <a:txBody>
+                    <a:bodyPr wrap="square"/>
+                    <a:lstStyle/>
+                    <a:p>
+                      <a:r>
+                        <a:rPr sz="980" b="1">
                           <a:solidFill>
                             <a:srgbClr val="0F172A"/>
                           </a:solidFill>
                           <a:latin typeface="DM Sans"/>
                         </a:rPr>
-                        <a:t>≈ 2,078–7,361</a:t>
+                        <a:t>≈ 2,259–6,942</a:t>
                       </a:r>
                     </a:p>
                   </a:txBody>
@@ -23263,7 +24031,7 @@
                 </a:solidFill>
                 <a:latin typeface="DM Sans"/>
               </a:rPr>
-              <a:t>diaper wetness strips exist⁴; our novelty is the change-line placement and order check.</a:t>
+              <a:t>diaper strips⁴ and visual change indicators¹⁴ exist; our novelty is reading the change line electrically, with an order check.</a:t>
             </a:r>
             <a:endParaRPr/>
           </a:p>
@@ -23580,7 +24348,7 @@
                 </a:solidFill>
                 <a:latin typeface="DM Sans"/>
               </a:rPr>
-              <a:t>broad electrotherapy bandage → one job: is it full?</a:t>
+              <a:t>therapy bandage (already shown in labs⁵) → one job: is it full?</a:t>
             </a:r>
           </a:p>
           <a:p>
@@ -23617,7 +24385,7 @@
                 </a:solidFill>
                 <a:latin typeface="DM Sans"/>
               </a:rPr>
-              <a:t>two-zone strip (4.36) beat one zone (4.29).</a:t>
+              <a:t>two-zone strip (4.36) beat one zone (4.29): it spots leaks.</a:t>
             </a:r>
           </a:p>
           <a:p>
@@ -23645,7 +24413,7 @@
                 </a:solidFill>
                 <a:latin typeface="DM Sans"/>
               </a:rPr>
-              <a:t>Why:  </a:t>
+              <a:t>Kept:  </a:t>
             </a:r>
             <a:r>
               <a:rPr sz="1200" b="0">
@@ -23654,7 +24422,7 @@
                 </a:solidFill>
                 <a:latin typeface="DM Sans"/>
               </a:rPr>
-              <a:t>its order check tells a real front from a leak.</a:t>
+              <a:t>Stage 1's Bluetooth telemetry, now a state broadcast.</a:t>
             </a:r>
           </a:p>
           <a:p>
@@ -23682,7 +24450,7 @@
                 </a:solidFill>
                 <a:latin typeface="DM Sans"/>
               </a:rPr>
-              <a:t>Simplify:  </a:t>
+              <a:t>Corrected:  </a:t>
             </a:r>
             <a:r>
               <a:rPr sz="1200" b="0">
@@ -23691,7 +24459,7 @@
                 </a:solidFill>
                 <a:latin typeface="DM Sans"/>
               </a:rPr>
-              <a:t>4 zones → 2 until E2 proves finer lines.</a:t>
+              <a:t>Stage 1 called Kapton 'medical-grade'; DuPont cautions otherwise¹¹.</a:t>
             </a:r>
           </a:p>
           <a:p>
@@ -23984,7 +24752,7 @@
                 </a:solidFill>
                 <a:latin typeface="DM Sans"/>
               </a:rPr>
-              <a:t>4-Month Plan: each gate must pass before the next step</a:t>
+              <a:t>4-Month Plan on the programme's own dates: each gate must pass first</a:t>
             </a:r>
             <a:endParaRPr/>
           </a:p>
@@ -24325,7 +25093,7 @@
                 </a:solidFill>
                 <a:latin typeface="DM Sans"/>
               </a:rPr>
-              <a:t>E2 laser tests; build and bench-test the reader.</a:t>
+              <a:t>E2 laser tests (G1); build and bench-test the reader (G2).</a:t>
             </a:r>
           </a:p>
           <a:p>
@@ -24353,7 +25121,7 @@
                 </a:solidFill>
                 <a:latin typeface="DM Sans"/>
               </a:rPr>
-              <a:t>Dec:  </a:t>
+              <a:t>Early Dec:  </a:t>
             </a:r>
             <a:r>
               <a:rPr sz="1150" b="0">
@@ -24362,7 +25130,7 @@
                 </a:solidFill>
                 <a:latin typeface="DM Sans"/>
               </a:rPr>
-              <a:t>strip v0.2; print clamp; contact and bend tests.</a:t>
+              <a:t>first strips on a dressing; 3-min prototype video.</a:t>
             </a:r>
           </a:p>
         </p:txBody>
@@ -24411,7 +25179,7 @@
                 </a:solidFill>
                 <a:latin typeface="DM Sans"/>
               </a:rPr>
-              <a:t>Jan:  </a:t>
+              <a:t>Dec:  </a:t>
             </a:r>
             <a:r>
               <a:rPr sz="1150" b="0">
@@ -24420,7 +25188,7 @@
                 </a:solidFill>
                 <a:latin typeface="DM Sans"/>
               </a:rPr>
-              <a:t>strips on real dressings with simulated exudate.</a:t>
+              <a:t>strip v0.2 + printed clamp; E4 wet tests (G3).</a:t>
             </a:r>
           </a:p>
           <a:p>
@@ -24448,7 +25216,7 @@
                 </a:solidFill>
                 <a:latin typeface="DM Sans"/>
               </a:rPr>
-              <a:t>Feb:  </a:t>
+              <a:t>Jan:  </a:t>
             </a:r>
             <a:r>
               <a:rPr sz="1150" b="0">
@@ -24457,7 +25225,7 @@
                 </a:solidFill>
                 <a:latin typeface="DM Sans"/>
               </a:rPr>
-              <a:t>repeatability; integrated bench demo.</a:t>
+              <a:t>repeatability; virtual semi-final with a live demo.</a:t>
             </a:r>
           </a:p>
           <a:p>
@@ -24494,7 +25262,7 @@
                 </a:solidFill>
                 <a:latin typeface="DM Sans"/>
               </a:rPr>
-              <a:t>OK → CHANGE shown live on a dressing.</a:t>
+              <a:t>OK → CHANGE live on a dressing at IIT Indore.</a:t>
             </a:r>
           </a:p>
         </p:txBody>
@@ -25688,7 +26456,7 @@
                 </a:solidFill>
                 <a:latin typeface="DM Sans"/>
               </a:rPr>
-              <a:t>battery pod with BLE; strips per dressing model.</a:t>
+              <a:t>battery pod; phone app on the BLE broadcast; strips per dressing.</a:t>
             </a:r>
           </a:p>
           <a:p>
@@ -26860,7 +27628,7 @@
                 </a:solidFill>
                 <a:latin typeface="DM Sans"/>
               </a:rPr>
-              <a:t>the 'change now' sign is visual, and the dressing is covered.</a:t>
+              <a:t>the maker's 'change now' sign is visual¹⁴, and the dressing is covered.</a:t>
             </a:r>
           </a:p>
           <a:p>
@@ -27795,7 +28563,7 @@
                           </a:solidFill>
                           <a:latin typeface="DM Sans"/>
                         </a:rPr>
-                        <a:t>ADS1115 16-bit · ESP32-C3</a:t>
+                        <a:t>ADS1115 16-bit (I²C) · ESP32-C3</a:t>
                       </a:r>
                     </a:p>
                   </a:txBody>
@@ -27935,7 +28703,7 @@
                           </a:solidFill>
                           <a:latin typeface="DM Sans"/>
                         </a:rPr>
-                        <a:t>LEDs + USB log (BLE later)</a:t>
+                        <a:t>LEDs · USB log · BLE broadcast</a:t>
                       </a:r>
                     </a:p>
                   </a:txBody>

--- a/FINAL_SUBMISSION/Vishwakarma_Stage2_Final.pptx
+++ b/FINAL_SUBMISSION/Vishwakarma_Stage2_Final.pptx
@@ -9,21 +9,22 @@
   </p:notesMasterIdLst>
   <p:sldIdLst>
     <p:sldId id="256" r:id="rId7"/>
+    <p:sldId id="276" r:id="rId47"/>
     <p:sldId id="259" r:id="rId10"/>
-    <p:sldId id="276" r:id="rId47"/>
     <p:sldId id="277" r:id="rId48"/>
+    <p:sldId id="278" r:id="rId49"/>
     <p:sldId id="261" r:id="rId12"/>
-    <p:sldId id="278" r:id="rId49"/>
+    <p:sldId id="279" r:id="rId50"/>
     <p:sldId id="263" r:id="rId14"/>
-    <p:sldId id="279" r:id="rId50"/>
+    <p:sldId id="280" r:id="rId51"/>
     <p:sldId id="265" r:id="rId16"/>
-    <p:sldId id="280" r:id="rId51"/>
+    <p:sldId id="281" r:id="rId52"/>
     <p:sldId id="267" r:id="rId18"/>
-    <p:sldId id="281" r:id="rId52"/>
+    <p:sldId id="282" r:id="rId53"/>
     <p:sldId id="270" r:id="rId21"/>
-    <p:sldId id="282" r:id="rId53"/>
+    <p:sldId id="283" r:id="rId54"/>
     <p:sldId id="273" r:id="rId24"/>
-    <p:sldId id="283" r:id="rId54"/>
+    <p:sldId id="284" r:id="rId55"/>
     <p:sldId id="274" r:id="rId25"/>
     <p:sldId id="275" r:id="rId26"/>
   </p:sldIdLst>
@@ -959,7 +960,7 @@
           <a:lstStyle/>
           <a:p>
             <a:r>
-              <a:t>Native files in the repository: .SLDPRT, .SLDASM, .SLDDRW, .STEP, .kicad_sch, .ino, .dxf. CAD re-check: 99 pass, 0 fail. KiCad ERC log: 0 violations. Faculty sign-off follows the E2 review. We do not stage or generate lab photos.</a:t>
+              <a:t>Native files in the repository: .SLDPRT, .SLDASM, .SLDDRW, .STEP, .kicad_sch, .ino, .dxf. Every commit since 14 Oct carries a Co-Authored-By: Claude line; the lab notebook says which entries were AI-drafted. TEAM TO DO: replace the two lab-photo placeholders (ID badges visible) and the link. Faculty sign-off only if a mentor is attached.</a:t>
             </a:r>
           </a:p>
         </p:txBody>
@@ -1315,7 +1316,7 @@
           <a:lstStyle/>
           <a:p>
             <a:r>
-              <a:t>Generators: 1_presentation/render_cad.py and make_figures.py.</a:t>
+              <a:t>Generators: 1_presentation/render_cad.py and make_figures.py. Photos: 1_presentation/team_photos/.</a:t>
             </a:r>
           </a:p>
         </p:txBody>
@@ -1408,7 +1409,7 @@
           <a:lstStyle/>
           <a:p>
             <a:r>
-              <a:t>Sources: Milne 2016 [1]; Dealey 2006 [6] (0.10 and 0.21 g/cm²/24 h by one method, mean 1.3 by the other); UK survey of &gt;200 patients commissioned by Mölnlycke, 2018 [13]: average dressing time 18 min, about 5 changes a week (patient-reported, industry-sponsored); Truemeds listings [15]: Mepilex Lite 10x10 cm Rs 242, Mepilex Border 10x10 cm Rs 514 (pack size unclear). Not yet measured: nurse minutes per check in Indian clinics.</a:t>
+              <a:t>TEAM TO DO: replace the two photo placeholders (right-click &gt; Change Picture, or put member1/member2 photos in 1_presentation/team_photos/ and rebuild) and the [team to add] role fields. Counts: PROJECT_AUDIT.md (re-run 19 Oct). Template T2: Project Overview = title, Team ID, track, 1-line core innovation.</a:t>
             </a:r>
           </a:p>
         </p:txBody>
@@ -1466,7 +1467,7 @@
           <a:lstStyle/>
           <a:p>
             <a:r>
-              <a:t>Targets and projections, not results. Payback: strip &lt;= Rs 100 (estimate) / dressing Rs 242-514 [15] = 0.19-0.41, i.e. one avoided change in every 2.4-5.1 dressings. 'Up to 44.9 %' assumes every change waits for CHANGE; some changes are made for other clinical reasons, so the real figure is lower and must be measured. Bluetooth: compiled, not yet tested on hardware (bench test T11). FAULT covers a broken strip or reader error.</a:t>
+              <a:t>Sources: Milne 2016 [1]; Dealey 2006 [6] (0.10 and 0.21 g/cm²/24 h by one method, mean 1.3 by the other); UK survey of &gt;200 patients commissioned by Mölnlycke, 2018 [13]: average dressing time 18 min, about 5 changes a week (patient-reported, industry-sponsored); Truemeds listings [15]: Mepilex Lite 10x10 cm Rs 242, Mepilex Border 10x10 cm Rs 514 (pack size unclear). Not yet measured: nurse minutes per check in Indian clinics.</a:t>
             </a:r>
           </a:p>
         </p:txBody>
@@ -1524,7 +1525,7 @@
           <a:lstStyle/>
           <a:p>
             <a:r>
-              <a:t>ADS1115 single-shot 128 SPS, auto-range; A1 reads the 3V3 rail. Rx from both phases, averaged, scaled by the check resistor (+/-5 % else FAULT), minus 2 kOhm protection. Idle pins high-Z; zones frozen during FAULT. Compiles for ESP32-C3 with 0 warnings (650,349 bytes, 49 % of flash, with Bluetooth). BLE payload: state, wet flags, scan number, both zone resistances; unencrypted, test company ID 0xFFFF, bench only. Decoder: 7_firmware/tools/decode_beacon.py.</a:t>
+              <a:t>Targets and projections, not results. Payback: strip &lt;= Rs 100 (estimate) / dressing Rs 242-514 [15] = 0.19-0.41, i.e. one avoided change in every 2.4-5.1 dressings. 'Up to 44.9 %' assumes every change waits for CHANGE; some changes are made for other clinical reasons, so the real figure is lower and must be measured. Bluetooth: compiled, not yet tested on hardware (bench test T11). FAULT covers a broken strip or reader error.</a:t>
             </a:r>
           </a:p>
         </p:txBody>
@@ -1582,7 +1583,7 @@
           <a:lstStyle/>
           <a:p>
             <a:r>
-              <a:t>Graphene not confirmed until Raman. Machine (LaserCAD config): 1200 x 900 mm bed, 20 kHz PWM, 98 % cap. Logged per layer: min/max power, speed, 0.1 mm interval, passes, scan direction, focus, tube current. E2 = 4 bracket coupons (power 10/12/14, speed x0.67/1/1.5) + 3 resolution coupons.</a:t>
+              <a:t>ADS1115 single-shot 128 SPS, auto-range; A1 reads the 3V3 rail. Rx from both phases, averaged, scaled by the check resistor (+/-5 % else FAULT), minus 2 kOhm protection. Idle pins high-Z; zones frozen during FAULT. Compiles for ESP32-C3 with 0 warnings (650,349 bytes, 49 % of flash, with Bluetooth). BLE payload: state, wet flags, scan number, both zone resistances; unencrypted, test company ID 0xFFFF, bench only. Decoder: 7_firmware/tools/decode_beacon.py.</a:t>
             </a:r>
           </a:p>
         </p:txBody>
@@ -1640,7 +1641,7 @@
           <a:lstStyle/>
           <a:p>
             <a:r>
-              <a:t>Line items: 6_electronics/bom_v0_1.csv (23 lines, each traced to the file that needs it). First order: silver paint, 1 % resistor set, 0.1 % 100 kOhm resistors, ADS1115, ESP32-C3. Quoted 19 Oct 2026 incl. GST: Probots PRO4607 ESP32-C3 SuperMini Rs 242; Probots PRO789 ADS1115 Rs 125; Hubtronics 05880 P75-B1 pack of 100 Rs 354. Total leaves out the borrowed meter, USB cable and E4 dressings. Ranges = sum of min/max estimates.</a:t>
+              <a:t>Graphene not confirmed until Raman. Machine (LaserCAD config): 1200 x 900 mm bed, 20 kHz PWM, 98 % cap. Logged per layer: min/max power, speed, 0.1 mm interval, passes, scan direction, focus, tube current. E2 = 4 bracket coupons (power 10/12/14, speed x0.67/1/1.5) + 3 resolution coupons.</a:t>
             </a:r>
           </a:p>
         </p:txBody>
@@ -1698,7 +1699,7 @@
           <a:lstStyle/>
           <a:p>
             <a:r>
-              <a:t>5 concepts scored on 13 weighted criteria (3_decisions/decision_matrix.md). Verification fixes: seal moved off the clamp; STEP was in cm, now mm; drawings rebuilt first-angle. FMEA F04 (cracked sense lead reads dry, RPN 224). 4 zones were cut to 2 until E2 proves finer lines. Stage 1 also estimated '60 % fewer changes'; we dropped that number (no source). IP: concept and files are the team's own; no patent filed yet.</a:t>
+              <a:t>Line items: 6_electronics/bom_v0_1.csv (23 lines, each traced to the file that needs it). First order: silver paint, 1 % resistor set, 0.1 % 100 kOhm resistors, ADS1115, ESP32-C3. Quoted 19 Oct 2026 incl. GST: Probots PRO4607 ESP32-C3 SuperMini Rs 242; Probots PRO789 ADS1115 Rs 125; Hubtronics 05880 P75-B1 pack of 100 Rs 354. Total leaves out the borrowed meter, USB cable and E4 dressings. Ranges = sum of min/max estimates.</a:t>
             </a:r>
           </a:p>
         </p:txBody>
@@ -1756,7 +1757,7 @@
           <a:lstStyle/>
           <a:p>
             <a:r>
-              <a:t>Gates: G1 E2 Rs CV &lt;= 20 %; G2 reader bench test T0-T11; G3 E4 alert within +/-10 %; G4 live demo with logged raw data. Programme dates (vishwakarma-awards.org and the Internshala listing, read 19 Oct 2026): prototype video + updated PPT in December (listing: 4 Dec 2026); Health Tech semi-final interviews in January; IIT Indore bootcamp and finale 26 Jan - 1 Feb 2027. No patient use. Raman/SEM via a partner lab if access is granted.</a:t>
+              <a:t>5 concepts scored on 13 weighted criteria (3_decisions/decision_matrix.md). Verification fixes: seal moved off the clamp; STEP was in cm, now mm; drawings rebuilt first-angle. FMEA F04 (cracked sense lead reads dry, RPN 224). 4 zones were cut to 2 until E2 proves finer lines. Stage 1 also estimated '60 % fewer changes'; we dropped that number (no source). IP: concept and files are the team's own; no patent filed yet.</a:t>
             </a:r>
           </a:p>
         </p:txBody>
@@ -1814,6 +1815,64 @@
           <a:lstStyle/>
           <a:p>
             <a:r>
+              <a:t>Gates: G1 E2 Rs CV &lt;= 20 %; G2 reader bench test T0-T11; G3 E4 alert within +/-10 %; G4 live demo with logged raw data. Programme dates (vishwakarma-awards.org and the Internshala listing, read 19 Oct 2026): prototype video + updated PPT in December (listing: 4 Dec 2026); Health Tech semi-final interviews in January; IIT Indore bootcamp and finale 26 Jan - 1 Feb 2027. No patient use. Raman/SEM via a partner lab if access is granted.</a:t>
+            </a:r>
+          </a:p>
+        </p:txBody>
+      </p:sp>
+    </p:spTree>
+  </p:cSld>
+  <p:clrMapOvr>
+    <a:masterClrMapping/>
+  </p:clrMapOvr>
+</p:notes>
+</file>
+
+<file path=ppt/notesSlides/notesSlide29.xml><?xml version="1.0" encoding="utf-8"?>
+<p:notes xmlns:a="http://schemas.openxmlformats.org/drawingml/2006/main" xmlns:p="http://schemas.openxmlformats.org/presentationml/2006/main" xmlns:r="http://schemas.openxmlformats.org/officeDocument/2006/relationships">
+  <p:cSld>
+    <p:spTree>
+      <p:nvGrpSpPr>
+        <p:cNvPr id="1" name=""/>
+        <p:cNvGrpSpPr/>
+        <p:nvPr/>
+      </p:nvGrpSpPr>
+      <p:grpSpPr>
+        <a:xfrm>
+          <a:off x="0" y="0"/>
+          <a:ext cx="0" cy="0"/>
+          <a:chOff x="0" y="0"/>
+          <a:chExt cx="0" cy="0"/>
+        </a:xfrm>
+      </p:grpSpPr>
+      <p:sp>
+        <p:nvSpPr>
+          <p:cNvPr id="2" name="Slide Image Placeholder 1"/>
+          <p:cNvSpPr>
+            <a:spLocks noGrp="1"/>
+          </p:cNvSpPr>
+          <p:nvPr>
+            <p:ph type="sldImg" idx="2"/>
+          </p:nvPr>
+        </p:nvSpPr>
+        <p:spPr/>
+      </p:sp>
+      <p:sp>
+        <p:nvSpPr>
+          <p:cNvPr id="3" name="Notes Placeholder 2"/>
+          <p:cNvSpPr>
+            <a:spLocks noGrp="1"/>
+          </p:cNvSpPr>
+          <p:nvPr>
+            <p:ph type="body" idx="1"/>
+          </p:nvPr>
+        </p:nvSpPr>
+        <p:spPr/>
+        <p:txBody>
+          <a:bodyPr/>
+          <a:lstStyle/>
+          <a:p>
+            <a:r>
               <a:t>Future scope details: 4_sensor_strip/e2_experiment/E2_measurements_and_unknowns.md.</a:t>
             </a:r>
           </a:p>
@@ -2046,7 +2105,7 @@
           <a:lstStyle/>
           <a:p>
             <a:r>
-              <a:t>Hand calculations (calc_mechanical.py): 1.48 mm pin compression, 2.9 N total, lid deflection 11 um, tolerance stack 0.49 mm vs +/-1.35 mm, 0.62 % bending strain at 10 mm radius, 20 MPa vs 231 MPa at the dowels. No FEA: loads &lt; 3 N. 9 parts, 1 assembly, 7 A3 drawings, STEP. Seal clash was 9.0 mm3; now 0.</a:t>
+              <a:t>Hand calculations: 5_cad/calc_mechanical_report.md (pin rate 0.49 N/mm from the P75-B1 listing; 1.48 mm compression; lid 4.0 mm PETG, span 35.7 mm, simply supported; tolerance stack worst case 0.49 mm, RSS 0.25 mm; t/2R strain; 10 N tug at the dowels). No FEA: loads are under 3 N, so stresses are far below PETG limits; SolidWorks Simulation is available if the judges want plots. CAD checks: 5_cad/verify_cad_report.md.</a:t>
             </a:r>
           </a:p>
         </p:txBody>
@@ -11958,7 +12017,7 @@
                 </a:solidFill>
                 <a:latin typeface="Poppins SemiBold"/>
               </a:rPr>
-              <a:t>Dermasense: a laser-written strip that reads a dressing's own 'change line'</a:t>
+              <a:t>Dermasense: a laser-written strip designed to read a dressing's own 'change line'</a:t>
             </a:r>
           </a:p>
         </p:txBody>
@@ -11998,7 +12057,7 @@
                 </a:solidFill>
                 <a:latin typeface="DM Sans"/>
               </a:rPr>
-              <a:t>Soham Prabhakar Kadu · Bhakti Ajay Kadam</a:t>
+              <a:t>Soham Prabhakar Kadu · Bhakti Ajay Kadam · Sanjivani University</a:t>
             </a:r>
           </a:p>
           <a:p>
@@ -12382,7 +12441,7 @@
                 </a:solidFill>
                 <a:latin typeface="DM Sans"/>
               </a:rPr>
-              <a:t>Figure: our KiCad 10 schematic of the reader (exported by kicad-cli).</a:t>
+              <a:t>Figure: zone-C path drawn from our netlist, above our real KiCad 10 sheet.</a:t>
             </a:r>
             <a:endParaRPr/>
           </a:p>
@@ -12456,7 +12515,7 @@
                 </a:solidFill>
                 <a:latin typeface="DM Sans"/>
               </a:rPr>
-              <a:t>Key Connections</a:t>
+              <a:t>Pin &amp; Net Map (from the KiCad netlist)</a:t>
             </a:r>
             <a:endParaRPr/>
           </a:p>
@@ -12588,220 +12647,1081 @@
         </p:blipFill>
         <p:spPr>
           <a:xfrm>
-            <a:off x="539496" y="1518742"/>
-            <a:ext cx="5413248" cy="2778098"/>
+            <a:off x="539496" y="970048"/>
+            <a:ext cx="5413248" cy="3875487"/>
           </a:xfrm>
           <a:prstGeom prst="rect">
             <a:avLst/>
           </a:prstGeom>
         </p:spPr>
       </p:pic>
-      <p:sp>
-        <p:nvSpPr>
-          <p:cNvPr id="328" name="TextBox 327"/>
-          <p:cNvSpPr txBox="1"/>
-          <p:nvPr/>
-        </p:nvSpPr>
-        <p:spPr>
-          <a:xfrm>
-            <a:off x="6464808" y="1572768"/>
-            <a:ext cx="5029200" cy="3657600"/>
-          </a:xfrm>
-          <a:prstGeom prst="rect">
-            <a:avLst/>
-          </a:prstGeom>
-          <a:noFill/>
-        </p:spPr>
-        <p:txBody>
-          <a:bodyPr wrap="square" lIns="18288" rIns="18288" tIns="9144" bIns="9144" anchor="t"/>
-          <a:lstStyle/>
-          <a:p>
-            <a:pPr>
-              <a:lnSpc>
-                <a:spcPct val="108000"/>
-              </a:lnSpc>
-              <a:spcAft>
-                <a:spcPts val="1400"/>
-              </a:spcAft>
-            </a:pPr>
-            <a:r>
-              <a:rPr sz="1200" b="0">
-                <a:solidFill>
-                  <a:srgbClr val="059669"/>
-                </a:solidFill>
-                <a:latin typeface="DM Sans"/>
-              </a:rPr>
-              <a:t>▪  </a:t>
-            </a:r>
-            <a:r>
-              <a:rPr sz="1200" b="1">
-                <a:solidFill>
-                  <a:srgbClr val="0F172A"/>
-                </a:solidFill>
-                <a:latin typeface="DM Sans"/>
-              </a:rPr>
-              <a:t>Drive:  </a:t>
-            </a:r>
-            <a:r>
-              <a:rPr sz="1200" b="0">
-                <a:solidFill>
-                  <a:srgbClr val="334155"/>
-                </a:solidFill>
-                <a:latin typeface="DM Sans"/>
-              </a:rPr>
-              <a:t>GPIO3 / GPIO4 → 1 kΩ → zones C, A.</a:t>
-            </a:r>
-          </a:p>
-          <a:p>
-            <a:pPr>
-              <a:lnSpc>
-                <a:spcPct val="108000"/>
-              </a:lnSpc>
-              <a:spcAft>
-                <a:spcPts val="1400"/>
-              </a:spcAft>
-            </a:pPr>
-            <a:r>
-              <a:rPr sz="1200" b="0">
-                <a:solidFill>
-                  <a:srgbClr val="059669"/>
-                </a:solidFill>
-                <a:latin typeface="DM Sans"/>
-              </a:rPr>
-              <a:t>▪  </a:t>
-            </a:r>
-            <a:r>
-              <a:rPr sz="1200" b="1">
-                <a:solidFill>
-                  <a:srgbClr val="0F172A"/>
-                </a:solidFill>
-                <a:latin typeface="DM Sans"/>
-              </a:rPr>
-              <a:t>Sense:  </a:t>
-            </a:r>
-            <a:r>
-              <a:rPr sz="1200" b="0">
-                <a:solidFill>
-                  <a:srgbClr val="334155"/>
-                </a:solidFill>
-                <a:latin typeface="DM Sans"/>
-              </a:rPr>
-              <a:t>node N → 100 kΩ reference → ADC A0.</a:t>
-            </a:r>
-          </a:p>
-          <a:p>
-            <a:pPr>
-              <a:lnSpc>
-                <a:spcPct val="108000"/>
-              </a:lnSpc>
-              <a:spcAft>
-                <a:spcPts val="1400"/>
-              </a:spcAft>
-            </a:pPr>
-            <a:r>
-              <a:rPr sz="1200" b="0">
-                <a:solidFill>
-                  <a:srgbClr val="059669"/>
-                </a:solidFill>
-                <a:latin typeface="DM Sans"/>
-              </a:rPr>
-              <a:t>▪  </a:t>
-            </a:r>
-            <a:r>
-              <a:rPr sz="1200" b="1">
-                <a:solidFill>
-                  <a:srgbClr val="0F172A"/>
-                </a:solidFill>
-                <a:latin typeface="DM Sans"/>
-              </a:rPr>
-              <a:t>Check:  </a:t>
-            </a:r>
-            <a:r>
-              <a:rPr sz="1200" b="0">
-                <a:solidFill>
-                  <a:srgbClr val="334155"/>
-                </a:solidFill>
-                <a:latin typeface="DM Sans"/>
-              </a:rPr>
-              <a:t>100 kΩ on GPIO20; strip loop on GPIO5.</a:t>
-            </a:r>
-          </a:p>
-          <a:p>
-            <a:pPr>
-              <a:lnSpc>
-                <a:spcPct val="108000"/>
-              </a:lnSpc>
-              <a:spcAft>
-                <a:spcPts val="1400"/>
-              </a:spcAft>
-            </a:pPr>
-            <a:r>
-              <a:rPr sz="1200" b="0">
-                <a:solidFill>
-                  <a:srgbClr val="059669"/>
-                </a:solidFill>
-                <a:latin typeface="DM Sans"/>
-              </a:rPr>
-              <a:t>▪  </a:t>
-            </a:r>
-            <a:r>
-              <a:rPr sz="1200" b="1">
-                <a:solidFill>
-                  <a:srgbClr val="0F172A"/>
-                </a:solidFill>
-                <a:latin typeface="DM Sans"/>
-              </a:rPr>
-              <a:t>Strip:  </a:t>
-            </a:r>
-            <a:r>
-              <a:rPr sz="1200" b="0">
-                <a:solidFill>
-                  <a:srgbClr val="334155"/>
-                </a:solidFill>
-                <a:latin typeface="DM Sans"/>
-              </a:rPr>
-              <a:t>4 pogo pins on 3 × 6 mm pads.</a:t>
-            </a:r>
-          </a:p>
-          <a:p>
-            <a:pPr>
-              <a:lnSpc>
-                <a:spcPct val="108000"/>
-              </a:lnSpc>
-              <a:spcAft>
-                <a:spcPts val="1400"/>
-              </a:spcAft>
-            </a:pPr>
-            <a:r>
-              <a:rPr sz="1200" b="0">
-                <a:solidFill>
-                  <a:srgbClr val="059669"/>
-                </a:solidFill>
-                <a:latin typeface="DM Sans"/>
-              </a:rPr>
-              <a:t>▪  </a:t>
-            </a:r>
-            <a:r>
-              <a:rPr sz="1200" b="1">
-                <a:solidFill>
-                  <a:srgbClr val="0F172A"/>
-                </a:solidFill>
-                <a:latin typeface="DM Sans"/>
-              </a:rPr>
-              <a:t>Power:  </a:t>
-            </a:r>
-            <a:r>
-              <a:rPr sz="1200" b="0">
-                <a:solidFill>
-                  <a:srgbClr val="334155"/>
-                </a:solidFill>
-                <a:latin typeface="DM Sans"/>
-              </a:rPr>
-              <a:t>USB-C → 3V3 regulator on the module.</a:t>
-            </a:r>
-          </a:p>
-        </p:txBody>
-      </p:sp>
+      <p:graphicFrame>
+        <p:nvGraphicFramePr>
+          <p:cNvPr id="328" name="Table 327"/>
+          <p:cNvGraphicFramePr>
+            <a:graphicFrameLocks noGrp="1"/>
+          </p:cNvGraphicFramePr>
+          <p:nvPr/>
+        </p:nvGraphicFramePr>
+        <p:xfrm>
+          <a:off x="6446520" y="1481328"/>
+          <a:ext cx="5010910" cy="3520440"/>
+        </p:xfrm>
+        <a:graphic>
+          <a:graphicData uri="http://schemas.openxmlformats.org/drawingml/2006/table">
+            <a:tbl>
+              <a:tblPr firstRow="0" bandRow="0">
+                <a:tableStyleId>{2D5ABB26-0587-4C30-8999-92F81FD0307C}</a:tableStyleId>
+              </a:tblPr>
+              <a:tblGrid>
+                <a:gridCol w="1326417"/>
+                <a:gridCol w="1572050"/>
+                <a:gridCol w="2112443"/>
+              </a:tblGrid>
+              <a:tr h="352044">
+                <a:tc>
+                  <a:txBody>
+                    <a:bodyPr wrap="square"/>
+                    <a:lstStyle/>
+                    <a:p>
+                      <a:r>
+                        <a:rPr sz="900" b="1">
+                          <a:solidFill>
+                            <a:srgbClr val="0F172A"/>
+                          </a:solidFill>
+                          <a:latin typeface="DM Sans"/>
+                        </a:rPr>
+                        <a:t>Net</a:t>
+                      </a:r>
+                    </a:p>
+                  </a:txBody>
+                  <a:tcPr marL="36576" marR="36576" marT="22860" marB="18288" anchor="ctr">
+                    <a:noFill/>
+                    <a:lnL w="12700">
+                      <a:noFill/>
+                    </a:lnL>
+                    <a:lnR w="12700">
+                      <a:noFill/>
+                    </a:lnR>
+                    <a:lnT w="12700">
+                      <a:noFill/>
+                    </a:lnT>
+                    <a:lnB w="12700">
+                      <a:solidFill>
+                        <a:srgbClr val="CBD5E1"/>
+                      </a:solidFill>
+                    </a:lnB>
+                  </a:tcPr>
+                </a:tc>
+                <a:tc>
+                  <a:txBody>
+                    <a:bodyPr wrap="square"/>
+                    <a:lstStyle/>
+                    <a:p>
+                      <a:r>
+                        <a:rPr sz="900" b="1">
+                          <a:solidFill>
+                            <a:srgbClr val="0F172A"/>
+                          </a:solidFill>
+                          <a:latin typeface="DM Sans"/>
+                        </a:rPr>
+                        <a:t>Pin</a:t>
+                      </a:r>
+                    </a:p>
+                  </a:txBody>
+                  <a:tcPr marL="36576" marR="36576" marT="22860" marB="18288" anchor="ctr">
+                    <a:noFill/>
+                    <a:lnL w="12700">
+                      <a:noFill/>
+                    </a:lnL>
+                    <a:lnR w="12700">
+                      <a:noFill/>
+                    </a:lnR>
+                    <a:lnT w="12700">
+                      <a:noFill/>
+                    </a:lnT>
+                    <a:lnB w="12700">
+                      <a:solidFill>
+                        <a:srgbClr val="CBD5E1"/>
+                      </a:solidFill>
+                    </a:lnB>
+                  </a:tcPr>
+                </a:tc>
+                <a:tc>
+                  <a:txBody>
+                    <a:bodyPr wrap="square"/>
+                    <a:lstStyle/>
+                    <a:p>
+                      <a:r>
+                        <a:rPr sz="900" b="1">
+                          <a:solidFill>
+                            <a:srgbClr val="0F172A"/>
+                          </a:solidFill>
+                          <a:latin typeface="DM Sans"/>
+                        </a:rPr>
+                        <a:t>Function</a:t>
+                      </a:r>
+                    </a:p>
+                  </a:txBody>
+                  <a:tcPr marL="36576" marR="36576" marT="22860" marB="18288" anchor="ctr">
+                    <a:noFill/>
+                    <a:lnL w="12700">
+                      <a:noFill/>
+                    </a:lnL>
+                    <a:lnR w="12700">
+                      <a:noFill/>
+                    </a:lnR>
+                    <a:lnT w="12700">
+                      <a:noFill/>
+                    </a:lnT>
+                    <a:lnB w="12700">
+                      <a:solidFill>
+                        <a:srgbClr val="CBD5E1"/>
+                      </a:solidFill>
+                    </a:lnB>
+                  </a:tcPr>
+                </a:tc>
+              </a:tr>
+              <a:tr h="352044">
+                <a:tc>
+                  <a:txBody>
+                    <a:bodyPr wrap="square"/>
+                    <a:lstStyle/>
+                    <a:p>
+                      <a:r>
+                        <a:rPr sz="940" b="1">
+                          <a:solidFill>
+                            <a:srgbClr val="0F172A"/>
+                          </a:solidFill>
+                          <a:latin typeface="DM Sans"/>
+                        </a:rPr>
+                        <a:t>DRV_C · DRV_A</a:t>
+                      </a:r>
+                    </a:p>
+                  </a:txBody>
+                  <a:tcPr marL="36576" marR="36576" marT="22860" marB="18288" anchor="ctr">
+                    <a:noFill/>
+                    <a:lnL w="7620">
+                      <a:noFill/>
+                    </a:lnL>
+                    <a:lnR w="7620">
+                      <a:noFill/>
+                    </a:lnR>
+                    <a:lnT w="7620">
+                      <a:noFill/>
+                    </a:lnT>
+                    <a:lnB w="7620">
+                      <a:solidFill>
+                        <a:srgbClr val="E2E8F0"/>
+                      </a:solidFill>
+                    </a:lnB>
+                  </a:tcPr>
+                </a:tc>
+                <a:tc>
+                  <a:txBody>
+                    <a:bodyPr wrap="square"/>
+                    <a:lstStyle/>
+                    <a:p>
+                      <a:r>
+                        <a:rPr sz="940" b="0">
+                          <a:solidFill>
+                            <a:srgbClr val="334155"/>
+                          </a:solidFill>
+                          <a:latin typeface="DM Sans"/>
+                        </a:rPr>
+                        <a:t>GPIO3 · GPIO4</a:t>
+                      </a:r>
+                    </a:p>
+                  </a:txBody>
+                  <a:tcPr marL="36576" marR="36576" marT="22860" marB="18288" anchor="ctr">
+                    <a:noFill/>
+                    <a:lnL w="7620">
+                      <a:noFill/>
+                    </a:lnL>
+                    <a:lnR w="7620">
+                      <a:noFill/>
+                    </a:lnR>
+                    <a:lnT w="7620">
+                      <a:noFill/>
+                    </a:lnT>
+                    <a:lnB w="7620">
+                      <a:solidFill>
+                        <a:srgbClr val="E2E8F0"/>
+                      </a:solidFill>
+                    </a:lnB>
+                  </a:tcPr>
+                </a:tc>
+                <a:tc>
+                  <a:txBody>
+                    <a:bodyPr wrap="square"/>
+                    <a:lstStyle/>
+                    <a:p>
+                      <a:r>
+                        <a:rPr sz="940" b="0">
+                          <a:solidFill>
+                            <a:srgbClr val="334155"/>
+                          </a:solidFill>
+                          <a:latin typeface="DM Sans"/>
+                        </a:rPr>
+                        <a:t>drive zone C · A via 1 kΩ</a:t>
+                      </a:r>
+                    </a:p>
+                  </a:txBody>
+                  <a:tcPr marL="36576" marR="36576" marT="22860" marB="18288" anchor="ctr">
+                    <a:noFill/>
+                    <a:lnL w="7620">
+                      <a:noFill/>
+                    </a:lnL>
+                    <a:lnR w="7620">
+                      <a:noFill/>
+                    </a:lnR>
+                    <a:lnT w="7620">
+                      <a:noFill/>
+                    </a:lnT>
+                    <a:lnB w="7620">
+                      <a:solidFill>
+                        <a:srgbClr val="E2E8F0"/>
+                      </a:solidFill>
+                    </a:lnB>
+                  </a:tcPr>
+                </a:tc>
+              </a:tr>
+              <a:tr h="352044">
+                <a:tc>
+                  <a:txBody>
+                    <a:bodyPr wrap="square"/>
+                    <a:lstStyle/>
+                    <a:p>
+                      <a:r>
+                        <a:rPr sz="940" b="1">
+                          <a:solidFill>
+                            <a:srgbClr val="0F172A"/>
+                          </a:solidFill>
+                          <a:latin typeface="DM Sans"/>
+                        </a:rPr>
+                        <a:t>DRV_LOOP</a:t>
+                      </a:r>
+                    </a:p>
+                  </a:txBody>
+                  <a:tcPr marL="36576" marR="36576" marT="22860" marB="18288" anchor="ctr">
+                    <a:noFill/>
+                    <a:lnL w="7620">
+                      <a:noFill/>
+                    </a:lnL>
+                    <a:lnR w="7620">
+                      <a:noFill/>
+                    </a:lnR>
+                    <a:lnT w="7620">
+                      <a:noFill/>
+                    </a:lnT>
+                    <a:lnB w="7620">
+                      <a:solidFill>
+                        <a:srgbClr val="E2E8F0"/>
+                      </a:solidFill>
+                    </a:lnB>
+                  </a:tcPr>
+                </a:tc>
+                <a:tc>
+                  <a:txBody>
+                    <a:bodyPr wrap="square"/>
+                    <a:lstStyle/>
+                    <a:p>
+                      <a:r>
+                        <a:rPr sz="940" b="0">
+                          <a:solidFill>
+                            <a:srgbClr val="334155"/>
+                          </a:solidFill>
+                          <a:latin typeface="DM Sans"/>
+                        </a:rPr>
+                        <a:t>GPIO5</a:t>
+                      </a:r>
+                    </a:p>
+                  </a:txBody>
+                  <a:tcPr marL="36576" marR="36576" marT="22860" marB="18288" anchor="ctr">
+                    <a:noFill/>
+                    <a:lnL w="7620">
+                      <a:noFill/>
+                    </a:lnL>
+                    <a:lnR w="7620">
+                      <a:noFill/>
+                    </a:lnR>
+                    <a:lnT w="7620">
+                      <a:noFill/>
+                    </a:lnT>
+                    <a:lnB w="7620">
+                      <a:solidFill>
+                        <a:srgbClr val="E2E8F0"/>
+                      </a:solidFill>
+                    </a:lnB>
+                  </a:tcPr>
+                </a:tc>
+                <a:tc>
+                  <a:txBody>
+                    <a:bodyPr wrap="square"/>
+                    <a:lstStyle/>
+                    <a:p>
+                      <a:r>
+                        <a:rPr sz="940" b="0">
+                          <a:solidFill>
+                            <a:srgbClr val="334155"/>
+                          </a:solidFill>
+                          <a:latin typeface="DM Sans"/>
+                        </a:rPr>
+                        <a:t>strip loop (broken strip)</a:t>
+                      </a:r>
+                    </a:p>
+                  </a:txBody>
+                  <a:tcPr marL="36576" marR="36576" marT="22860" marB="18288" anchor="ctr">
+                    <a:noFill/>
+                    <a:lnL w="7620">
+                      <a:noFill/>
+                    </a:lnL>
+                    <a:lnR w="7620">
+                      <a:noFill/>
+                    </a:lnR>
+                    <a:lnT w="7620">
+                      <a:noFill/>
+                    </a:lnT>
+                    <a:lnB w="7620">
+                      <a:solidFill>
+                        <a:srgbClr val="E2E8F0"/>
+                      </a:solidFill>
+                    </a:lnB>
+                  </a:tcPr>
+                </a:tc>
+              </a:tr>
+              <a:tr h="352044">
+                <a:tc>
+                  <a:txBody>
+                    <a:bodyPr wrap="square"/>
+                    <a:lstStyle/>
+                    <a:p>
+                      <a:r>
+                        <a:rPr sz="940" b="1">
+                          <a:solidFill>
+                            <a:srgbClr val="0F172A"/>
+                          </a:solidFill>
+                          <a:latin typeface="DM Sans"/>
+                        </a:rPr>
+                        <a:t>DRV_REF</a:t>
+                      </a:r>
+                    </a:p>
+                  </a:txBody>
+                  <a:tcPr marL="36576" marR="36576" marT="22860" marB="18288" anchor="ctr">
+                    <a:noFill/>
+                    <a:lnL w="7620">
+                      <a:noFill/>
+                    </a:lnL>
+                    <a:lnR w="7620">
+                      <a:noFill/>
+                    </a:lnR>
+                    <a:lnT w="7620">
+                      <a:noFill/>
+                    </a:lnT>
+                    <a:lnB w="7620">
+                      <a:solidFill>
+                        <a:srgbClr val="E2E8F0"/>
+                      </a:solidFill>
+                    </a:lnB>
+                  </a:tcPr>
+                </a:tc>
+                <a:tc>
+                  <a:txBody>
+                    <a:bodyPr wrap="square"/>
+                    <a:lstStyle/>
+                    <a:p>
+                      <a:r>
+                        <a:rPr sz="940" b="0">
+                          <a:solidFill>
+                            <a:srgbClr val="334155"/>
+                          </a:solidFill>
+                          <a:latin typeface="DM Sans"/>
+                        </a:rPr>
+                        <a:t>GPIO10</a:t>
+                      </a:r>
+                    </a:p>
+                  </a:txBody>
+                  <a:tcPr marL="36576" marR="36576" marT="22860" marB="18288" anchor="ctr">
+                    <a:noFill/>
+                    <a:lnL w="7620">
+                      <a:noFill/>
+                    </a:lnL>
+                    <a:lnR w="7620">
+                      <a:noFill/>
+                    </a:lnR>
+                    <a:lnT w="7620">
+                      <a:noFill/>
+                    </a:lnT>
+                    <a:lnB w="7620">
+                      <a:solidFill>
+                        <a:srgbClr val="E2E8F0"/>
+                      </a:solidFill>
+                    </a:lnB>
+                  </a:tcPr>
+                </a:tc>
+                <a:tc>
+                  <a:txBody>
+                    <a:bodyPr wrap="square"/>
+                    <a:lstStyle/>
+                    <a:p>
+                      <a:r>
+                        <a:rPr sz="940" b="0">
+                          <a:solidFill>
+                            <a:srgbClr val="334155"/>
+                          </a:solidFill>
+                          <a:latin typeface="DM Sans"/>
+                        </a:rPr>
+                        <a:t>100 kΩ 0.1 % reference</a:t>
+                      </a:r>
+                    </a:p>
+                  </a:txBody>
+                  <a:tcPr marL="36576" marR="36576" marT="22860" marB="18288" anchor="ctr">
+                    <a:noFill/>
+                    <a:lnL w="7620">
+                      <a:noFill/>
+                    </a:lnL>
+                    <a:lnR w="7620">
+                      <a:noFill/>
+                    </a:lnR>
+                    <a:lnT w="7620">
+                      <a:noFill/>
+                    </a:lnT>
+                    <a:lnB w="7620">
+                      <a:solidFill>
+                        <a:srgbClr val="E2E8F0"/>
+                      </a:solidFill>
+                    </a:lnB>
+                  </a:tcPr>
+                </a:tc>
+              </a:tr>
+              <a:tr h="352044">
+                <a:tc>
+                  <a:txBody>
+                    <a:bodyPr wrap="square"/>
+                    <a:lstStyle/>
+                    <a:p>
+                      <a:r>
+                        <a:rPr sz="940" b="1">
+                          <a:solidFill>
+                            <a:srgbClr val="0F172A"/>
+                          </a:solidFill>
+                          <a:latin typeface="DM Sans"/>
+                        </a:rPr>
+                        <a:t>DRV_CHK</a:t>
+                      </a:r>
+                    </a:p>
+                  </a:txBody>
+                  <a:tcPr marL="36576" marR="36576" marT="22860" marB="18288" anchor="ctr">
+                    <a:noFill/>
+                    <a:lnL w="7620">
+                      <a:noFill/>
+                    </a:lnL>
+                    <a:lnR w="7620">
+                      <a:noFill/>
+                    </a:lnR>
+                    <a:lnT w="7620">
+                      <a:noFill/>
+                    </a:lnT>
+                    <a:lnB w="7620">
+                      <a:solidFill>
+                        <a:srgbClr val="E2E8F0"/>
+                      </a:solidFill>
+                    </a:lnB>
+                  </a:tcPr>
+                </a:tc>
+                <a:tc>
+                  <a:txBody>
+                    <a:bodyPr wrap="square"/>
+                    <a:lstStyle/>
+                    <a:p>
+                      <a:r>
+                        <a:rPr sz="940" b="0">
+                          <a:solidFill>
+                            <a:srgbClr val="334155"/>
+                          </a:solidFill>
+                          <a:latin typeface="DM Sans"/>
+                        </a:rPr>
+                        <a:t>GPIO20</a:t>
+                      </a:r>
+                    </a:p>
+                  </a:txBody>
+                  <a:tcPr marL="36576" marR="36576" marT="22860" marB="18288" anchor="ctr">
+                    <a:noFill/>
+                    <a:lnL w="7620">
+                      <a:noFill/>
+                    </a:lnL>
+                    <a:lnR w="7620">
+                      <a:noFill/>
+                    </a:lnR>
+                    <a:lnT w="7620">
+                      <a:noFill/>
+                    </a:lnT>
+                    <a:lnB w="7620">
+                      <a:solidFill>
+                        <a:srgbClr val="E2E8F0"/>
+                      </a:solidFill>
+                    </a:lnB>
+                  </a:tcPr>
+                </a:tc>
+                <a:tc>
+                  <a:txBody>
+                    <a:bodyPr wrap="square"/>
+                    <a:lstStyle/>
+                    <a:p>
+                      <a:r>
+                        <a:rPr sz="940" b="0">
+                          <a:solidFill>
+                            <a:srgbClr val="334155"/>
+                          </a:solidFill>
+                          <a:latin typeface="DM Sans"/>
+                        </a:rPr>
+                        <a:t>100 kΩ self-check</a:t>
+                      </a:r>
+                    </a:p>
+                  </a:txBody>
+                  <a:tcPr marL="36576" marR="36576" marT="22860" marB="18288" anchor="ctr">
+                    <a:noFill/>
+                    <a:lnL w="7620">
+                      <a:noFill/>
+                    </a:lnL>
+                    <a:lnR w="7620">
+                      <a:noFill/>
+                    </a:lnR>
+                    <a:lnT w="7620">
+                      <a:noFill/>
+                    </a:lnT>
+                    <a:lnB w="7620">
+                      <a:solidFill>
+                        <a:srgbClr val="E2E8F0"/>
+                      </a:solidFill>
+                    </a:lnB>
+                  </a:tcPr>
+                </a:tc>
+              </a:tr>
+              <a:tr h="352044">
+                <a:tc>
+                  <a:txBody>
+                    <a:bodyPr wrap="square"/>
+                    <a:lstStyle/>
+                    <a:p>
+                      <a:r>
+                        <a:rPr sz="940" b="1">
+                          <a:solidFill>
+                            <a:srgbClr val="0F172A"/>
+                          </a:solidFill>
+                          <a:latin typeface="DM Sans"/>
+                        </a:rPr>
+                        <a:t>SDA · SCL</a:t>
+                      </a:r>
+                    </a:p>
+                  </a:txBody>
+                  <a:tcPr marL="36576" marR="36576" marT="22860" marB="18288" anchor="ctr">
+                    <a:noFill/>
+                    <a:lnL w="7620">
+                      <a:noFill/>
+                    </a:lnL>
+                    <a:lnR w="7620">
+                      <a:noFill/>
+                    </a:lnR>
+                    <a:lnT w="7620">
+                      <a:noFill/>
+                    </a:lnT>
+                    <a:lnB w="7620">
+                      <a:solidFill>
+                        <a:srgbClr val="E2E8F0"/>
+                      </a:solidFill>
+                    </a:lnB>
+                  </a:tcPr>
+                </a:tc>
+                <a:tc>
+                  <a:txBody>
+                    <a:bodyPr wrap="square"/>
+                    <a:lstStyle/>
+                    <a:p>
+                      <a:r>
+                        <a:rPr sz="940" b="0">
+                          <a:solidFill>
+                            <a:srgbClr val="334155"/>
+                          </a:solidFill>
+                          <a:latin typeface="DM Sans"/>
+                        </a:rPr>
+                        <a:t>GPIO6 · GPIO7</a:t>
+                      </a:r>
+                    </a:p>
+                  </a:txBody>
+                  <a:tcPr marL="36576" marR="36576" marT="22860" marB="18288" anchor="ctr">
+                    <a:noFill/>
+                    <a:lnL w="7620">
+                      <a:noFill/>
+                    </a:lnL>
+                    <a:lnR w="7620">
+                      <a:noFill/>
+                    </a:lnR>
+                    <a:lnT w="7620">
+                      <a:noFill/>
+                    </a:lnT>
+                    <a:lnB w="7620">
+                      <a:solidFill>
+                        <a:srgbClr val="E2E8F0"/>
+                      </a:solidFill>
+                    </a:lnB>
+                  </a:tcPr>
+                </a:tc>
+                <a:tc>
+                  <a:txBody>
+                    <a:bodyPr wrap="square"/>
+                    <a:lstStyle/>
+                    <a:p>
+                      <a:r>
+                        <a:rPr sz="940" b="0">
+                          <a:solidFill>
+                            <a:srgbClr val="334155"/>
+                          </a:solidFill>
+                          <a:latin typeface="DM Sans"/>
+                        </a:rPr>
+                        <a:t>I²C to ADS1115 (0x48)</a:t>
+                      </a:r>
+                    </a:p>
+                  </a:txBody>
+                  <a:tcPr marL="36576" marR="36576" marT="22860" marB="18288" anchor="ctr">
+                    <a:noFill/>
+                    <a:lnL w="7620">
+                      <a:noFill/>
+                    </a:lnL>
+                    <a:lnR w="7620">
+                      <a:noFill/>
+                    </a:lnR>
+                    <a:lnT w="7620">
+                      <a:noFill/>
+                    </a:lnT>
+                    <a:lnB w="7620">
+                      <a:solidFill>
+                        <a:srgbClr val="E2E8F0"/>
+                      </a:solidFill>
+                    </a:lnB>
+                  </a:tcPr>
+                </a:tc>
+              </a:tr>
+              <a:tr h="352044">
+                <a:tc>
+                  <a:txBody>
+                    <a:bodyPr wrap="square"/>
+                    <a:lstStyle/>
+                    <a:p>
+                      <a:r>
+                        <a:rPr sz="940" b="1">
+                          <a:solidFill>
+                            <a:srgbClr val="0F172A"/>
+                          </a:solidFill>
+                          <a:latin typeface="DM Sans"/>
+                        </a:rPr>
+                        <a:t>N · 3V3</a:t>
+                      </a:r>
+                    </a:p>
+                  </a:txBody>
+                  <a:tcPr marL="36576" marR="36576" marT="22860" marB="18288" anchor="ctr">
+                    <a:noFill/>
+                    <a:lnL w="7620">
+                      <a:noFill/>
+                    </a:lnL>
+                    <a:lnR w="7620">
+                      <a:noFill/>
+                    </a:lnR>
+                    <a:lnT w="7620">
+                      <a:noFill/>
+                    </a:lnT>
+                    <a:lnB w="7620">
+                      <a:solidFill>
+                        <a:srgbClr val="E2E8F0"/>
+                      </a:solidFill>
+                    </a:lnB>
+                  </a:tcPr>
+                </a:tc>
+                <a:tc>
+                  <a:txBody>
+                    <a:bodyPr wrap="square"/>
+                    <a:lstStyle/>
+                    <a:p>
+                      <a:r>
+                        <a:rPr sz="940" b="0">
+                          <a:solidFill>
+                            <a:srgbClr val="334155"/>
+                          </a:solidFill>
+                          <a:latin typeface="DM Sans"/>
+                        </a:rPr>
+                        <a:t>ADS1115 A0 · A1</a:t>
+                      </a:r>
+                    </a:p>
+                  </a:txBody>
+                  <a:tcPr marL="36576" marR="36576" marT="22860" marB="18288" anchor="ctr">
+                    <a:noFill/>
+                    <a:lnL w="7620">
+                      <a:noFill/>
+                    </a:lnL>
+                    <a:lnR w="7620">
+                      <a:noFill/>
+                    </a:lnR>
+                    <a:lnT w="7620">
+                      <a:noFill/>
+                    </a:lnT>
+                    <a:lnB w="7620">
+                      <a:solidFill>
+                        <a:srgbClr val="E2E8F0"/>
+                      </a:solidFill>
+                    </a:lnB>
+                  </a:tcPr>
+                </a:tc>
+                <a:tc>
+                  <a:txBody>
+                    <a:bodyPr wrap="square"/>
+                    <a:lstStyle/>
+                    <a:p>
+                      <a:r>
+                        <a:rPr sz="940" b="0">
+                          <a:solidFill>
+                            <a:srgbClr val="334155"/>
+                          </a:solidFill>
+                          <a:latin typeface="DM Sans"/>
+                        </a:rPr>
+                        <a:t>node · rail (ratiometric)</a:t>
+                      </a:r>
+                    </a:p>
+                  </a:txBody>
+                  <a:tcPr marL="36576" marR="36576" marT="22860" marB="18288" anchor="ctr">
+                    <a:noFill/>
+                    <a:lnL w="7620">
+                      <a:noFill/>
+                    </a:lnL>
+                    <a:lnR w="7620">
+                      <a:noFill/>
+                    </a:lnR>
+                    <a:lnT w="7620">
+                      <a:noFill/>
+                    </a:lnT>
+                    <a:lnB w="7620">
+                      <a:solidFill>
+                        <a:srgbClr val="E2E8F0"/>
+                      </a:solidFill>
+                    </a:lnB>
+                  </a:tcPr>
+                </a:tc>
+              </a:tr>
+              <a:tr h="352044">
+                <a:tc>
+                  <a:txBody>
+                    <a:bodyPr wrap="square"/>
+                    <a:lstStyle/>
+                    <a:p>
+                      <a:r>
+                        <a:rPr sz="940" b="1">
+                          <a:solidFill>
+                            <a:srgbClr val="0F172A"/>
+                          </a:solidFill>
+                          <a:latin typeface="DM Sans"/>
+                        </a:rPr>
+                        <a:t>LED G · Y · R</a:t>
+                      </a:r>
+                    </a:p>
+                  </a:txBody>
+                  <a:tcPr marL="36576" marR="36576" marT="22860" marB="18288" anchor="ctr">
+                    <a:noFill/>
+                    <a:lnL w="7620">
+                      <a:noFill/>
+                    </a:lnL>
+                    <a:lnR w="7620">
+                      <a:noFill/>
+                    </a:lnR>
+                    <a:lnT w="7620">
+                      <a:noFill/>
+                    </a:lnT>
+                    <a:lnB w="7620">
+                      <a:solidFill>
+                        <a:srgbClr val="E2E8F0"/>
+                      </a:solidFill>
+                    </a:lnB>
+                  </a:tcPr>
+                </a:tc>
+                <a:tc>
+                  <a:txBody>
+                    <a:bodyPr wrap="square"/>
+                    <a:lstStyle/>
+                    <a:p>
+                      <a:r>
+                        <a:rPr sz="940" b="0">
+                          <a:solidFill>
+                            <a:srgbClr val="334155"/>
+                          </a:solidFill>
+                          <a:latin typeface="DM Sans"/>
+                        </a:rPr>
+                        <a:t>GPIO0 · 1 · 21</a:t>
+                      </a:r>
+                    </a:p>
+                  </a:txBody>
+                  <a:tcPr marL="36576" marR="36576" marT="22860" marB="18288" anchor="ctr">
+                    <a:noFill/>
+                    <a:lnL w="7620">
+                      <a:noFill/>
+                    </a:lnL>
+                    <a:lnR w="7620">
+                      <a:noFill/>
+                    </a:lnR>
+                    <a:lnT w="7620">
+                      <a:noFill/>
+                    </a:lnT>
+                    <a:lnB w="7620">
+                      <a:solidFill>
+                        <a:srgbClr val="E2E8F0"/>
+                      </a:solidFill>
+                    </a:lnB>
+                  </a:tcPr>
+                </a:tc>
+                <a:tc>
+                  <a:txBody>
+                    <a:bodyPr wrap="square"/>
+                    <a:lstStyle/>
+                    <a:p>
+                      <a:r>
+                        <a:rPr sz="940" b="0">
+                          <a:solidFill>
+                            <a:srgbClr val="334155"/>
+                          </a:solidFill>
+                          <a:latin typeface="DM Sans"/>
+                        </a:rPr>
+                        <a:t>OK · CHANGE · CHECK/FAULT</a:t>
+                      </a:r>
+                    </a:p>
+                  </a:txBody>
+                  <a:tcPr marL="36576" marR="36576" marT="22860" marB="18288" anchor="ctr">
+                    <a:noFill/>
+                    <a:lnL w="7620">
+                      <a:noFill/>
+                    </a:lnL>
+                    <a:lnR w="7620">
+                      <a:noFill/>
+                    </a:lnR>
+                    <a:lnT w="7620">
+                      <a:noFill/>
+                    </a:lnT>
+                    <a:lnB w="7620">
+                      <a:solidFill>
+                        <a:srgbClr val="E2E8F0"/>
+                      </a:solidFill>
+                    </a:lnB>
+                  </a:tcPr>
+                </a:tc>
+              </a:tr>
+              <a:tr h="352044">
+                <a:tc>
+                  <a:txBody>
+                    <a:bodyPr wrap="square"/>
+                    <a:lstStyle/>
+                    <a:p>
+                      <a:r>
+                        <a:rPr sz="940" b="1">
+                          <a:solidFill>
+                            <a:srgbClr val="0F172A"/>
+                          </a:solidFill>
+                          <a:latin typeface="DM Sans"/>
+                        </a:rPr>
+                        <a:t>Strip pads</a:t>
+                      </a:r>
+                    </a:p>
+                  </a:txBody>
+                  <a:tcPr marL="36576" marR="36576" marT="22860" marB="18288" anchor="ctr">
+                    <a:noFill/>
+                    <a:lnL w="7620">
+                      <a:noFill/>
+                    </a:lnL>
+                    <a:lnR w="7620">
+                      <a:noFill/>
+                    </a:lnR>
+                    <a:lnT w="7620">
+                      <a:noFill/>
+                    </a:lnT>
+                    <a:lnB w="7620">
+                      <a:solidFill>
+                        <a:srgbClr val="E2E8F0"/>
+                      </a:solidFill>
+                    </a:lnB>
+                  </a:tcPr>
+                </a:tc>
+                <a:tc>
+                  <a:txBody>
+                    <a:bodyPr wrap="square"/>
+                    <a:lstStyle/>
+                    <a:p>
+                      <a:r>
+                        <a:rPr sz="940" b="0">
+                          <a:solidFill>
+                            <a:srgbClr val="334155"/>
+                          </a:solidFill>
+                          <a:latin typeface="DM Sans"/>
+                        </a:rPr>
+                        <a:t>J4.1 – J4.4</a:t>
+                      </a:r>
+                    </a:p>
+                  </a:txBody>
+                  <a:tcPr marL="36576" marR="36576" marT="22860" marB="18288" anchor="ctr">
+                    <a:noFill/>
+                    <a:lnL w="7620">
+                      <a:noFill/>
+                    </a:lnL>
+                    <a:lnR w="7620">
+                      <a:noFill/>
+                    </a:lnR>
+                    <a:lnT w="7620">
+                      <a:noFill/>
+                    </a:lnT>
+                    <a:lnB w="7620">
+                      <a:solidFill>
+                        <a:srgbClr val="E2E8F0"/>
+                      </a:solidFill>
+                    </a:lnB>
+                  </a:tcPr>
+                </a:tc>
+                <a:tc>
+                  <a:txBody>
+                    <a:bodyPr wrap="square"/>
+                    <a:lstStyle/>
+                    <a:p>
+                      <a:r>
+                        <a:rPr sz="940" b="0">
+                          <a:solidFill>
+                            <a:srgbClr val="334155"/>
+                          </a:solidFill>
+                          <a:latin typeface="DM Sans"/>
+                        </a:rPr>
+                        <a:t>S_C · S_A · COM1 · COM2</a:t>
+                      </a:r>
+                    </a:p>
+                  </a:txBody>
+                  <a:tcPr marL="36576" marR="36576" marT="22860" marB="18288" anchor="ctr">
+                    <a:noFill/>
+                    <a:lnL w="7620">
+                      <a:noFill/>
+                    </a:lnL>
+                    <a:lnR w="7620">
+                      <a:noFill/>
+                    </a:lnR>
+                    <a:lnT w="7620">
+                      <a:noFill/>
+                    </a:lnT>
+                    <a:lnB w="7620">
+                      <a:solidFill>
+                        <a:srgbClr val="E2E8F0"/>
+                      </a:solidFill>
+                    </a:lnB>
+                  </a:tcPr>
+                </a:tc>
+              </a:tr>
+              <a:tr h="352044">
+                <a:tc>
+                  <a:txBody>
+                    <a:bodyPr wrap="square"/>
+                    <a:lstStyle/>
+                    <a:p>
+                      <a:r>
+                        <a:rPr sz="940" b="1">
+                          <a:solidFill>
+                            <a:srgbClr val="0F172A"/>
+                          </a:solidFill>
+                          <a:latin typeface="DM Sans"/>
+                        </a:rPr>
+                        <a:t>Power</a:t>
+                      </a:r>
+                    </a:p>
+                  </a:txBody>
+                  <a:tcPr marL="36576" marR="36576" marT="22860" marB="18288" anchor="ctr">
+                    <a:noFill/>
+                    <a:lnL w="7620">
+                      <a:noFill/>
+                    </a:lnL>
+                    <a:lnR w="7620">
+                      <a:noFill/>
+                    </a:lnR>
+                    <a:lnT w="7620">
+                      <a:noFill/>
+                    </a:lnT>
+                    <a:lnB w="7620">
+                      <a:solidFill>
+                        <a:srgbClr val="E2E8F0"/>
+                      </a:solidFill>
+                    </a:lnB>
+                  </a:tcPr>
+                </a:tc>
+                <a:tc>
+                  <a:txBody>
+                    <a:bodyPr wrap="square"/>
+                    <a:lstStyle/>
+                    <a:p>
+                      <a:r>
+                        <a:rPr sz="940" b="0">
+                          <a:solidFill>
+                            <a:srgbClr val="334155"/>
+                          </a:solidFill>
+                          <a:latin typeface="DM Sans"/>
+                        </a:rPr>
+                        <a:t>USB-C → 3V3</a:t>
+                      </a:r>
+                    </a:p>
+                  </a:txBody>
+                  <a:tcPr marL="36576" marR="36576" marT="22860" marB="18288" anchor="ctr">
+                    <a:noFill/>
+                    <a:lnL w="7620">
+                      <a:noFill/>
+                    </a:lnL>
+                    <a:lnR w="7620">
+                      <a:noFill/>
+                    </a:lnR>
+                    <a:lnT w="7620">
+                      <a:noFill/>
+                    </a:lnT>
+                    <a:lnB w="7620">
+                      <a:solidFill>
+                        <a:srgbClr val="E2E8F0"/>
+                      </a:solidFill>
+                    </a:lnB>
+                  </a:tcPr>
+                </a:tc>
+                <a:tc>
+                  <a:txBody>
+                    <a:bodyPr wrap="square"/>
+                    <a:lstStyle/>
+                    <a:p>
+                      <a:r>
+                        <a:rPr sz="940" b="0">
+                          <a:solidFill>
+                            <a:srgbClr val="334155"/>
+                          </a:solidFill>
+                          <a:latin typeface="DM Sans"/>
+                        </a:rPr>
+                        <a:t>LDO on the SuperMini</a:t>
+                      </a:r>
+                    </a:p>
+                  </a:txBody>
+                  <a:tcPr marL="36576" marR="36576" marT="22860" marB="18288" anchor="ctr">
+                    <a:noFill/>
+                    <a:lnL w="7620">
+                      <a:noFill/>
+                    </a:lnL>
+                    <a:lnR w="7620">
+                      <a:noFill/>
+                    </a:lnR>
+                    <a:lnT w="7620">
+                      <a:noFill/>
+                    </a:lnT>
+                    <a:lnB w="7620">
+                      <a:solidFill>
+                        <a:srgbClr val="E2E8F0"/>
+                      </a:solidFill>
+                    </a:lnB>
+                  </a:tcPr>
+                </a:tc>
+              </a:tr>
+            </a:tbl>
+          </a:graphicData>
+        </a:graphic>
+      </p:graphicFrame>
     </p:spTree>
   </p:cSld>
   <p:clrMapOvr>
@@ -13045,7 +13965,7 @@
                 </a:solidFill>
                 <a:latin typeface="DM Sans"/>
               </a:rPr>
-              <a:t>[team to insert the GitHub / Drive link before upload]</a:t>
+              <a:t>[team to insert the Drive link before upload]: all native files and a dated work history.</a:t>
             </a:r>
             <a:endParaRPr/>
           </a:p>
@@ -13095,7 +14015,7 @@
                 </a:solidFill>
                 <a:latin typeface="DM Sans"/>
               </a:rPr>
-              <a:t>Figure: our SolidWorks window and verbatim tool output (14–15 Oct 2026).</a:t>
+              <a:t>Figure: our own files and tool output (checks re-run 19 Oct 2026).</a:t>
             </a:r>
             <a:endParaRPr/>
           </a:p>
@@ -13169,7 +14089,7 @@
                 </a:solidFill>
                 <a:latin typeface="DM Sans"/>
               </a:rPr>
-              <a:t>Authenticity: What Each Artifact Proves</a:t>
+              <a:t>Authenticity: real, dated, re-checkable work</a:t>
             </a:r>
             <a:endParaRPr/>
           </a:p>
@@ -13238,8 +14158,8 @@
         </p:nvSpPr>
         <p:spPr>
           <a:xfrm>
-            <a:off x="9021470" y="457200"/>
-            <a:ext cx="2637129" cy="246888"/>
+            <a:off x="8648395" y="457200"/>
+            <a:ext cx="3010204" cy="246888"/>
           </a:xfrm>
           <a:prstGeom prst="roundRect">
             <a:avLst>
@@ -13280,7 +14200,7 @@
                 </a:solidFill>
                 <a:latin typeface="DM Sans"/>
               </a:rPr>
-              <a:t>GENUINE ARTIFACTS · NO STAGED EVIDENCE</a:t>
+              <a:t>REAL FILES · RE-CHECKABLE · NO STAGED PHOTOS</a:t>
             </a:r>
           </a:p>
         </p:txBody>
@@ -13309,16 +14229,76 @@
           </a:prstGeom>
         </p:spPr>
       </p:pic>
+      <p:pic>
+        <p:nvPicPr>
+          <p:cNvPr id="385" name="PHOTO lab1 - PLACEHOLDER (right-click &gt; Change Picture)" descr="placeholder_lab.png"/>
+          <p:cNvPicPr>
+            <a:picLocks noChangeAspect="1"/>
+          </p:cNvPicPr>
+          <p:nvPr/>
+        </p:nvPicPr>
+        <p:blipFill>
+          <a:blip r:embed="rId13"/>
+          <a:srcRect t="763" b="763"/>
+          <a:stretch>
+            <a:fillRect/>
+          </a:stretch>
+        </p:blipFill>
+        <p:spPr>
+          <a:xfrm>
+            <a:off x="6464808" y="1481328"/>
+            <a:ext cx="2395728" cy="1572768"/>
+          </a:xfrm>
+          <a:prstGeom prst="rect">
+            <a:avLst/>
+          </a:prstGeom>
+          <a:ln w="9525">
+            <a:solidFill>
+              <a:srgbClr val="CBD5E1"/>
+            </a:solidFill>
+          </a:ln>
+        </p:spPr>
+      </p:pic>
+      <p:pic>
+        <p:nvPicPr>
+          <p:cNvPr id="386" name="PHOTO lab2 - PLACEHOLDER (right-click &gt; Change Picture)" descr="placeholder_lab.png"/>
+          <p:cNvPicPr>
+            <a:picLocks noChangeAspect="1"/>
+          </p:cNvPicPr>
+          <p:nvPr/>
+        </p:nvPicPr>
+        <p:blipFill>
+          <a:blip r:embed="rId13"/>
+          <a:srcRect t="763" b="763"/>
+          <a:stretch>
+            <a:fillRect/>
+          </a:stretch>
+        </p:blipFill>
+        <p:spPr>
+          <a:xfrm>
+            <a:off x="9006840" y="1481328"/>
+            <a:ext cx="2395728" cy="1572768"/>
+          </a:xfrm>
+          <a:prstGeom prst="rect">
+            <a:avLst/>
+          </a:prstGeom>
+          <a:ln w="9525">
+            <a:solidFill>
+              <a:srgbClr val="CBD5E1"/>
+            </a:solidFill>
+          </a:ln>
+        </p:spPr>
+      </p:pic>
       <p:sp>
         <p:nvSpPr>
-          <p:cNvPr id="385" name="TextBox 384"/>
+          <p:cNvPr id="387" name="TextBox 386"/>
           <p:cNvSpPr txBox="1"/>
           <p:nvPr/>
         </p:nvSpPr>
         <p:spPr>
           <a:xfrm>
-            <a:off x="6464808" y="1572768"/>
-            <a:ext cx="5029200" cy="3840480"/>
+            <a:off x="6464808" y="3090672"/>
+            <a:ext cx="5029200" cy="228600"/>
           </a:xfrm>
           <a:prstGeom prst="rect">
             <a:avLst/>
@@ -13334,11 +14314,51 @@
                 <a:spcPct val="108000"/>
               </a:lnSpc>
               <a:spcAft>
-                <a:spcPts val="1400"/>
+                <a:spcPts val="400"/>
               </a:spcAft>
             </a:pPr>
             <a:r>
-              <a:rPr sz="1200" b="0">
+              <a:rPr sz="760" b="0">
+                <a:solidFill>
+                  <a:srgbClr val="64748B"/>
+                </a:solidFill>
+                <a:latin typeface="DM Sans"/>
+              </a:rPr>
+              <a:t>Team at work, institutional ID badges visible (photos by the team).</a:t>
+            </a:r>
+          </a:p>
+        </p:txBody>
+      </p:sp>
+      <p:sp>
+        <p:nvSpPr>
+          <p:cNvPr id="388" name="TextBox 387"/>
+          <p:cNvSpPr txBox="1"/>
+          <p:nvPr/>
+        </p:nvSpPr>
+        <p:spPr>
+          <a:xfrm>
+            <a:off x="6464808" y="3419856"/>
+            <a:ext cx="5029200" cy="2286000"/>
+          </a:xfrm>
+          <a:prstGeom prst="rect">
+            <a:avLst/>
+          </a:prstGeom>
+          <a:noFill/>
+        </p:spPr>
+        <p:txBody>
+          <a:bodyPr wrap="square" lIns="18288" rIns="18288" tIns="9144" bIns="9144" anchor="t"/>
+          <a:lstStyle/>
+          <a:p>
+            <a:pPr>
+              <a:lnSpc>
+                <a:spcPct val="108000"/>
+              </a:lnSpc>
+              <a:spcAft>
+                <a:spcPts val="600"/>
+              </a:spcAft>
+            </a:pPr>
+            <a:r>
+              <a:rPr sz="1050" b="0">
                 <a:solidFill>
                   <a:srgbClr val="059669"/>
                 </a:solidFill>
@@ -13347,22 +14367,22 @@
               <a:t>▪  </a:t>
             </a:r>
             <a:r>
-              <a:rPr sz="1200" b="1">
+              <a:rPr sz="1050" b="1">
                 <a:solidFill>
                   <a:srgbClr val="0F172A"/>
                 </a:solidFill>
                 <a:latin typeface="DM Sans"/>
               </a:rPr>
-              <a:t>CAD:  </a:t>
-            </a:r>
-            <a:r>
-              <a:rPr sz="1200" b="0">
+              <a:t>Real files:  </a:t>
+            </a:r>
+            <a:r>
+              <a:rPr sz="1050" b="0">
                 <a:solidFill>
                   <a:srgbClr val="334155"/>
                 </a:solidFill>
                 <a:latin typeface="DM Sans"/>
               </a:rPr>
-              <a:t>our assembly open in SolidWorks, 13 parts.</a:t>
+              <a:t>.SLDPRT .SLDASM .SLDDRW .STEP .kicad_sch .ino .dxf, dated in 15 git commits since 14 Oct.</a:t>
             </a:r>
           </a:p>
           <a:p>
@@ -13371,11 +14391,11 @@
                 <a:spcPct val="108000"/>
               </a:lnSpc>
               <a:spcAft>
-                <a:spcPts val="1400"/>
+                <a:spcPts val="600"/>
               </a:spcAft>
             </a:pPr>
             <a:r>
-              <a:rPr sz="1200" b="0">
+              <a:rPr sz="1050" b="0">
                 <a:solidFill>
                   <a:srgbClr val="059669"/>
                 </a:solidFill>
@@ -13384,22 +14404,22 @@
               <a:t>▪  </a:t>
             </a:r>
             <a:r>
-              <a:rPr sz="1200" b="1">
+              <a:rPr sz="1050" b="1">
                 <a:solidFill>
                   <a:srgbClr val="0F172A"/>
                 </a:solidFill>
                 <a:latin typeface="DM Sans"/>
               </a:rPr>
-              <a:t>Checks:  </a:t>
-            </a:r>
-            <a:r>
-              <a:rPr sz="1200" b="0">
+              <a:t>Re-checkable:  </a:t>
+            </a:r>
+            <a:r>
+              <a:rPr sz="1050" b="0">
                 <a:solidFill>
                   <a:srgbClr val="334155"/>
                 </a:solidFill>
                 <a:latin typeface="DM Sans"/>
               </a:rPr>
-              <a:t>CAD, ERC, compile and tests all re-runnable.</a:t>
+              <a:t>one command re-runs each check shown on the left.</a:t>
             </a:r>
           </a:p>
           <a:p>
@@ -13408,11 +14428,11 @@
                 <a:spcPct val="108000"/>
               </a:lnSpc>
               <a:spcAft>
-                <a:spcPts val="1400"/>
+                <a:spcPts val="600"/>
               </a:spcAft>
             </a:pPr>
             <a:r>
-              <a:rPr sz="1200" b="0">
+              <a:rPr sz="1050" b="0">
                 <a:solidFill>
                   <a:srgbClr val="059669"/>
                 </a:solidFill>
@@ -13421,22 +14441,22 @@
               <a:t>▪  </a:t>
             </a:r>
             <a:r>
-              <a:rPr sz="1200" b="1">
+              <a:rPr sz="1050" b="1">
                 <a:solidFill>
                   <a:srgbClr val="0F172A"/>
                 </a:solidFill>
                 <a:latin typeface="DM Sans"/>
               </a:rPr>
-              <a:t>History:  </a:t>
-            </a:r>
-            <a:r>
-              <a:rPr sz="1200" b="0">
+              <a:t>How we work:  </a:t>
+            </a:r>
+            <a:r>
+              <a:rPr sz="1050" b="0">
                 <a:solidFill>
                   <a:srgbClr val="334155"/>
                 </a:solidFill>
                 <a:latin typeface="DM Sans"/>
               </a:rPr>
-              <a:t>every step a git commit since 14 Oct.</a:t>
+              <a:t>scripts written with AI assistance (Claude), directed by us, build the CAD, schematic and firmware; the physical build and tests are done by us, starting with E2.</a:t>
             </a:r>
           </a:p>
           <a:p>
@@ -13445,11 +14465,11 @@
                 <a:spcPct val="108000"/>
               </a:lnSpc>
               <a:spcAft>
-                <a:spcPts val="1400"/>
+                <a:spcPts val="600"/>
               </a:spcAft>
             </a:pPr>
             <a:r>
-              <a:rPr sz="1200" b="0">
+              <a:rPr sz="1050" b="0">
                 <a:solidFill>
                   <a:srgbClr val="059669"/>
                 </a:solidFill>
@@ -13458,7 +14478,7 @@
               <a:t>▪  </a:t>
             </a:r>
             <a:r>
-              <a:rPr sz="1200" b="1">
+              <a:rPr sz="1050" b="1">
                 <a:solidFill>
                   <a:srgbClr val="0F172A"/>
                 </a:solidFill>
@@ -13467,13 +14487,13 @@
               <a:t>Photos:  </a:t>
             </a:r>
             <a:r>
-              <a:rPr sz="1200" b="0">
+              <a:rPr sz="1050" b="0">
                 <a:solidFill>
                   <a:srgbClr val="334155"/>
                 </a:solidFill>
                 <a:latin typeface="DM Sans"/>
               </a:rPr>
-              <a:t>none yet; the first laser session is next.</a:t>
+              <a:t>never staged or generated.</a:t>
             </a:r>
           </a:p>
         </p:txBody>
@@ -13553,7 +14573,7 @@
         <p:spPr>
           <a:xfrm>
             <a:off x="533400" y="956220"/>
-            <a:ext cx="11125200" cy="2103120"/>
+            <a:ext cx="11125200" cy="2212848"/>
           </a:xfrm>
           <a:prstGeom prst="rect">
             <a:avLst/>
@@ -13579,8 +14599,8 @@
         </p:blipFill>
         <p:spPr>
           <a:xfrm>
-            <a:off x="533400" y="3200400"/>
-            <a:ext cx="5429250" cy="2697480"/>
+            <a:off x="533400" y="3310128"/>
+            <a:ext cx="5429250" cy="2587752"/>
           </a:xfrm>
           <a:prstGeom prst="rect">
             <a:avLst/>
@@ -13606,8 +14626,8 @@
         </p:blipFill>
         <p:spPr>
           <a:xfrm>
-            <a:off x="6229350" y="3200400"/>
-            <a:ext cx="5429250" cy="2697480"/>
+            <a:off x="6229350" y="3310128"/>
+            <a:ext cx="5429250" cy="2587752"/>
           </a:xfrm>
           <a:prstGeom prst="rect">
             <a:avLst/>
@@ -13704,7 +14724,7 @@
         <p:spPr>
           <a:xfrm>
             <a:off x="1002059" y="1156245"/>
-            <a:ext cx="6766560" cy="190500"/>
+            <a:ext cx="6949440" cy="190500"/>
           </a:xfrm>
           <a:prstGeom prst="rect">
             <a:avLst/>
@@ -13736,7 +14756,7 @@
                 </a:solidFill>
                 <a:latin typeface="DM Sans"/>
               </a:rPr>
-              <a:t>Design FMEA: top risks of 15 (ratings estimated before tests)</a:t>
+              <a:t>Design FMEA: top 5 of 15 failure modes (ratings estimated before tests)</a:t>
             </a:r>
             <a:endParaRPr/>
           </a:p>
@@ -13757,7 +14777,7 @@
         </p:blipFill>
         <p:spPr>
           <a:xfrm>
-            <a:off x="752475" y="3419856"/>
+            <a:off x="752475" y="3529584"/>
             <a:ext cx="154334" cy="152400"/>
           </a:xfrm>
           <a:prstGeom prst="rect">
@@ -13777,7 +14797,7 @@
         </p:nvSpPr>
         <p:spPr>
           <a:xfrm>
-            <a:off x="1002059" y="3392424"/>
+            <a:off x="1002059" y="3502152"/>
             <a:ext cx="4846320" cy="190500"/>
           </a:xfrm>
           <a:prstGeom prst="rect">
@@ -13831,7 +14851,7 @@
         </p:blipFill>
         <p:spPr>
           <a:xfrm>
-            <a:off x="6448425" y="3419856"/>
+            <a:off x="6448425" y="3529584"/>
             <a:ext cx="135284" cy="152400"/>
           </a:xfrm>
           <a:prstGeom prst="rect">
@@ -13851,7 +14871,7 @@
         </p:nvSpPr>
         <p:spPr>
           <a:xfrm>
-            <a:off x="6678959" y="3392424"/>
+            <a:off x="6678959" y="3502152"/>
             <a:ext cx="4846320" cy="190500"/>
           </a:xfrm>
           <a:prstGeom prst="rect">
@@ -14009,8 +15029,8 @@
           <p:nvPr/>
         </p:nvGraphicFramePr>
         <p:xfrm>
-          <a:off x="749808" y="1481328"/>
-          <a:ext cx="7452358" cy="1316736"/>
+          <a:off x="749808" y="1463040"/>
+          <a:ext cx="7452358" cy="1645920"/>
         </p:xfrm>
         <a:graphic>
           <a:graphicData uri="http://schemas.openxmlformats.org/drawingml/2006/table">
@@ -14019,18 +15039,19 @@
                 <a:tableStyleId>{2D5ABB26-0587-4C30-8999-92F81FD0307C}</a:tableStyleId>
               </a:tblPr>
               <a:tblGrid>
-                <a:gridCol w="3193868"/>
-                <a:gridCol w="638773"/>
-                <a:gridCol w="3619717"/>
+                <a:gridCol w="2245916"/>
+                <a:gridCol w="1990698"/>
+                <a:gridCol w="561479"/>
+                <a:gridCol w="2654265"/>
               </a:tblGrid>
-              <a:tr h="329184">
+              <a:tr h="274320">
                 <a:tc>
                   <a:txBody>
                     <a:bodyPr wrap="square"/>
                     <a:lstStyle/>
                     <a:p>
                       <a:r>
-                        <a:rPr sz="950" b="1">
+                        <a:rPr sz="900" b="1">
                           <a:solidFill>
                             <a:srgbClr val="0F172A"/>
                           </a:solidFill>
@@ -14064,13 +15085,13 @@
                     <a:lstStyle/>
                     <a:p>
                       <a:r>
-                        <a:rPr sz="950" b="1">
+                        <a:rPr sz="900" b="1">
                           <a:solidFill>
                             <a:srgbClr val="0F172A"/>
                           </a:solidFill>
                           <a:latin typeface="DM Sans"/>
                         </a:rPr>
-                        <a:t>RPN</a:t>
+                        <a:t>Effect</a:t>
                       </a:r>
                     </a:p>
                   </a:txBody>
@@ -14098,13 +15119,47 @@
                     <a:lstStyle/>
                     <a:p>
                       <a:r>
-                        <a:rPr sz="950" b="1">
+                        <a:rPr sz="900" b="1">
                           <a:solidFill>
                             <a:srgbClr val="0F172A"/>
                           </a:solidFill>
                           <a:latin typeface="DM Sans"/>
                         </a:rPr>
-                        <a:t>Fix</a:t>
+                        <a:t>RPN</a:t>
+                      </a:r>
+                    </a:p>
+                  </a:txBody>
+                  <a:tcPr marL="36576" marR="36576" marT="22860" marB="18288" anchor="ctr">
+                    <a:noFill/>
+                    <a:lnL w="12700">
+                      <a:noFill/>
+                    </a:lnL>
+                    <a:lnR w="12700">
+                      <a:noFill/>
+                    </a:lnR>
+                    <a:lnT w="12700">
+                      <a:noFill/>
+                    </a:lnT>
+                    <a:lnB w="12700">
+                      <a:solidFill>
+                        <a:srgbClr val="CBD5E1"/>
+                      </a:solidFill>
+                    </a:lnB>
+                  </a:tcPr>
+                </a:tc>
+                <a:tc>
+                  <a:txBody>
+                    <a:bodyPr wrap="square"/>
+                    <a:lstStyle/>
+                    <a:p>
+                      <a:r>
+                        <a:rPr sz="900" b="1">
+                          <a:solidFill>
+                            <a:srgbClr val="0F172A"/>
+                          </a:solidFill>
+                          <a:latin typeface="DM Sans"/>
+                        </a:rPr>
+                        <a:t>Fix / test</a:t>
                       </a:r>
                     </a:p>
                   </a:txBody>
@@ -14127,20 +15182,20 @@
                   </a:tcPr>
                 </a:tc>
               </a:tr>
-              <a:tr h="329184">
+              <a:tr h="274320">
                 <a:tc>
                   <a:txBody>
                     <a:bodyPr wrap="square"/>
                     <a:lstStyle/>
                     <a:p>
                       <a:r>
-                        <a:rPr sz="1050" b="1">
+                        <a:rPr sz="940" b="1">
                           <a:solidFill>
                             <a:srgbClr val="0F172A"/>
                           </a:solidFill>
                           <a:latin typeface="DM Sans"/>
                         </a:rPr>
-                        <a:t>Cracked sense lead reads 'dry'</a:t>
+                        <a:t>F04 cracked sense lead</a:t>
                       </a:r>
                     </a:p>
                   </a:txBody>
@@ -14168,13 +15223,13 @@
                     <a:lstStyle/>
                     <a:p>
                       <a:r>
-                        <a:rPr sz="1050" b="1">
+                        <a:rPr sz="940" b="0">
                           <a:solidFill>
-                            <a:srgbClr val="DC2626"/>
+                            <a:srgbClr val="334155"/>
                           </a:solidFill>
                           <a:latin typeface="DM Sans"/>
                         </a:rPr>
-                        <a:t>224</a:t>
+                        <a:t>zone reads 'dry' for ever</a:t>
                       </a:r>
                     </a:p>
                   </a:txBody>
@@ -14202,49 +15257,13 @@
                     <a:lstStyle/>
                     <a:p>
                       <a:r>
-                        <a:rPr sz="1050" b="0">
+                        <a:rPr sz="940" b="1">
                           <a:solidFill>
-                            <a:srgbClr val="334155"/>
+                            <a:srgbClr val="DC2626"/>
                           </a:solidFill>
                           <a:latin typeface="DM Sans"/>
                         </a:rPr>
-                        <a:t>v0.2: loop each lead to a 2nd pad</a:t>
-                      </a:r>
-                    </a:p>
-                  </a:txBody>
-                  <a:tcPr marL="36576" marR="36576" marT="22860" marB="18288" anchor="ctr">
-                    <a:noFill/>
-                    <a:lnL w="7620">
-                      <a:noFill/>
-                    </a:lnL>
-                    <a:lnR w="7620">
-                      <a:noFill/>
-                    </a:lnR>
-                    <a:lnT w="7620">
-                      <a:noFill/>
-                    </a:lnT>
-                    <a:lnB w="7620">
-                      <a:solidFill>
-                        <a:srgbClr val="E2E8F0"/>
-                      </a:solidFill>
-                    </a:lnB>
-                  </a:tcPr>
-                </a:tc>
-              </a:tr>
-              <a:tr h="329184">
-                <a:tc>
-                  <a:txBody>
-                    <a:bodyPr wrap="square"/>
-                    <a:lstStyle/>
-                    <a:p>
-                      <a:r>
-                        <a:rPr sz="1050" b="1">
-                          <a:solidFill>
-                            <a:srgbClr val="0F172A"/>
-                          </a:solidFill>
-                          <a:latin typeface="DM Sans"/>
-                        </a:rPr>
-                        <a:t>Front path differs from model</a:t>
+                        <a:t>224</a:t>
                       </a:r>
                     </a:p>
                   </a:txBody>
@@ -14272,13 +15291,49 @@
                     <a:lstStyle/>
                     <a:p>
                       <a:r>
-                        <a:rPr sz="1050" b="1">
+                        <a:rPr sz="940" b="0">
                           <a:solidFill>
-                            <a:srgbClr val="DC2626"/>
+                            <a:srgbClr val="334155"/>
                           </a:solidFill>
                           <a:latin typeface="DM Sans"/>
                         </a:rPr>
-                        <a:t>210</a:t>
+                        <a:t>v0.2 loops each lead · T-MECH-01</a:t>
+                      </a:r>
+                    </a:p>
+                  </a:txBody>
+                  <a:tcPr marL="36576" marR="36576" marT="22860" marB="18288" anchor="ctr">
+                    <a:noFill/>
+                    <a:lnL w="7620">
+                      <a:noFill/>
+                    </a:lnL>
+                    <a:lnR w="7620">
+                      <a:noFill/>
+                    </a:lnR>
+                    <a:lnT w="7620">
+                      <a:noFill/>
+                    </a:lnT>
+                    <a:lnB w="7620">
+                      <a:solidFill>
+                        <a:srgbClr val="E2E8F0"/>
+                      </a:solidFill>
+                    </a:lnB>
+                  </a:tcPr>
+                </a:tc>
+              </a:tr>
+              <a:tr h="274320">
+                <a:tc>
+                  <a:txBody>
+                    <a:bodyPr wrap="square"/>
+                    <a:lstStyle/>
+                    <a:p>
+                      <a:r>
+                        <a:rPr sz="940" b="1">
+                          <a:solidFill>
+                            <a:srgbClr val="0F172A"/>
+                          </a:solidFill>
+                          <a:latin typeface="DM Sans"/>
+                        </a:rPr>
+                        <a:t>F07 front path differs</a:t>
                       </a:r>
                     </a:p>
                   </a:txBody>
@@ -14306,49 +15361,13 @@
                     <a:lstStyle/>
                     <a:p>
                       <a:r>
-                        <a:rPr sz="1050" b="0">
+                        <a:rPr sz="940" b="0">
                           <a:solidFill>
                             <a:srgbClr val="334155"/>
                           </a:solidFill>
                           <a:latin typeface="DM Sans"/>
                         </a:rPr>
-                        <a:t>test on real foam dressings (E4)</a:t>
-                      </a:r>
-                    </a:p>
-                  </a:txBody>
-                  <a:tcPr marL="36576" marR="36576" marT="22860" marB="18288" anchor="ctr">
-                    <a:noFill/>
-                    <a:lnL w="7620">
-                      <a:noFill/>
-                    </a:lnL>
-                    <a:lnR w="7620">
-                      <a:noFill/>
-                    </a:lnR>
-                    <a:lnT w="7620">
-                      <a:noFill/>
-                    </a:lnT>
-                    <a:lnB w="7620">
-                      <a:solidFill>
-                        <a:srgbClr val="E2E8F0"/>
-                      </a:solidFill>
-                    </a:lnB>
-                  </a:tcPr>
-                </a:tc>
-              </a:tr>
-              <a:tr h="329184">
-                <a:tc>
-                  <a:txBody>
-                    <a:bodyPr wrap="square"/>
-                    <a:lstStyle/>
-                    <a:p>
-                      <a:r>
-                        <a:rPr sz="1050" b="1">
-                          <a:solidFill>
-                            <a:srgbClr val="0F172A"/>
-                          </a:solidFill>
-                          <a:latin typeface="DM Sans"/>
-                        </a:rPr>
-                        <a:t>Humid dressing reads 'wet'</a:t>
+                        <a:t>CHANGE late or never</a:t>
                       </a:r>
                     </a:p>
                   </a:txBody>
@@ -14376,13 +15395,13 @@
                     <a:lstStyle/>
                     <a:p>
                       <a:r>
-                        <a:rPr sz="1050" b="1">
+                        <a:rPr sz="940" b="1">
                           <a:solidFill>
                             <a:srgbClr val="DC2626"/>
                           </a:solidFill>
                           <a:latin typeface="DM Sans"/>
                         </a:rPr>
-                        <a:t>150</a:t>
+                        <a:t>210</a:t>
                       </a:r>
                     </a:p>
                   </a:txBody>
@@ -14410,13 +15429,427 @@
                     <a:lstStyle/>
                     <a:p>
                       <a:r>
-                        <a:rPr sz="1050" b="0">
+                        <a:rPr sz="940" b="0">
                           <a:solidFill>
                             <a:srgbClr val="334155"/>
                           </a:solidFill>
                           <a:latin typeface="DM Sans"/>
                         </a:rPr>
-                        <a:t>measure dry baselines (E4)</a:t>
+                        <a:t>E4 on real foam dressings</a:t>
+                      </a:r>
+                    </a:p>
+                  </a:txBody>
+                  <a:tcPr marL="36576" marR="36576" marT="22860" marB="18288" anchor="ctr">
+                    <a:noFill/>
+                    <a:lnL w="7620">
+                      <a:noFill/>
+                    </a:lnL>
+                    <a:lnR w="7620">
+                      <a:noFill/>
+                    </a:lnR>
+                    <a:lnT w="7620">
+                      <a:noFill/>
+                    </a:lnT>
+                    <a:lnB w="7620">
+                      <a:solidFill>
+                        <a:srgbClr val="E2E8F0"/>
+                      </a:solidFill>
+                    </a:lnB>
+                  </a:tcPr>
+                </a:tc>
+              </a:tr>
+              <a:tr h="274320">
+                <a:tc>
+                  <a:txBody>
+                    <a:bodyPr wrap="square"/>
+                    <a:lstStyle/>
+                    <a:p>
+                      <a:r>
+                        <a:rPr sz="940" b="1">
+                          <a:solidFill>
+                            <a:srgbClr val="0F172A"/>
+                          </a:solidFill>
+                          <a:latin typeface="DM Sans"/>
+                        </a:rPr>
+                        <a:t>F08 humid dry baseline</a:t>
+                      </a:r>
+                    </a:p>
+                  </a:txBody>
+                  <a:tcPr marL="36576" marR="36576" marT="22860" marB="18288" anchor="ctr">
+                    <a:noFill/>
+                    <a:lnL w="7620">
+                      <a:noFill/>
+                    </a:lnL>
+                    <a:lnR w="7620">
+                      <a:noFill/>
+                    </a:lnR>
+                    <a:lnT w="7620">
+                      <a:noFill/>
+                    </a:lnT>
+                    <a:lnB w="7620">
+                      <a:solidFill>
+                        <a:srgbClr val="E2E8F0"/>
+                      </a:solidFill>
+                    </a:lnB>
+                  </a:tcPr>
+                </a:tc>
+                <a:tc>
+                  <a:txBody>
+                    <a:bodyPr wrap="square"/>
+                    <a:lstStyle/>
+                    <a:p>
+                      <a:r>
+                        <a:rPr sz="940" b="0">
+                          <a:solidFill>
+                            <a:srgbClr val="334155"/>
+                          </a:solidFill>
+                          <a:latin typeface="DM Sans"/>
+                        </a:rPr>
+                        <a:t>false 'wet'</a:t>
+                      </a:r>
+                    </a:p>
+                  </a:txBody>
+                  <a:tcPr marL="36576" marR="36576" marT="22860" marB="18288" anchor="ctr">
+                    <a:noFill/>
+                    <a:lnL w="7620">
+                      <a:noFill/>
+                    </a:lnL>
+                    <a:lnR w="7620">
+                      <a:noFill/>
+                    </a:lnR>
+                    <a:lnT w="7620">
+                      <a:noFill/>
+                    </a:lnT>
+                    <a:lnB w="7620">
+                      <a:solidFill>
+                        <a:srgbClr val="E2E8F0"/>
+                      </a:solidFill>
+                    </a:lnB>
+                  </a:tcPr>
+                </a:tc>
+                <a:tc>
+                  <a:txBody>
+                    <a:bodyPr wrap="square"/>
+                    <a:lstStyle/>
+                    <a:p>
+                      <a:r>
+                        <a:rPr sz="940" b="1">
+                          <a:solidFill>
+                            <a:srgbClr val="DC2626"/>
+                          </a:solidFill>
+                          <a:latin typeface="DM Sans"/>
+                        </a:rPr>
+                        <a:t>150</a:t>
+                      </a:r>
+                    </a:p>
+                  </a:txBody>
+                  <a:tcPr marL="36576" marR="36576" marT="22860" marB="18288" anchor="ctr">
+                    <a:noFill/>
+                    <a:lnL w="7620">
+                      <a:noFill/>
+                    </a:lnL>
+                    <a:lnR w="7620">
+                      <a:noFill/>
+                    </a:lnR>
+                    <a:lnT w="7620">
+                      <a:noFill/>
+                    </a:lnT>
+                    <a:lnB w="7620">
+                      <a:solidFill>
+                        <a:srgbClr val="E2E8F0"/>
+                      </a:solidFill>
+                    </a:lnB>
+                  </a:tcPr>
+                </a:tc>
+                <a:tc>
+                  <a:txBody>
+                    <a:bodyPr wrap="square"/>
+                    <a:lstStyle/>
+                    <a:p>
+                      <a:r>
+                        <a:rPr sz="940" b="0">
+                          <a:solidFill>
+                            <a:srgbClr val="334155"/>
+                          </a:solidFill>
+                          <a:latin typeface="DM Sans"/>
+                        </a:rPr>
+                        <a:t>measure baselines (E4)</a:t>
+                      </a:r>
+                    </a:p>
+                  </a:txBody>
+                  <a:tcPr marL="36576" marR="36576" marT="22860" marB="18288" anchor="ctr">
+                    <a:noFill/>
+                    <a:lnL w="7620">
+                      <a:noFill/>
+                    </a:lnL>
+                    <a:lnR w="7620">
+                      <a:noFill/>
+                    </a:lnR>
+                    <a:lnT w="7620">
+                      <a:noFill/>
+                    </a:lnT>
+                    <a:lnB w="7620">
+                      <a:solidFill>
+                        <a:srgbClr val="E2E8F0"/>
+                      </a:solidFill>
+                    </a:lnB>
+                  </a:tcPr>
+                </a:tc>
+              </a:tr>
+              <a:tr h="274320">
+                <a:tc>
+                  <a:txBody>
+                    <a:bodyPr wrap="square"/>
+                    <a:lstStyle/>
+                    <a:p>
+                      <a:r>
+                        <a:rPr sz="940" b="1">
+                          <a:solidFill>
+                            <a:srgbClr val="0F172A"/>
+                          </a:solidFill>
+                          <a:latin typeface="DM Sans"/>
+                        </a:rPr>
+                        <a:t>F01 weak carbon layer</a:t>
+                      </a:r>
+                    </a:p>
+                  </a:txBody>
+                  <a:tcPr marL="36576" marR="36576" marT="22860" marB="18288" anchor="ctr">
+                    <a:noFill/>
+                    <a:lnL w="7620">
+                      <a:noFill/>
+                    </a:lnL>
+                    <a:lnR w="7620">
+                      <a:noFill/>
+                    </a:lnR>
+                    <a:lnT w="7620">
+                      <a:noFill/>
+                    </a:lnT>
+                    <a:lnB w="7620">
+                      <a:solidFill>
+                        <a:srgbClr val="E2E8F0"/>
+                      </a:solidFill>
+                    </a:lnB>
+                  </a:tcPr>
+                </a:tc>
+                <a:tc>
+                  <a:txBody>
+                    <a:bodyPr wrap="square"/>
+                    <a:lstStyle/>
+                    <a:p>
+                      <a:r>
+                        <a:rPr sz="940" b="0">
+                          <a:solidFill>
+                            <a:srgbClr val="334155"/>
+                          </a:solidFill>
+                          <a:latin typeface="DM Sans"/>
+                        </a:rPr>
+                        <a:t>zones always 'dry'</a:t>
+                      </a:r>
+                    </a:p>
+                  </a:txBody>
+                  <a:tcPr marL="36576" marR="36576" marT="22860" marB="18288" anchor="ctr">
+                    <a:noFill/>
+                    <a:lnL w="7620">
+                      <a:noFill/>
+                    </a:lnL>
+                    <a:lnR w="7620">
+                      <a:noFill/>
+                    </a:lnR>
+                    <a:lnT w="7620">
+                      <a:noFill/>
+                    </a:lnT>
+                    <a:lnB w="7620">
+                      <a:solidFill>
+                        <a:srgbClr val="E2E8F0"/>
+                      </a:solidFill>
+                    </a:lnB>
+                  </a:tcPr>
+                </a:tc>
+                <a:tc>
+                  <a:txBody>
+                    <a:bodyPr wrap="square"/>
+                    <a:lstStyle/>
+                    <a:p>
+                      <a:r>
+                        <a:rPr sz="940" b="1">
+                          <a:solidFill>
+                            <a:srgbClr val="DC2626"/>
+                          </a:solidFill>
+                          <a:latin typeface="DM Sans"/>
+                        </a:rPr>
+                        <a:t>140</a:t>
+                      </a:r>
+                    </a:p>
+                  </a:txBody>
+                  <a:tcPr marL="36576" marR="36576" marT="22860" marB="18288" anchor="ctr">
+                    <a:noFill/>
+                    <a:lnL w="7620">
+                      <a:noFill/>
+                    </a:lnL>
+                    <a:lnR w="7620">
+                      <a:noFill/>
+                    </a:lnR>
+                    <a:lnT w="7620">
+                      <a:noFill/>
+                    </a:lnT>
+                    <a:lnB w="7620">
+                      <a:solidFill>
+                        <a:srgbClr val="E2E8F0"/>
+                      </a:solidFill>
+                    </a:lnB>
+                  </a:tcPr>
+                </a:tc>
+                <a:tc>
+                  <a:txBody>
+                    <a:bodyPr wrap="square"/>
+                    <a:lstStyle/>
+                    <a:p>
+                      <a:r>
+                        <a:rPr sz="940" b="0">
+                          <a:solidFill>
+                            <a:srgbClr val="334155"/>
+                          </a:solidFill>
+                          <a:latin typeface="DM Sans"/>
+                        </a:rPr>
+                        <a:t>E2 + per-strip QC record</a:t>
+                      </a:r>
+                    </a:p>
+                  </a:txBody>
+                  <a:tcPr marL="36576" marR="36576" marT="22860" marB="18288" anchor="ctr">
+                    <a:noFill/>
+                    <a:lnL w="7620">
+                      <a:noFill/>
+                    </a:lnL>
+                    <a:lnR w="7620">
+                      <a:noFill/>
+                    </a:lnR>
+                    <a:lnT w="7620">
+                      <a:noFill/>
+                    </a:lnT>
+                    <a:lnB w="7620">
+                      <a:solidFill>
+                        <a:srgbClr val="E2E8F0"/>
+                      </a:solidFill>
+                    </a:lnB>
+                  </a:tcPr>
+                </a:tc>
+              </a:tr>
+              <a:tr h="274320">
+                <a:tc>
+                  <a:txBody>
+                    <a:bodyPr wrap="square"/>
+                    <a:lstStyle/>
+                    <a:p>
+                      <a:r>
+                        <a:rPr sz="940" b="1">
+                          <a:solidFill>
+                            <a:srgbClr val="0F172A"/>
+                          </a:solidFill>
+                          <a:latin typeface="DM Sans"/>
+                        </a:rPr>
+                        <a:t>F05 pin contact on carbon</a:t>
+                      </a:r>
+                    </a:p>
+                  </a:txBody>
+                  <a:tcPr marL="36576" marR="36576" marT="22860" marB="18288" anchor="ctr">
+                    <a:noFill/>
+                    <a:lnL w="7620">
+                      <a:noFill/>
+                    </a:lnL>
+                    <a:lnR w="7620">
+                      <a:noFill/>
+                    </a:lnR>
+                    <a:lnT w="7620">
+                      <a:noFill/>
+                    </a:lnT>
+                    <a:lnB w="7620">
+                      <a:solidFill>
+                        <a:srgbClr val="E2E8F0"/>
+                      </a:solidFill>
+                    </a:lnB>
+                  </a:tcPr>
+                </a:tc>
+                <a:tc>
+                  <a:txBody>
+                    <a:bodyPr wrap="square"/>
+                    <a:lstStyle/>
+                    <a:p>
+                      <a:r>
+                        <a:rPr sz="940" b="0">
+                          <a:solidFill>
+                            <a:srgbClr val="334155"/>
+                          </a:solidFill>
+                          <a:latin typeface="DM Sans"/>
+                        </a:rPr>
+                        <a:t>readings drift high</a:t>
+                      </a:r>
+                    </a:p>
+                  </a:txBody>
+                  <a:tcPr marL="36576" marR="36576" marT="22860" marB="18288" anchor="ctr">
+                    <a:noFill/>
+                    <a:lnL w="7620">
+                      <a:noFill/>
+                    </a:lnL>
+                    <a:lnR w="7620">
+                      <a:noFill/>
+                    </a:lnR>
+                    <a:lnT w="7620">
+                      <a:noFill/>
+                    </a:lnT>
+                    <a:lnB w="7620">
+                      <a:solidFill>
+                        <a:srgbClr val="E2E8F0"/>
+                      </a:solidFill>
+                    </a:lnB>
+                  </a:tcPr>
+                </a:tc>
+                <a:tc>
+                  <a:txBody>
+                    <a:bodyPr wrap="square"/>
+                    <a:lstStyle/>
+                    <a:p>
+                      <a:r>
+                        <a:rPr sz="940" b="1">
+                          <a:solidFill>
+                            <a:srgbClr val="DC2626"/>
+                          </a:solidFill>
+                          <a:latin typeface="DM Sans"/>
+                        </a:rPr>
+                        <a:t>120</a:t>
+                      </a:r>
+                    </a:p>
+                  </a:txBody>
+                  <a:tcPr marL="36576" marR="36576" marT="22860" marB="18288" anchor="ctr">
+                    <a:noFill/>
+                    <a:lnL w="7620">
+                      <a:noFill/>
+                    </a:lnL>
+                    <a:lnR w="7620">
+                      <a:noFill/>
+                    </a:lnR>
+                    <a:lnT w="7620">
+                      <a:noFill/>
+                    </a:lnT>
+                    <a:lnB w="7620">
+                      <a:solidFill>
+                        <a:srgbClr val="E2E8F0"/>
+                      </a:solidFill>
+                    </a:lnB>
+                  </a:tcPr>
+                </a:tc>
+                <a:tc>
+                  <a:txBody>
+                    <a:bodyPr wrap="square"/>
+                    <a:lstStyle/>
+                    <a:p>
+                      <a:r>
+                        <a:rPr sz="940" b="0">
+                          <a:solidFill>
+                            <a:srgbClr val="334155"/>
+                          </a:solidFill>
+                          <a:latin typeface="DM Sans"/>
+                        </a:rPr>
+                        <a:t>rounded pins · T-CON-01</a:t>
                       </a:r>
                     </a:p>
                   </a:txBody>
@@ -14475,8 +15908,8 @@
         </p:nvSpPr>
         <p:spPr>
           <a:xfrm>
-            <a:off x="768096" y="3749039"/>
-            <a:ext cx="5029200" cy="2103120"/>
+            <a:off x="768096" y="3858768"/>
+            <a:ext cx="5029200" cy="2011680"/>
           </a:xfrm>
           <a:prstGeom prst="rect">
             <a:avLst/>
@@ -14557,7 +15990,7 @@
                 </a:solidFill>
                 <a:latin typeface="DM Sans"/>
               </a:rPr>
-              <a:t>bipolar drive, idle pins off.</a:t>
+              <a:t>bipolar drive, idle pins off; bench test T8 checks &lt; 5 mV.</a:t>
             </a:r>
           </a:p>
           <a:p>
@@ -14631,7 +16064,44 @@
                 </a:solidFill>
                 <a:latin typeface="DM Sans"/>
               </a:rPr>
-              <a:t>strip on the pad's outer face.</a:t>
+              <a:t>strip on the pad's outer face, leads sealed.</a:t>
+            </a:r>
+          </a:p>
+          <a:p>
+            <a:pPr>
+              <a:lnSpc>
+                <a:spcPct val="108000"/>
+              </a:lnSpc>
+              <a:spcAft>
+                <a:spcPts val="700"/>
+              </a:spcAft>
+            </a:pPr>
+            <a:r>
+              <a:rPr sz="1100" b="0">
+                <a:solidFill>
+                  <a:srgbClr val="059669"/>
+                </a:solidFill>
+                <a:latin typeface="DM Sans"/>
+              </a:rPr>
+              <a:t>▪  </a:t>
+            </a:r>
+            <a:r>
+              <a:rPr sz="1100" b="1">
+                <a:solidFill>
+                  <a:srgbClr val="0F172A"/>
+                </a:solidFill>
+                <a:latin typeface="DM Sans"/>
+              </a:rPr>
+              <a:t>Laser work:  </a:t>
+            </a:r>
+            <a:r>
+              <a:rPr sz="1100" b="0">
+                <a:solidFill>
+                  <a:srgbClr val="334155"/>
+                </a:solidFill>
+                <a:latin typeface="DM Sans"/>
+              </a:rPr>
+              <a:t>signed safety checklist every session.</a:t>
             </a:r>
           </a:p>
         </p:txBody>
@@ -14644,8 +16114,8 @@
         </p:nvSpPr>
         <p:spPr>
           <a:xfrm>
-            <a:off x="6464808" y="3749039"/>
-            <a:ext cx="5029200" cy="2103120"/>
+            <a:off x="6464808" y="3858768"/>
+            <a:ext cx="5029200" cy="2011680"/>
           </a:xfrm>
           <a:prstGeom prst="rect">
             <a:avLst/>
@@ -16642,8 +18112,8 @@
         </p:nvSpPr>
         <p:spPr>
           <a:xfrm>
-            <a:off x="10202875" y="457200"/>
-            <a:ext cx="1455724" cy="246888"/>
+            <a:off x="9829800" y="457200"/>
+            <a:ext cx="1828800" cy="246888"/>
           </a:xfrm>
           <a:prstGeom prst="roundRect">
             <a:avLst>
@@ -16684,7 +18154,7 @@
                 </a:solidFill>
                 <a:latin typeface="DM Sans"/>
               </a:rPr>
-              <a:t>ALL IMAGES ORIGINAL</a:t>
+              <a:t>ALL IMAGES FROM OUR FILES</a:t>
             </a:r>
           </a:p>
         </p:txBody>
@@ -16724,7 +18194,7 @@
                 </a:solidFill>
                 <a:latin typeface="DM Sans"/>
               </a:rPr>
-              <a:t>Every image in this deck was produced by the team from our own project files. No stock photos, no AI-generated images and no external images are used.</a:t>
+              <a:t>Every image comes from our own project files: SolidWorks renders and screenshots, the KiCad export, and plots drawn by our scripts (written with AI assistance). No stock photos and no AI image generators. Team photos (slides 2 and 12) are taken by the team.</a:t>
             </a:r>
           </a:p>
         </p:txBody>
@@ -16745,8 +18215,8 @@
         </p:blipFill>
         <p:spPr>
           <a:xfrm>
-            <a:off x="561593" y="1417320"/>
-            <a:ext cx="797053" cy="530352"/>
+            <a:off x="538680" y="1517904"/>
+            <a:ext cx="852022" cy="566928"/>
           </a:xfrm>
           <a:prstGeom prst="rect">
             <a:avLst/>
@@ -16761,8 +18231,8 @@
         </p:nvSpPr>
         <p:spPr>
           <a:xfrm>
-            <a:off x="1490472" y="1435608"/>
-            <a:ext cx="4526280" cy="548640"/>
+            <a:off x="1472184" y="1517904"/>
+            <a:ext cx="2743200" cy="731520"/>
           </a:xfrm>
           <a:prstGeom prst="rect">
             <a:avLst/>
@@ -16782,7 +18252,7 @@
               </a:spcAft>
             </a:pPr>
             <a:r>
-              <a:rPr sz="760" b="1">
+              <a:rPr sz="740" b="1">
                 <a:solidFill>
                   <a:srgbClr val="0F172A"/>
                 </a:solidFill>
@@ -16801,7 +18271,7 @@
               </a:spcAft>
             </a:pPr>
             <a:r>
-              <a:rPr sz="760" b="0">
+              <a:rPr sz="740" b="0">
                 <a:solidFill>
                   <a:srgbClr val="64748B"/>
                 </a:solidFill>
@@ -16810,7 +18280,7 @@
               <a:t>Source: </a:t>
             </a:r>
             <a:r>
-              <a:rPr sz="760" b="0">
+              <a:rPr sz="740" b="0">
                 <a:solidFill>
                   <a:srgbClr val="0369A1"/>
                 </a:solidFill>
@@ -16829,7 +18299,7 @@
               </a:spcAft>
             </a:pPr>
             <a:r>
-              <a:rPr sz="760" b="0">
+              <a:rPr sz="740" b="0">
                 <a:solidFill>
                   <a:srgbClr val="64748B"/>
                 </a:solidFill>
@@ -16856,8 +18326,8 @@
         </p:blipFill>
         <p:spPr>
           <a:xfrm>
-            <a:off x="6185153" y="1417320"/>
-            <a:ext cx="797053" cy="530352"/>
+            <a:off x="4287720" y="1517904"/>
+            <a:ext cx="852022" cy="566928"/>
           </a:xfrm>
           <a:prstGeom prst="rect">
             <a:avLst/>
@@ -16872,8 +18342,8 @@
         </p:nvSpPr>
         <p:spPr>
           <a:xfrm>
-            <a:off x="7114032" y="1435608"/>
-            <a:ext cx="4526280" cy="548640"/>
+            <a:off x="5221224" y="1517904"/>
+            <a:ext cx="2743200" cy="731520"/>
           </a:xfrm>
           <a:prstGeom prst="rect">
             <a:avLst/>
@@ -16893,7 +18363,7 @@
               </a:spcAft>
             </a:pPr>
             <a:r>
-              <a:rPr sz="760" b="1">
+              <a:rPr sz="740" b="1">
                 <a:solidFill>
                   <a:srgbClr val="0F172A"/>
                 </a:solidFill>
@@ -16912,7 +18382,7 @@
               </a:spcAft>
             </a:pPr>
             <a:r>
-              <a:rPr sz="760" b="0">
+              <a:rPr sz="740" b="0">
                 <a:solidFill>
                   <a:srgbClr val="64748B"/>
                 </a:solidFill>
@@ -16921,7 +18391,7 @@
               <a:t>Source: </a:t>
             </a:r>
             <a:r>
-              <a:rPr sz="760" b="0">
+              <a:rPr sz="740" b="0">
                 <a:solidFill>
                   <a:srgbClr val="0369A1"/>
                 </a:solidFill>
@@ -16940,7 +18410,7 @@
               </a:spcAft>
             </a:pPr>
             <a:r>
-              <a:rPr sz="760" b="0">
+              <a:rPr sz="740" b="0">
                 <a:solidFill>
                   <a:srgbClr val="64748B"/>
                 </a:solidFill>
@@ -16967,8 +18437,8 @@
         </p:blipFill>
         <p:spPr>
           <a:xfrm>
-            <a:off x="561593" y="2075688"/>
-            <a:ext cx="797053" cy="530352"/>
+            <a:off x="8036760" y="1517904"/>
+            <a:ext cx="852022" cy="566928"/>
           </a:xfrm>
           <a:prstGeom prst="rect">
             <a:avLst/>
@@ -16983,8 +18453,8 @@
         </p:nvSpPr>
         <p:spPr>
           <a:xfrm>
-            <a:off x="1490472" y="2093976"/>
-            <a:ext cx="4526280" cy="548640"/>
+            <a:off x="8970263" y="1517904"/>
+            <a:ext cx="2743200" cy="731520"/>
           </a:xfrm>
           <a:prstGeom prst="rect">
             <a:avLst/>
@@ -17004,7 +18474,7 @@
               </a:spcAft>
             </a:pPr>
             <a:r>
-              <a:rPr sz="760" b="1">
+              <a:rPr sz="740" b="1">
                 <a:solidFill>
                   <a:srgbClr val="0F172A"/>
                 </a:solidFill>
@@ -17023,7 +18493,7 @@
               </a:spcAft>
             </a:pPr>
             <a:r>
-              <a:rPr sz="760" b="0">
+              <a:rPr sz="740" b="0">
                 <a:solidFill>
                   <a:srgbClr val="64748B"/>
                 </a:solidFill>
@@ -17032,7 +18502,7 @@
               <a:t>Source: </a:t>
             </a:r>
             <a:r>
-              <a:rPr sz="760" b="0">
+              <a:rPr sz="740" b="0">
                 <a:solidFill>
                   <a:srgbClr val="0369A1"/>
                 </a:solidFill>
@@ -17051,7 +18521,7 @@
               </a:spcAft>
             </a:pPr>
             <a:r>
-              <a:rPr sz="760" b="0">
+              <a:rPr sz="740" b="0">
                 <a:solidFill>
                   <a:srgbClr val="64748B"/>
                 </a:solidFill>
@@ -17064,7 +18534,7 @@
       </p:sp>
       <p:pic>
         <p:nvPicPr>
-          <p:cNvPr id="561" name="Picture 560" descr="fig_block.png"/>
+          <p:cNvPr id="561" name="Picture 560" descr="fig_howitworks.png"/>
           <p:cNvPicPr>
             <a:picLocks noChangeAspect="1"/>
           </p:cNvPicPr>
@@ -17078,8 +18548,8 @@
         </p:blipFill>
         <p:spPr>
           <a:xfrm>
-            <a:off x="6213284" y="2075688"/>
-            <a:ext cx="740791" cy="530352"/>
+            <a:off x="568751" y="2386584"/>
+            <a:ext cx="791880" cy="566928"/>
           </a:xfrm>
           <a:prstGeom prst="rect">
             <a:avLst/>
@@ -17094,8 +18564,8 @@
         </p:nvSpPr>
         <p:spPr>
           <a:xfrm>
-            <a:off x="7114032" y="2093976"/>
-            <a:ext cx="4526280" cy="548640"/>
+            <a:off x="1472184" y="2386584"/>
+            <a:ext cx="2743200" cy="731520"/>
           </a:xfrm>
           <a:prstGeom prst="rect">
             <a:avLst/>
@@ -17115,13 +18585,13 @@
               </a:spcAft>
             </a:pPr>
             <a:r>
-              <a:rPr sz="760" b="1">
+              <a:rPr sz="740" b="1">
                 <a:solidFill>
                   <a:srgbClr val="0F172A"/>
                 </a:solidFill>
                 <a:latin typeface="DM Sans"/>
               </a:rPr>
-              <a:t>System block diagram</a:t>
+              <a:t>How it senses (concept)</a:t>
             </a:r>
           </a:p>
           <a:p>
@@ -17134,7 +18604,7 @@
               </a:spcAft>
             </a:pPr>
             <a:r>
-              <a:rPr sz="760" b="0">
+              <a:rPr sz="740" b="0">
                 <a:solidFill>
                   <a:srgbClr val="64748B"/>
                 </a:solidFill>
@@ -17143,13 +18613,13 @@
               <a:t>Source: </a:t>
             </a:r>
             <a:r>
-              <a:rPr sz="760" b="0">
+              <a:rPr sz="740" b="0">
                 <a:solidFill>
                   <a:srgbClr val="0369A1"/>
                 </a:solidFill>
                 <a:latin typeface="DM Sans"/>
               </a:rPr>
-              <a:t>make_figures.py · verification logs</a:t>
+              <a:t>make_figures.py · sensor_selection.md, calc_readout.py</a:t>
             </a:r>
           </a:p>
           <a:p>
@@ -17162,13 +18632,13 @@
               </a:spcAft>
             </a:pPr>
             <a:r>
-              <a:rPr sz="760" b="0">
+              <a:rPr sz="740" b="0">
                 <a:solidFill>
                   <a:srgbClr val="64748B"/>
                 </a:solidFill>
                 <a:latin typeface="DM Sans"/>
               </a:rPr>
-              <a:t>1_presentation/figures/fig_block.png</a:t>
+              <a:t>1_presentation/figures/fig_howitworks.png</a:t>
             </a:r>
           </a:p>
         </p:txBody>
@@ -17189,8 +18659,8 @@
         </p:blipFill>
         <p:spPr>
           <a:xfrm>
-            <a:off x="589724" y="2734056"/>
-            <a:ext cx="740791" cy="530352"/>
+            <a:off x="4317791" y="2386584"/>
+            <a:ext cx="791880" cy="566928"/>
           </a:xfrm>
           <a:prstGeom prst="rect">
             <a:avLst/>
@@ -17205,8 +18675,8 @@
         </p:nvSpPr>
         <p:spPr>
           <a:xfrm>
-            <a:off x="1490472" y="2752344"/>
-            <a:ext cx="4526280" cy="548640"/>
+            <a:off x="5221224" y="2386584"/>
+            <a:ext cx="2743200" cy="731520"/>
           </a:xfrm>
           <a:prstGeom prst="rect">
             <a:avLst/>
@@ -17226,7 +18696,7 @@
               </a:spcAft>
             </a:pPr>
             <a:r>
-              <a:rPr sz="760" b="1">
+              <a:rPr sz="740" b="1">
                 <a:solidFill>
                   <a:srgbClr val="0F172A"/>
                 </a:solidFill>
@@ -17245,7 +18715,7 @@
               </a:spcAft>
             </a:pPr>
             <a:r>
-              <a:rPr sz="760" b="0">
+              <a:rPr sz="740" b="0">
                 <a:solidFill>
                   <a:srgbClr val="64748B"/>
                 </a:solidFill>
@@ -17254,7 +18724,7 @@
               <a:t>Source: </a:t>
             </a:r>
             <a:r>
-              <a:rPr sz="760" b="0">
+              <a:rPr sz="740" b="0">
                 <a:solidFill>
                   <a:srgbClr val="0369A1"/>
                 </a:solidFill>
@@ -17273,7 +18743,7 @@
               </a:spcAft>
             </a:pPr>
             <a:r>
-              <a:rPr sz="760" b="0">
+              <a:rPr sz="740" b="0">
                 <a:solidFill>
                   <a:srgbClr val="64748B"/>
                 </a:solidFill>
@@ -17300,8 +18770,8 @@
         </p:blipFill>
         <p:spPr>
           <a:xfrm>
-            <a:off x="6213284" y="2734056"/>
-            <a:ext cx="740791" cy="530352"/>
+            <a:off x="8066831" y="2386584"/>
+            <a:ext cx="791880" cy="566928"/>
           </a:xfrm>
           <a:prstGeom prst="rect">
             <a:avLst/>
@@ -17316,8 +18786,8 @@
         </p:nvSpPr>
         <p:spPr>
           <a:xfrm>
-            <a:off x="7114032" y="2752344"/>
-            <a:ext cx="4526280" cy="548640"/>
+            <a:off x="8970263" y="2386584"/>
+            <a:ext cx="2743200" cy="731520"/>
           </a:xfrm>
           <a:prstGeom prst="rect">
             <a:avLst/>
@@ -17337,13 +18807,13 @@
               </a:spcAft>
             </a:pPr>
             <a:r>
-              <a:rPr sz="760" b="1">
+              <a:rPr sz="740" b="1">
                 <a:solidFill>
                   <a:srgbClr val="0F172A"/>
                 </a:solidFill>
                 <a:latin typeface="DM Sans"/>
               </a:rPr>
-              <a:t>SolidWorks renders + drawing</a:t>
+              <a:t>Annotated SolidWorks views</a:t>
             </a:r>
           </a:p>
           <a:p>
@@ -17356,7 +18826,7 @@
               </a:spcAft>
             </a:pPr>
             <a:r>
-              <a:rPr sz="760" b="0">
+              <a:rPr sz="740" b="0">
                 <a:solidFill>
                   <a:srgbClr val="64748B"/>
                 </a:solidFill>
@@ -17365,13 +18835,13 @@
               <a:t>Source: </a:t>
             </a:r>
             <a:r>
-              <a:rPr sz="760" b="0">
+              <a:rPr sz="740" b="0">
                 <a:solidFill>
                   <a:srgbClr val="0369A1"/>
                 </a:solidFill>
                 <a:latin typeface="DM Sans"/>
               </a:rPr>
-              <a:t>render_cad.py · 5_cad/solidworks (our models)</a:t>
+              <a:t>render_cad.py + make_figures.py · 5_cad/solidworks</a:t>
             </a:r>
           </a:p>
           <a:p>
@@ -17384,7 +18854,7 @@
               </a:spcAft>
             </a:pPr>
             <a:r>
-              <a:rPr sz="760" b="0">
+              <a:rPr sz="740" b="0">
                 <a:solidFill>
                   <a:srgbClr val="64748B"/>
                 </a:solidFill>
@@ -17411,8 +18881,8 @@
         </p:blipFill>
         <p:spPr>
           <a:xfrm>
-            <a:off x="589724" y="3392424"/>
-            <a:ext cx="740791" cy="530352"/>
+            <a:off x="568751" y="3255263"/>
+            <a:ext cx="791880" cy="566928"/>
           </a:xfrm>
           <a:prstGeom prst="rect">
             <a:avLst/>
@@ -17427,8 +18897,8 @@
         </p:nvSpPr>
         <p:spPr>
           <a:xfrm>
-            <a:off x="1490472" y="3410712"/>
-            <a:ext cx="4526280" cy="548640"/>
+            <a:off x="1472184" y="3255263"/>
+            <a:ext cx="2743200" cy="731520"/>
           </a:xfrm>
           <a:prstGeom prst="rect">
             <a:avLst/>
@@ -17448,7 +18918,7 @@
               </a:spcAft>
             </a:pPr>
             <a:r>
-              <a:rPr sz="760" b="1">
+              <a:rPr sz="740" b="1">
                 <a:solidFill>
                   <a:srgbClr val="0F172A"/>
                 </a:solidFill>
@@ -17467,7 +18937,7 @@
               </a:spcAft>
             </a:pPr>
             <a:r>
-              <a:rPr sz="760" b="0">
+              <a:rPr sz="740" b="0">
                 <a:solidFill>
                   <a:srgbClr val="64748B"/>
                 </a:solidFill>
@@ -17476,7 +18946,7 @@
               <a:t>Source: </a:t>
             </a:r>
             <a:r>
-              <a:rPr sz="760" b="0">
+              <a:rPr sz="740" b="0">
                 <a:solidFill>
                   <a:srgbClr val="0369A1"/>
                 </a:solidFill>
@@ -17495,7 +18965,7 @@
               </a:spcAft>
             </a:pPr>
             <a:r>
-              <a:rPr sz="760" b="0">
+              <a:rPr sz="740" b="0">
                 <a:solidFill>
                   <a:srgbClr val="64748B"/>
                 </a:solidFill>
@@ -17522,8 +18992,8 @@
         </p:blipFill>
         <p:spPr>
           <a:xfrm>
-            <a:off x="6153912" y="3437041"/>
-            <a:ext cx="859536" cy="441116"/>
+            <a:off x="4317791" y="3255263"/>
+            <a:ext cx="791880" cy="566928"/>
           </a:xfrm>
           <a:prstGeom prst="rect">
             <a:avLst/>
@@ -17538,8 +19008,8 @@
         </p:nvSpPr>
         <p:spPr>
           <a:xfrm>
-            <a:off x="7114032" y="3410712"/>
-            <a:ext cx="4526280" cy="548640"/>
+            <a:off x="5221224" y="3255263"/>
+            <a:ext cx="2743200" cy="731520"/>
           </a:xfrm>
           <a:prstGeom prst="rect">
             <a:avLst/>
@@ -17559,13 +19029,13 @@
               </a:spcAft>
             </a:pPr>
             <a:r>
-              <a:rPr sz="760" b="1">
+              <a:rPr sz="740" b="1">
                 <a:solidFill>
                   <a:srgbClr val="0F172A"/>
                 </a:solidFill>
                 <a:latin typeface="DM Sans"/>
               </a:rPr>
-              <a:t>KiCad schematic export</a:t>
+              <a:t>Measurement path + KiCad sheet</a:t>
             </a:r>
           </a:p>
           <a:p>
@@ -17578,7 +19048,7 @@
               </a:spcAft>
             </a:pPr>
             <a:r>
-              <a:rPr sz="760" b="0">
+              <a:rPr sz="740" b="0">
                 <a:solidFill>
                   <a:srgbClr val="64748B"/>
                 </a:solidFill>
@@ -17587,13 +19057,13 @@
               <a:t>Source: </a:t>
             </a:r>
             <a:r>
-              <a:rPr sz="760" b="0">
+              <a:rPr sz="740" b="0">
                 <a:solidFill>
                   <a:srgbClr val="0369A1"/>
                 </a:solidFill>
                 <a:latin typeface="DM Sans"/>
               </a:rPr>
-              <a:t>kicad-cli · reader_v0_1.kicad_sch (ours)</a:t>
+              <a:t>make_figures.py · reader_v0_1 netlist + KiCad PDF</a:t>
             </a:r>
           </a:p>
           <a:p>
@@ -17606,7 +19076,7 @@
               </a:spcAft>
             </a:pPr>
             <a:r>
-              <a:rPr sz="760" b="0">
+              <a:rPr sz="740" b="0">
                 <a:solidFill>
                   <a:srgbClr val="64748B"/>
                 </a:solidFill>
@@ -17633,8 +19103,8 @@
         </p:blipFill>
         <p:spPr>
           <a:xfrm>
-            <a:off x="589724" y="4050791"/>
-            <a:ext cx="740791" cy="530352"/>
+            <a:off x="8066831" y="3255263"/>
+            <a:ext cx="791880" cy="566928"/>
           </a:xfrm>
           <a:prstGeom prst="rect">
             <a:avLst/>
@@ -17649,8 +19119,8 @@
         </p:nvSpPr>
         <p:spPr>
           <a:xfrm>
-            <a:off x="1490472" y="4069079"/>
-            <a:ext cx="4526280" cy="548640"/>
+            <a:off x="8970263" y="3255263"/>
+            <a:ext cx="2743200" cy="731520"/>
           </a:xfrm>
           <a:prstGeom prst="rect">
             <a:avLst/>
@@ -17670,7 +19140,7 @@
               </a:spcAft>
             </a:pPr>
             <a:r>
-              <a:rPr sz="760" b="1">
+              <a:rPr sz="740" b="1">
                 <a:solidFill>
                   <a:srgbClr val="0F172A"/>
                 </a:solidFill>
@@ -17689,7 +19159,7 @@
               </a:spcAft>
             </a:pPr>
             <a:r>
-              <a:rPr sz="760" b="0">
+              <a:rPr sz="740" b="0">
                 <a:solidFill>
                   <a:srgbClr val="64748B"/>
                 </a:solidFill>
@@ -17698,7 +19168,7 @@
               <a:t>Source: </a:t>
             </a:r>
             <a:r>
-              <a:rPr sz="760" b="0">
+              <a:rPr sz="740" b="0">
                 <a:solidFill>
                   <a:srgbClr val="0369A1"/>
                 </a:solidFill>
@@ -17717,7 +19187,7 @@
               </a:spcAft>
             </a:pPr>
             <a:r>
-              <a:rPr sz="760" b="0">
+              <a:rPr sz="740" b="0">
                 <a:solidFill>
                   <a:srgbClr val="64748B"/>
                 </a:solidFill>
@@ -17744,8 +19214,8 @@
         </p:blipFill>
         <p:spPr>
           <a:xfrm>
-            <a:off x="6213284" y="4050791"/>
-            <a:ext cx="740791" cy="530352"/>
+            <a:off x="568751" y="4123944"/>
+            <a:ext cx="791880" cy="566928"/>
           </a:xfrm>
           <a:prstGeom prst="rect">
             <a:avLst/>
@@ -17760,8 +19230,8 @@
         </p:nvSpPr>
         <p:spPr>
           <a:xfrm>
-            <a:off x="7114032" y="4069079"/>
-            <a:ext cx="4526280" cy="548640"/>
+            <a:off x="1472184" y="4123944"/>
+            <a:ext cx="2743200" cy="731520"/>
           </a:xfrm>
           <a:prstGeom prst="rect">
             <a:avLst/>
@@ -17781,13 +19251,13 @@
               </a:spcAft>
             </a:pPr>
             <a:r>
-              <a:rPr sz="760" b="1">
+              <a:rPr sz="740" b="1">
                 <a:solidFill>
                   <a:srgbClr val="0F172A"/>
                 </a:solidFill>
                 <a:latin typeface="DM Sans"/>
               </a:rPr>
-              <a:t>SolidWorks screenshot + logs</a:t>
+              <a:t>Evidence gallery + tool output</a:t>
             </a:r>
           </a:p>
           <a:p>
@@ -17800,7 +19270,7 @@
               </a:spcAft>
             </a:pPr>
             <a:r>
-              <a:rPr sz="760" b="0">
+              <a:rPr sz="740" b="0">
                 <a:solidFill>
                   <a:srgbClr val="64748B"/>
                 </a:solidFill>
@@ -17809,13 +19279,13 @@
               <a:t>Source: </a:t>
             </a:r>
             <a:r>
-              <a:rPr sz="760" b="0">
+              <a:rPr sz="740" b="0">
                 <a:solidFill>
                   <a:srgbClr val="0369A1"/>
                 </a:solidFill>
                 <a:latin typeface="DM Sans"/>
               </a:rPr>
-              <a:t>screen capture of our machine · verbatim tool output</a:t>
+              <a:t>our files, screen capture, 19 Oct tool runs</a:t>
             </a:r>
           </a:p>
           <a:p>
@@ -17828,7 +19298,7 @@
               </a:spcAft>
             </a:pPr>
             <a:r>
-              <a:rPr sz="760" b="0">
+              <a:rPr sz="740" b="0">
                 <a:solidFill>
                   <a:srgbClr val="64748B"/>
                 </a:solidFill>
@@ -17855,8 +19325,8 @@
         </p:blipFill>
         <p:spPr>
           <a:xfrm>
-            <a:off x="589724" y="4709159"/>
-            <a:ext cx="740791" cy="530352"/>
+            <a:off x="4317791" y="4123944"/>
+            <a:ext cx="791880" cy="566928"/>
           </a:xfrm>
           <a:prstGeom prst="rect">
             <a:avLst/>
@@ -17871,8 +19341,8 @@
         </p:nvSpPr>
         <p:spPr>
           <a:xfrm>
-            <a:off x="1490472" y="4727447"/>
-            <a:ext cx="4526280" cy="548640"/>
+            <a:off x="5221224" y="4123944"/>
+            <a:ext cx="2743200" cy="731520"/>
           </a:xfrm>
           <a:prstGeom prst="rect">
             <a:avLst/>
@@ -17892,7 +19362,7 @@
               </a:spcAft>
             </a:pPr>
             <a:r>
-              <a:rPr sz="760" b="1">
+              <a:rPr sz="740" b="1">
                 <a:solidFill>
                   <a:srgbClr val="0F172A"/>
                 </a:solidFill>
@@ -17911,7 +19381,7 @@
               </a:spcAft>
             </a:pPr>
             <a:r>
-              <a:rPr sz="760" b="0">
+              <a:rPr sz="740" b="0">
                 <a:solidFill>
                   <a:srgbClr val="64748B"/>
                 </a:solidFill>
@@ -17920,7 +19390,7 @@
               <a:t>Source: </a:t>
             </a:r>
             <a:r>
-              <a:rPr sz="760" b="0">
+              <a:rPr sz="740" b="0">
                 <a:solidFill>
                   <a:srgbClr val="0369A1"/>
                 </a:solidFill>
@@ -17939,7 +19409,7 @@
               </a:spcAft>
             </a:pPr>
             <a:r>
-              <a:rPr sz="760" b="0">
+              <a:rPr sz="740" b="0">
                 <a:solidFill>
                   <a:srgbClr val="64748B"/>
                 </a:solidFill>
@@ -17966,8 +19436,8 @@
         </p:blipFill>
         <p:spPr>
           <a:xfrm>
-            <a:off x="6153912" y="4717669"/>
-            <a:ext cx="859535" cy="513333"/>
+            <a:off x="8028431" y="4148010"/>
+            <a:ext cx="868680" cy="518795"/>
           </a:xfrm>
           <a:prstGeom prst="rect">
             <a:avLst/>
@@ -17982,8 +19452,8 @@
         </p:nvSpPr>
         <p:spPr>
           <a:xfrm>
-            <a:off x="7114032" y="4727447"/>
-            <a:ext cx="4526280" cy="548640"/>
+            <a:off x="8970263" y="4123944"/>
+            <a:ext cx="2743200" cy="731520"/>
           </a:xfrm>
           <a:prstGeom prst="rect">
             <a:avLst/>
@@ -18003,7 +19473,7 @@
               </a:spcAft>
             </a:pPr>
             <a:r>
-              <a:rPr sz="760" b="1">
+              <a:rPr sz="740" b="1">
                 <a:solidFill>
                   <a:srgbClr val="0F172A"/>
                 </a:solidFill>
@@ -18022,7 +19492,7 @@
               </a:spcAft>
             </a:pPr>
             <a:r>
-              <a:rPr sz="760" b="0">
+              <a:rPr sz="740" b="0">
                 <a:solidFill>
                   <a:srgbClr val="64748B"/>
                 </a:solidFill>
@@ -18031,7 +19501,7 @@
               <a:t>Source: </a:t>
             </a:r>
             <a:r>
-              <a:rPr sz="760" b="0">
+              <a:rPr sz="740" b="0">
                 <a:solidFill>
                   <a:srgbClr val="0369A1"/>
                 </a:solidFill>
@@ -18050,7 +19520,7 @@
               </a:spcAft>
             </a:pPr>
             <a:r>
-              <a:rPr sz="760" b="0">
+              <a:rPr sz="740" b="0">
                 <a:solidFill>
                   <a:srgbClr val="64748B"/>
                 </a:solidFill>
@@ -18077,8 +19547,8 @@
         </p:blipFill>
         <p:spPr>
           <a:xfrm>
-            <a:off x="530352" y="5556768"/>
-            <a:ext cx="859536" cy="151871"/>
+            <a:off x="530351" y="5199344"/>
+            <a:ext cx="868680" cy="153487"/>
           </a:xfrm>
           <a:prstGeom prst="rect">
             <a:avLst/>
@@ -18093,8 +19563,8 @@
         </p:nvSpPr>
         <p:spPr>
           <a:xfrm>
-            <a:off x="1490472" y="5385816"/>
-            <a:ext cx="4526280" cy="548640"/>
+            <a:off x="1472184" y="4992624"/>
+            <a:ext cx="2743200" cy="731520"/>
           </a:xfrm>
           <a:prstGeom prst="rect">
             <a:avLst/>
@@ -18114,7 +19584,7 @@
               </a:spcAft>
             </a:pPr>
             <a:r>
-              <a:rPr sz="760" b="1">
+              <a:rPr sz="740" b="1">
                 <a:solidFill>
                   <a:srgbClr val="0F172A"/>
                 </a:solidFill>
@@ -18133,7 +19603,7 @@
               </a:spcAft>
             </a:pPr>
             <a:r>
-              <a:rPr sz="760" b="0">
+              <a:rPr sz="740" b="0">
                 <a:solidFill>
                   <a:srgbClr val="64748B"/>
                 </a:solidFill>
@@ -18142,7 +19612,7 @@
               <a:t>Source: </a:t>
             </a:r>
             <a:r>
-              <a:rPr sz="760" b="0">
+              <a:rPr sz="740" b="0">
                 <a:solidFill>
                   <a:srgbClr val="0369A1"/>
                 </a:solidFill>
@@ -18161,7 +19631,7 @@
               </a:spcAft>
             </a:pPr>
             <a:r>
-              <a:rPr sz="760" b="0">
+              <a:rPr sz="740" b="0">
                 <a:solidFill>
                   <a:srgbClr val="64748B"/>
                 </a:solidFill>
@@ -18188,8 +19658,8 @@
         </p:blipFill>
         <p:spPr>
           <a:xfrm>
-            <a:off x="6153912" y="5574427"/>
-            <a:ext cx="859536" cy="116552"/>
+            <a:off x="4279392" y="5217191"/>
+            <a:ext cx="868680" cy="117792"/>
           </a:xfrm>
           <a:prstGeom prst="rect">
             <a:avLst/>
@@ -18204,8 +19674,8 @@
         </p:nvSpPr>
         <p:spPr>
           <a:xfrm>
-            <a:off x="7114032" y="5385816"/>
-            <a:ext cx="4526280" cy="548640"/>
+            <a:off x="5221224" y="4992624"/>
+            <a:ext cx="2743200" cy="731520"/>
           </a:xfrm>
           <a:prstGeom prst="rect">
             <a:avLst/>
@@ -18225,7 +19695,7 @@
               </a:spcAft>
             </a:pPr>
             <a:r>
-              <a:rPr sz="760" b="1">
+              <a:rPr sz="740" b="1">
                 <a:solidFill>
                   <a:srgbClr val="0F172A"/>
                 </a:solidFill>
@@ -18244,7 +19714,7 @@
               </a:spcAft>
             </a:pPr>
             <a:r>
-              <a:rPr sz="760" b="0">
+              <a:rPr sz="740" b="0">
                 <a:solidFill>
                   <a:srgbClr val="64748B"/>
                 </a:solidFill>
@@ -18253,7 +19723,7 @@
               <a:t>Source: </a:t>
             </a:r>
             <a:r>
-              <a:rPr sz="760" b="0">
+              <a:rPr sz="740" b="0">
                 <a:solidFill>
                   <a:srgbClr val="0369A1"/>
                 </a:solidFill>
@@ -18272,7 +19742,7 @@
               </a:spcAft>
             </a:pPr>
             <a:r>
-              <a:rPr sz="760" b="0">
+              <a:rPr sz="740" b="0">
                 <a:solidFill>
                   <a:srgbClr val="64748B"/>
                 </a:solidFill>
@@ -18568,7 +20038,7 @@
                 </a:solidFill>
                 <a:latin typeface="Poppins SemiBold"/>
               </a:rPr>
-              <a:t>User Journey: Before State</a:t>
+              <a:t>Project Overview &amp; Team</a:t>
             </a:r>
             <a:endParaRPr/>
           </a:p>
@@ -18618,7 +20088,7 @@
                 </a:solidFill>
                 <a:latin typeface="DM Sans"/>
               </a:rPr>
-              <a:t>Quantified Inefficiency: </a:t>
+              <a:t>Core Innovation: </a:t>
             </a:r>
             <a:r>
               <a:rPr sz="960" b="0">
@@ -18627,7 +20097,7 @@
                 </a:solidFill>
                 <a:latin typeface="DM Sans"/>
               </a:rPr>
-              <a:t>published figures only (a UK patient survey, Indian retail prices); we will time real checks with nurses.</a:t>
+              <a:t>two laser-written zones, at the pad centre and on the maker's change line, let a clip-on reader tell a carer OK, CHANGE or CHECK without lifting the dressing.</a:t>
             </a:r>
             <a:endParaRPr/>
           </a:p>
@@ -18671,13 +20141,13 @@
               <a:buNone/>
             </a:pPr>
             <a:r>
-              <a:rPr sz="1500" b="0">
+              <a:rPr sz="1250" b="0">
                 <a:solidFill>
                   <a:srgbClr val="0369A1"/>
                 </a:solidFill>
                 <a:latin typeface="Poppins SemiBold"/>
               </a:rPr>
-              <a:t>44.9 %</a:t>
+              <a:t>VK26-IITI-HT-0050</a:t>
             </a:r>
             <a:endParaRPr/>
           </a:p>
@@ -18724,7 +20194,7 @@
                 </a:solidFill>
                 <a:latin typeface="DM Sans Medium"/>
               </a:rPr>
-              <a:t>CHANGES WHILE MOISTURE WAS STILL OPTIMAL¹</a:t>
+              <a:t>TEAM / APPLICATION ID</a:t>
             </a:r>
             <a:endParaRPr/>
           </a:p>
@@ -18774,7 +20244,7 @@
                 </a:solidFill>
                 <a:latin typeface="Poppins SemiBold"/>
               </a:rPr>
-              <a:t>≈ 18 min</a:t>
+              <a:t>Health Tech</a:t>
             </a:r>
             <a:endParaRPr/>
           </a:p>
@@ -18821,7 +20291,7 @@
                 </a:solidFill>
                 <a:latin typeface="DM Sans Medium"/>
               </a:rPr>
-              <a:t>A DRESSING VISIT, PATIENT-REPORTED¹³</a:t>
+              <a:t>EMERGENCY RESPONSE &amp; REMOTE MONITORING</a:t>
             </a:r>
             <a:endParaRPr/>
           </a:p>
@@ -18865,13 +20335,13 @@
               <a:buNone/>
             </a:pPr>
             <a:r>
-              <a:rPr sz="1500" b="0">
+              <a:rPr sz="1250" b="0">
                 <a:solidFill>
                   <a:srgbClr val="0369A1"/>
                 </a:solidFill>
                 <a:latin typeface="Poppins SemiBold"/>
               </a:rPr>
-              <a:t>₹240–510</a:t>
+              <a:t>Sanjivani University</a:t>
             </a:r>
             <a:endParaRPr/>
           </a:p>
@@ -18918,7 +20388,7 @@
                 </a:solidFill>
                 <a:latin typeface="DM Sans Medium"/>
               </a:rPr>
-              <a:t>ONE 10 × 10 CM FOAM DRESSING, RETAIL¹⁵</a:t>
+              <a:t>INSTITUTION</a:t>
             </a:r>
             <a:endParaRPr/>
           </a:p>
@@ -18962,13 +20432,13 @@
               <a:buNone/>
             </a:pPr>
             <a:r>
-              <a:rPr sz="1300" b="0">
+              <a:rPr sz="1500" b="0">
                 <a:solidFill>
                   <a:srgbClr val="0369A1"/>
                 </a:solidFill>
                 <a:latin typeface="Poppins SemiBold"/>
               </a:rPr>
-              <a:t>0.1–1.3 g/cm²·day</a:t>
+              <a:t>Stage 2</a:t>
             </a:r>
             <a:endParaRPr/>
           </a:p>
@@ -19015,7 +20485,7 @@
                 </a:solidFill>
                 <a:latin typeface="DM Sans Medium"/>
               </a:rPr>
-              <a:t>REPORTED EXUDATE RATES, 2 METHODS⁶</a:t>
+              <a:t>DESIGN SPECIFICATION · OCT 2026</a:t>
             </a:r>
             <a:endParaRPr/>
           </a:p>
@@ -19065,7 +20535,7 @@
                 </a:solidFill>
                 <a:latin typeface="DM Sans"/>
               </a:rPr>
-              <a:t>Figure: today's pain-point map (cited numbers only).</a:t>
+              <a:t>Team Dermasense (photos taken by the team).</a:t>
             </a:r>
             <a:endParaRPr/>
           </a:p>
@@ -19139,7 +20609,7 @@
                 </a:solidFill>
                 <a:latin typeface="DM Sans"/>
               </a:rPr>
-              <a:t>Current Pain Point Mapping</a:t>
+              <a:t>What we built in Stage 2 (14–19 Oct 2026)</a:t>
             </a:r>
             <a:endParaRPr/>
           </a:p>
@@ -19208,8 +20678,8 @@
         </p:nvSpPr>
         <p:spPr>
           <a:xfrm>
-            <a:off x="10078516" y="457200"/>
-            <a:ext cx="1580083" cy="246888"/>
+            <a:off x="10389412" y="457200"/>
+            <a:ext cx="1269187" cy="246888"/>
           </a:xfrm>
           <a:prstGeom prst="roundRect">
             <a:avLst>
@@ -19250,14 +20720,14 @@
                 </a:solidFill>
                 <a:latin typeface="DM Sans"/>
               </a:rPr>
-              <a:t>CURRENT STATE · CITED</a:t>
+              <a:t>PROJECT OVERVIEW</a:t>
             </a:r>
           </a:p>
         </p:txBody>
       </p:sp>
       <p:pic>
         <p:nvPicPr>
-          <p:cNvPr id="159" name="Picture 158" descr="fig_journey_before.png"/>
+          <p:cNvPr id="159" name="PHOTO member1 - PLACEHOLDER (right-click &gt; Change Picture)" descr="placeholder_team.png"/>
           <p:cNvPicPr>
             <a:picLocks noChangeAspect="1"/>
           </p:cNvPicPr>
@@ -19265,18 +20735,24 @@
         </p:nvPicPr>
         <p:blipFill>
           <a:blip r:embed="rId14"/>
+          <a:srcRect/>
           <a:stretch>
             <a:fillRect/>
           </a:stretch>
         </p:blipFill>
         <p:spPr>
           <a:xfrm>
-            <a:off x="545756" y="1746504"/>
-            <a:ext cx="5400726" cy="3593591"/>
-          </a:xfrm>
-          <a:prstGeom prst="rect">
-            <a:avLst/>
-          </a:prstGeom>
+            <a:off x="1143000" y="1865376"/>
+            <a:ext cx="1783080" cy="2377440"/>
+          </a:xfrm>
+          <a:prstGeom prst="rect">
+            <a:avLst/>
+          </a:prstGeom>
+          <a:ln w="9525">
+            <a:solidFill>
+              <a:srgbClr val="CBD5E1"/>
+            </a:solidFill>
+          </a:ln>
         </p:spPr>
       </p:pic>
       <p:sp>
@@ -19287,8 +20763,212 @@
         </p:nvSpPr>
         <p:spPr>
           <a:xfrm>
-            <a:off x="6464808" y="2395728"/>
-            <a:ext cx="5029200" cy="3108960"/>
+            <a:off x="914400" y="4315968"/>
+            <a:ext cx="2240280" cy="868680"/>
+          </a:xfrm>
+          <a:prstGeom prst="rect">
+            <a:avLst/>
+          </a:prstGeom>
+          <a:noFill/>
+        </p:spPr>
+        <p:txBody>
+          <a:bodyPr wrap="square" lIns="18288" rIns="18288" tIns="9144" bIns="9144" anchor="t"/>
+          <a:lstStyle/>
+          <a:p>
+            <a:pPr algn="ctr">
+              <a:lnSpc>
+                <a:spcPct val="108000"/>
+              </a:lnSpc>
+              <a:spcAft>
+                <a:spcPts val="100"/>
+              </a:spcAft>
+            </a:pPr>
+            <a:r>
+              <a:rPr sz="1000" b="1">
+                <a:solidFill>
+                  <a:srgbClr val="0F172A"/>
+                </a:solidFill>
+                <a:latin typeface="DM Sans"/>
+              </a:rPr>
+              <a:t>Soham Prabhakar Kadu</a:t>
+            </a:r>
+          </a:p>
+          <a:p>
+            <a:pPr algn="ctr">
+              <a:lnSpc>
+                <a:spcPct val="108000"/>
+              </a:lnSpc>
+              <a:spcAft>
+                <a:spcPts val="100"/>
+              </a:spcAft>
+            </a:pPr>
+            <a:r>
+              <a:rPr sz="1000" b="0">
+                <a:solidFill>
+                  <a:srgbClr val="64748B"/>
+                </a:solidFill>
+                <a:latin typeface="DM Sans"/>
+              </a:rPr>
+              <a:t>Role: </a:t>
+            </a:r>
+            <a:r>
+              <a:rPr sz="1000" b="1">
+                <a:solidFill>
+                  <a:srgbClr val="B45309"/>
+                </a:solidFill>
+                <a:latin typeface="DM Sans"/>
+              </a:rPr>
+              <a:t>[team to add]</a:t>
+            </a:r>
+          </a:p>
+          <a:p>
+            <a:pPr algn="ctr">
+              <a:lnSpc>
+                <a:spcPct val="108000"/>
+              </a:lnSpc>
+              <a:spcAft>
+                <a:spcPts val="100"/>
+              </a:spcAft>
+            </a:pPr>
+            <a:r>
+              <a:rPr sz="1000" b="0">
+                <a:solidFill>
+                  <a:srgbClr val="64748B"/>
+                </a:solidFill>
+                <a:latin typeface="DM Sans"/>
+              </a:rPr>
+              <a:t>Sanjivani University</a:t>
+            </a:r>
+          </a:p>
+        </p:txBody>
+      </p:sp>
+      <p:pic>
+        <p:nvPicPr>
+          <p:cNvPr id="161" name="PHOTO member2 - PLACEHOLDER (right-click &gt; Change Picture)" descr="placeholder_team.png"/>
+          <p:cNvPicPr>
+            <a:picLocks noChangeAspect="1"/>
+          </p:cNvPicPr>
+          <p:nvPr/>
+        </p:nvPicPr>
+        <p:blipFill>
+          <a:blip r:embed="rId14"/>
+          <a:srcRect/>
+          <a:stretch>
+            <a:fillRect/>
+          </a:stretch>
+        </p:blipFill>
+        <p:spPr>
+          <a:xfrm>
+            <a:off x="3566160" y="1865376"/>
+            <a:ext cx="1783080" cy="2377440"/>
+          </a:xfrm>
+          <a:prstGeom prst="rect">
+            <a:avLst/>
+          </a:prstGeom>
+          <a:ln w="9525">
+            <a:solidFill>
+              <a:srgbClr val="CBD5E1"/>
+            </a:solidFill>
+          </a:ln>
+        </p:spPr>
+      </p:pic>
+      <p:sp>
+        <p:nvSpPr>
+          <p:cNvPr id="162" name="TextBox 161"/>
+          <p:cNvSpPr txBox="1"/>
+          <p:nvPr/>
+        </p:nvSpPr>
+        <p:spPr>
+          <a:xfrm>
+            <a:off x="3337560" y="4315968"/>
+            <a:ext cx="2240280" cy="868680"/>
+          </a:xfrm>
+          <a:prstGeom prst="rect">
+            <a:avLst/>
+          </a:prstGeom>
+          <a:noFill/>
+        </p:spPr>
+        <p:txBody>
+          <a:bodyPr wrap="square" lIns="18288" rIns="18288" tIns="9144" bIns="9144" anchor="t"/>
+          <a:lstStyle/>
+          <a:p>
+            <a:pPr algn="ctr">
+              <a:lnSpc>
+                <a:spcPct val="108000"/>
+              </a:lnSpc>
+              <a:spcAft>
+                <a:spcPts val="100"/>
+              </a:spcAft>
+            </a:pPr>
+            <a:r>
+              <a:rPr sz="1000" b="1">
+                <a:solidFill>
+                  <a:srgbClr val="0F172A"/>
+                </a:solidFill>
+                <a:latin typeface="DM Sans"/>
+              </a:rPr>
+              <a:t>Bhakti Ajay Kadam</a:t>
+            </a:r>
+          </a:p>
+          <a:p>
+            <a:pPr algn="ctr">
+              <a:lnSpc>
+                <a:spcPct val="108000"/>
+              </a:lnSpc>
+              <a:spcAft>
+                <a:spcPts val="100"/>
+              </a:spcAft>
+            </a:pPr>
+            <a:r>
+              <a:rPr sz="1000" b="0">
+                <a:solidFill>
+                  <a:srgbClr val="64748B"/>
+                </a:solidFill>
+                <a:latin typeface="DM Sans"/>
+              </a:rPr>
+              <a:t>Role: </a:t>
+            </a:r>
+            <a:r>
+              <a:rPr sz="1000" b="1">
+                <a:solidFill>
+                  <a:srgbClr val="B45309"/>
+                </a:solidFill>
+                <a:latin typeface="DM Sans"/>
+              </a:rPr>
+              <a:t>[team to add]</a:t>
+            </a:r>
+          </a:p>
+          <a:p>
+            <a:pPr algn="ctr">
+              <a:lnSpc>
+                <a:spcPct val="108000"/>
+              </a:lnSpc>
+              <a:spcAft>
+                <a:spcPts val="100"/>
+              </a:spcAft>
+            </a:pPr>
+            <a:r>
+              <a:rPr sz="1000" b="0">
+                <a:solidFill>
+                  <a:srgbClr val="64748B"/>
+                </a:solidFill>
+                <a:latin typeface="DM Sans"/>
+              </a:rPr>
+              <a:t>Sanjivani University</a:t>
+            </a:r>
+          </a:p>
+        </p:txBody>
+      </p:sp>
+      <p:sp>
+        <p:nvSpPr>
+          <p:cNvPr id="163" name="TextBox 162"/>
+          <p:cNvSpPr txBox="1"/>
+          <p:nvPr/>
+        </p:nvSpPr>
+        <p:spPr>
+          <a:xfrm>
+            <a:off x="6464808" y="2331720"/>
+            <a:ext cx="5029200" cy="3200400"/>
           </a:xfrm>
           <a:prstGeom prst="rect">
             <a:avLst/>
@@ -19304,11 +20984,11 @@
                 <a:spcPct val="108000"/>
               </a:lnSpc>
               <a:spcAft>
-                <a:spcPts val="1200"/>
+                <a:spcPts val="700"/>
               </a:spcAft>
             </a:pPr>
             <a:r>
-              <a:rPr sz="1200" b="0">
+              <a:rPr sz="1100" b="0">
                 <a:solidFill>
                   <a:srgbClr val="059669"/>
                 </a:solidFill>
@@ -19317,22 +20997,22 @@
               <a:t>▪  </a:t>
             </a:r>
             <a:r>
-              <a:rPr sz="1200" b="1">
+              <a:rPr sz="1100" b="1">
                 <a:solidFill>
                   <a:srgbClr val="0F172A"/>
                 </a:solidFill>
                 <a:latin typeface="DM Sans"/>
               </a:rPr>
-              <a:t>Time:  </a:t>
-            </a:r>
-            <a:r>
-              <a:rPr sz="1200" b="0">
+              <a:t>CAD:  </a:t>
+            </a:r>
+            <a:r>
+              <a:rPr sz="1100" b="0">
                 <a:solidFill>
                   <a:srgbClr val="334155"/>
                 </a:solidFill>
                 <a:latin typeface="DM Sans"/>
               </a:rPr>
-              <a:t>every check means unwrap, look, re-secure: about 18 min a visit¹³.</a:t>
+              <a:t>9 SolidWorks parts, 1 assembly, 7 A3 drawings; 99 automated checks pass.</a:t>
             </a:r>
           </a:p>
           <a:p>
@@ -19341,11 +21021,11 @@
                 <a:spcPct val="108000"/>
               </a:lnSpc>
               <a:spcAft>
-                <a:spcPts val="1200"/>
+                <a:spcPts val="700"/>
               </a:spcAft>
             </a:pPr>
             <a:r>
-              <a:rPr sz="1200" b="0">
+              <a:rPr sz="1100" b="0">
                 <a:solidFill>
                   <a:srgbClr val="059669"/>
                 </a:solidFill>
@@ -19354,22 +21034,22 @@
               <a:t>▪  </a:t>
             </a:r>
             <a:r>
-              <a:rPr sz="1200" b="1">
+              <a:rPr sz="1100" b="1">
                 <a:solidFill>
                   <a:srgbClr val="0F172A"/>
                 </a:solidFill>
                 <a:latin typeface="DM Sans"/>
               </a:rPr>
-              <a:t>Waste:  </a:t>
-            </a:r>
-            <a:r>
-              <a:rPr sz="1200" b="0">
+              <a:t>Circuit:  </a:t>
+            </a:r>
+            <a:r>
+              <a:rPr sz="1100" b="0">
                 <a:solidFill>
                   <a:srgbClr val="334155"/>
                 </a:solidFill>
                 <a:latin typeface="DM Sans"/>
               </a:rPr>
-              <a:t>44.9 % of changes came while moisture was still optimal¹; each discards a dressing¹⁵.</a:t>
+              <a:t>KiCad reader schematic; 0 rule-check errors.</a:t>
             </a:r>
           </a:p>
           <a:p>
@@ -19378,11 +21058,11 @@
                 <a:spcPct val="108000"/>
               </a:lnSpc>
               <a:spcAft>
-                <a:spcPts val="1200"/>
+                <a:spcPts val="700"/>
               </a:spcAft>
             </a:pPr>
             <a:r>
-              <a:rPr sz="1200" b="0">
+              <a:rPr sz="1100" b="0">
                 <a:solidFill>
                   <a:srgbClr val="059669"/>
                 </a:solidFill>
@@ -19391,22 +21071,22 @@
               <a:t>▪  </a:t>
             </a:r>
             <a:r>
-              <a:rPr sz="1200" b="1">
+              <a:rPr sz="1100" b="1">
                 <a:solidFill>
                   <a:srgbClr val="0F172A"/>
                 </a:solidFill>
                 <a:latin typeface="DM Sans"/>
               </a:rPr>
-              <a:t>Risk:  </a:t>
-            </a:r>
-            <a:r>
-              <a:rPr sz="1200" b="0">
+              <a:t>Firmware:  </a:t>
+            </a:r>
+            <a:r>
+              <a:rPr sz="1100" b="0">
                 <a:solidFill>
                   <a:srgbClr val="334155"/>
                 </a:solidFill>
                 <a:latin typeface="DM Sans"/>
               </a:rPr>
-              <a:t>a late change can leak: wet skin, soiled clothing.</a:t>
+              <a:t>ESP32-C3 reader with Bluetooth output; 23 + 16 software tests pass.</a:t>
             </a:r>
           </a:p>
           <a:p>
@@ -19415,11 +21095,11 @@
                 <a:spcPct val="108000"/>
               </a:lnSpc>
               <a:spcAft>
-                <a:spcPts val="1200"/>
+                <a:spcPts val="700"/>
               </a:spcAft>
             </a:pPr>
             <a:r>
-              <a:rPr sz="1200" b="0">
+              <a:rPr sz="1100" b="0">
                 <a:solidFill>
                   <a:srgbClr val="059669"/>
                 </a:solidFill>
@@ -19428,22 +21108,288 @@
               <a:t>▪  </a:t>
             </a:r>
             <a:r>
-              <a:rPr sz="1200" b="1">
+              <a:rPr sz="1100" b="1">
                 <a:solidFill>
                   <a:srgbClr val="0F172A"/>
                 </a:solidFill>
                 <a:latin typeface="DM Sans"/>
               </a:rPr>
-              <a:t>Cause:  </a:t>
-            </a:r>
-            <a:r>
-              <a:rPr sz="1200" b="0">
+              <a:t>Sensor strip:  </a:t>
+            </a:r>
+            <a:r>
+              <a:rPr sz="1100" b="0">
                 <a:solidFill>
                   <a:srgbClr val="334155"/>
                 </a:solidFill>
                 <a:latin typeface="DM Sans"/>
               </a:rPr>
-              <a:t>reported exudate rates span over 10×⁶; a clock cannot follow.</a:t>
+              <a:t>laser files for the strip and 2 test coupons; 35/35 file checks.</a:t>
+            </a:r>
+          </a:p>
+          <a:p>
+            <a:pPr>
+              <a:lnSpc>
+                <a:spcPct val="108000"/>
+              </a:lnSpc>
+              <a:spcAft>
+                <a:spcPts val="700"/>
+              </a:spcAft>
+            </a:pPr>
+            <a:r>
+              <a:rPr sz="1100" b="0">
+                <a:solidFill>
+                  <a:srgbClr val="059669"/>
+                </a:solidFill>
+                <a:latin typeface="DM Sans"/>
+              </a:rPr>
+              <a:t>▪  </a:t>
+            </a:r>
+            <a:r>
+              <a:rPr sz="1100" b="1">
+                <a:solidFill>
+                  <a:srgbClr val="0F172A"/>
+                </a:solidFill>
+                <a:latin typeface="DM Sans"/>
+              </a:rPr>
+              <a:t>Experiment:  </a:t>
+            </a:r>
+            <a:r>
+              <a:rPr sz="1100" b="0">
+                <a:solidFill>
+                  <a:srgbClr val="334155"/>
+                </a:solidFill>
+                <a:latin typeface="DM Sans"/>
+              </a:rPr>
+              <a:t>E2 laser test, 72 samples fixed in advance.</a:t>
+            </a:r>
+          </a:p>
+          <a:p>
+            <a:pPr>
+              <a:lnSpc>
+                <a:spcPct val="108000"/>
+              </a:lnSpc>
+              <a:spcAft>
+                <a:spcPts val="700"/>
+              </a:spcAft>
+            </a:pPr>
+            <a:r>
+              <a:rPr sz="1100" b="0">
+                <a:solidFill>
+                  <a:srgbClr val="059669"/>
+                </a:solidFill>
+                <a:latin typeface="DM Sans"/>
+              </a:rPr>
+              <a:t>▪  </a:t>
+            </a:r>
+            <a:r>
+              <a:rPr sz="1100" b="1">
+                <a:solidFill>
+                  <a:srgbClr val="0F172A"/>
+                </a:solidFill>
+                <a:latin typeface="DM Sans"/>
+              </a:rPr>
+              <a:t>Not yet:  </a:t>
+            </a:r>
+            <a:r>
+              <a:rPr sz="1100" b="0">
+                <a:solidFill>
+                  <a:srgbClr val="334155"/>
+                </a:solidFill>
+                <a:latin typeface="DM Sans"/>
+              </a:rPr>
+              <a:t>nothing lased, wired or tested on a dressing.</a:t>
+            </a:r>
+          </a:p>
+        </p:txBody>
+      </p:sp>
+      <p:pic>
+        <p:nvPicPr>
+          <p:cNvPr id="164" name="Picture 163" descr="cad_exploded_iso.png"/>
+          <p:cNvPicPr>
+            <a:picLocks noChangeAspect="1"/>
+          </p:cNvPicPr>
+          <p:nvPr/>
+        </p:nvPicPr>
+        <p:blipFill>
+          <a:blip r:embed="rId15"/>
+          <a:stretch>
+            <a:fillRect/>
+          </a:stretch>
+        </p:blipFill>
+        <p:spPr>
+          <a:xfrm>
+            <a:off x="6585802" y="4443984"/>
+            <a:ext cx="1330779" cy="841248"/>
+          </a:xfrm>
+          <a:prstGeom prst="rect">
+            <a:avLst/>
+          </a:prstGeom>
+        </p:spPr>
+      </p:pic>
+      <p:sp>
+        <p:nvSpPr>
+          <p:cNvPr id="165" name="TextBox 164"/>
+          <p:cNvSpPr txBox="1"/>
+          <p:nvPr/>
+        </p:nvSpPr>
+        <p:spPr>
+          <a:xfrm>
+            <a:off x="6464808" y="5303520"/>
+            <a:ext cx="1572768" cy="201168"/>
+          </a:xfrm>
+          <a:prstGeom prst="rect">
+            <a:avLst/>
+          </a:prstGeom>
+          <a:noFill/>
+        </p:spPr>
+        <p:txBody>
+          <a:bodyPr wrap="square" lIns="18288" rIns="18288" tIns="9144" bIns="9144" anchor="t"/>
+          <a:lstStyle/>
+          <a:p>
+            <a:pPr algn="ctr">
+              <a:lnSpc>
+                <a:spcPct val="108000"/>
+              </a:lnSpc>
+              <a:spcAft>
+                <a:spcPts val="400"/>
+              </a:spcAft>
+            </a:pPr>
+            <a:r>
+              <a:rPr sz="720" b="0">
+                <a:solidFill>
+                  <a:srgbClr val="64748B"/>
+                </a:solidFill>
+                <a:latin typeface="DM Sans"/>
+              </a:rPr>
+              <a:t>SolidWorks model</a:t>
+            </a:r>
+          </a:p>
+        </p:txBody>
+      </p:sp>
+      <p:pic>
+        <p:nvPicPr>
+          <p:cNvPr id="166" name="Picture 165" descr="strip_v0_1_drawing.png"/>
+          <p:cNvPicPr>
+            <a:picLocks noChangeAspect="1"/>
+          </p:cNvPicPr>
+          <p:nvPr/>
+        </p:nvPicPr>
+        <p:blipFill>
+          <a:blip r:embed="rId16"/>
+          <a:stretch>
+            <a:fillRect/>
+          </a:stretch>
+        </p:blipFill>
+        <p:spPr>
+          <a:xfrm>
+            <a:off x="8165592" y="4628692"/>
+            <a:ext cx="1572768" cy="471830"/>
+          </a:xfrm>
+          <a:prstGeom prst="rect">
+            <a:avLst/>
+          </a:prstGeom>
+        </p:spPr>
+      </p:pic>
+      <p:sp>
+        <p:nvSpPr>
+          <p:cNvPr id="167" name="TextBox 166"/>
+          <p:cNvSpPr txBox="1"/>
+          <p:nvPr/>
+        </p:nvSpPr>
+        <p:spPr>
+          <a:xfrm>
+            <a:off x="8165592" y="5303520"/>
+            <a:ext cx="1572768" cy="201168"/>
+          </a:xfrm>
+          <a:prstGeom prst="rect">
+            <a:avLst/>
+          </a:prstGeom>
+          <a:noFill/>
+        </p:spPr>
+        <p:txBody>
+          <a:bodyPr wrap="square" lIns="18288" rIns="18288" tIns="9144" bIns="9144" anchor="t"/>
+          <a:lstStyle/>
+          <a:p>
+            <a:pPr algn="ctr">
+              <a:lnSpc>
+                <a:spcPct val="108000"/>
+              </a:lnSpc>
+              <a:spcAft>
+                <a:spcPts val="400"/>
+              </a:spcAft>
+            </a:pPr>
+            <a:r>
+              <a:rPr sz="720" b="0">
+                <a:solidFill>
+                  <a:srgbClr val="64748B"/>
+                </a:solidFill>
+                <a:latin typeface="DM Sans"/>
+              </a:rPr>
+              <a:t>Laser file (DXF)</a:t>
+            </a:r>
+          </a:p>
+        </p:txBody>
+      </p:sp>
+      <p:pic>
+        <p:nvPicPr>
+          <p:cNvPr id="168" name="Picture 167" descr="fig_schematic.png"/>
+          <p:cNvPicPr>
+            <a:picLocks noChangeAspect="1"/>
+          </p:cNvPicPr>
+          <p:nvPr/>
+        </p:nvPicPr>
+        <p:blipFill>
+          <a:blip r:embed="rId17"/>
+          <a:stretch>
+            <a:fillRect/>
+          </a:stretch>
+        </p:blipFill>
+        <p:spPr>
+          <a:xfrm>
+            <a:off x="10065235" y="4443984"/>
+            <a:ext cx="1175048" cy="841247"/>
+          </a:xfrm>
+          <a:prstGeom prst="rect">
+            <a:avLst/>
+          </a:prstGeom>
+        </p:spPr>
+      </p:pic>
+      <p:sp>
+        <p:nvSpPr>
+          <p:cNvPr id="169" name="TextBox 168"/>
+          <p:cNvSpPr txBox="1"/>
+          <p:nvPr/>
+        </p:nvSpPr>
+        <p:spPr>
+          <a:xfrm>
+            <a:off x="9866376" y="5303520"/>
+            <a:ext cx="1572768" cy="201168"/>
+          </a:xfrm>
+          <a:prstGeom prst="rect">
+            <a:avLst/>
+          </a:prstGeom>
+          <a:noFill/>
+        </p:spPr>
+        <p:txBody>
+          <a:bodyPr wrap="square" lIns="18288" rIns="18288" tIns="9144" bIns="9144" anchor="t"/>
+          <a:lstStyle/>
+          <a:p>
+            <a:pPr algn="ctr">
+              <a:lnSpc>
+                <a:spcPct val="108000"/>
+              </a:lnSpc>
+              <a:spcAft>
+                <a:spcPts val="400"/>
+              </a:spcAft>
+            </a:pPr>
+            <a:r>
+              <a:rPr sz="720" b="0">
+                <a:solidFill>
+                  <a:srgbClr val="64748B"/>
+                </a:solidFill>
+                <a:latin typeface="DM Sans"/>
+              </a:rPr>
+              <a:t>Reader circuit (KiCad)</a:t>
             </a:r>
           </a:p>
         </p:txBody>
@@ -19733,7 +21679,7 @@
                 </a:solidFill>
                 <a:latin typeface="Poppins SemiBold"/>
               </a:rPr>
-              <a:t>User Journey: After State (Intended)</a:t>
+              <a:t>User Journey: Before State</a:t>
             </a:r>
             <a:endParaRPr/>
           </a:p>
@@ -19783,7 +21729,7 @@
                 </a:solidFill>
                 <a:latin typeface="DM Sans"/>
               </a:rPr>
-              <a:t>Design Principle: </a:t>
+              <a:t>Quantified Inefficiency: </a:t>
             </a:r>
             <a:r>
               <a:rPr sz="960" b="0">
@@ -19792,7 +21738,7 @@
                 </a:solidFill>
                 <a:latin typeface="DM Sans"/>
               </a:rPr>
-              <a:t>only film and carbon are disposable; the strip never touches the wound.</a:t>
+              <a:t>published figures only (a UK patient survey, Indian retail prices); we will time real checks with nurses.</a:t>
             </a:r>
             <a:endParaRPr/>
           </a:p>
@@ -19836,13 +21782,13 @@
               <a:buNone/>
             </a:pPr>
             <a:r>
-              <a:rPr sz="1300" b="0">
+              <a:rPr sz="1500" b="0">
                 <a:solidFill>
                   <a:srgbClr val="0369A1"/>
                 </a:solidFill>
                 <a:latin typeface="Poppins SemiBold"/>
               </a:rPr>
-              <a:t>up to 44.9 %</a:t>
+              <a:t>44.9 %</a:t>
             </a:r>
             <a:endParaRPr/>
           </a:p>
@@ -19889,7 +21835,7 @@
                 </a:solidFill>
                 <a:latin typeface="DM Sans Medium"/>
               </a:rPr>
-              <a:t>EARLY CHANGES A RELIABLE ALERT COULD AVOID¹</a:t>
+              <a:t>CHANGES WHILE MOISTURE WAS STILL OPTIMAL¹</a:t>
             </a:r>
             <a:endParaRPr/>
           </a:p>
@@ -19939,7 +21885,7 @@
                 </a:solidFill>
                 <a:latin typeface="Poppins SemiBold"/>
               </a:rPr>
-              <a:t>≤ ₹100</a:t>
+              <a:t>≈ 18 min</a:t>
             </a:r>
             <a:endParaRPr/>
           </a:p>
@@ -19986,7 +21932,7 @@
                 </a:solidFill>
                 <a:latin typeface="DM Sans Medium"/>
               </a:rPr>
-              <a:t>TARGET STRIP COST (ESTIMATE)</a:t>
+              <a:t>A DRESSING VISIT, PATIENT-REPORTED (UK)¹³</a:t>
             </a:r>
             <a:endParaRPr/>
           </a:p>
@@ -20036,7 +21982,7 @@
                 </a:solidFill>
                 <a:latin typeface="Poppins SemiBold"/>
               </a:rPr>
-              <a:t>±10 %</a:t>
+              <a:t>₹240–510</a:t>
             </a:r>
             <a:endParaRPr/>
           </a:p>
@@ -20083,7 +22029,7 @@
                 </a:solidFill>
                 <a:latin typeface="DM Sans Medium"/>
               </a:rPr>
-              <a:t>TARGET ALERT ACCURACY (BENCH, E4)</a:t>
+              <a:t>ONE 10 × 10 CM FOAM DRESSING, RETAIL¹⁵</a:t>
             </a:r>
             <a:endParaRPr/>
           </a:p>
@@ -20127,13 +22073,13 @@
               <a:buNone/>
             </a:pPr>
             <a:r>
-              <a:rPr sz="1500" b="0">
+              <a:rPr sz="1300" b="0">
                 <a:solidFill>
                   <a:srgbClr val="0369A1"/>
                 </a:solidFill>
                 <a:latin typeface="Poppins SemiBold"/>
               </a:rPr>
-              <a:t>0</a:t>
+              <a:t>0.1–1.3 g/cm²·day</a:t>
             </a:r>
             <a:endParaRPr/>
           </a:p>
@@ -20180,7 +22126,7 @@
                 </a:solidFill>
                 <a:latin typeface="DM Sans Medium"/>
               </a:rPr>
-              <a:t>CONTACT WITH THE WOUND BED (BY DESIGN)</a:t>
+              <a:t>REPORTED EXUDATE RATES, 2 METHODS⁶</a:t>
             </a:r>
             <a:endParaRPr/>
           </a:p>
@@ -20230,7 +22176,7 @@
                 </a:solidFill>
                 <a:latin typeface="DM Sans"/>
               </a:rPr>
-              <a:t>Figure: the intended workflow; bench-testable, not clinically validated.</a:t>
+              <a:t>Figure: today's pain-point map (cited numbers only).</a:t>
             </a:r>
             <a:endParaRPr/>
           </a:p>
@@ -20304,7 +22250,7 @@
                 </a:solidFill>
                 <a:latin typeface="DM Sans"/>
               </a:rPr>
-              <a:t>Future Solution Mapping &amp; Quantified Efficiency</a:t>
+              <a:t>Current Pain Point Mapping</a:t>
             </a:r>
             <a:endParaRPr/>
           </a:p>
@@ -20373,8 +22319,8 @@
         </p:nvSpPr>
         <p:spPr>
           <a:xfrm>
-            <a:off x="9208008" y="457200"/>
-            <a:ext cx="2450592" cy="246888"/>
+            <a:off x="10078516" y="457200"/>
+            <a:ext cx="1580083" cy="246888"/>
           </a:xfrm>
           <a:prstGeom prst="roundRect">
             <a:avLst>
@@ -20382,7 +22328,7 @@
             </a:avLst>
           </a:prstGeom>
           <a:solidFill>
-            <a:srgbClr val="FEF3C7"/>
+            <a:srgbClr val="E0F2FE"/>
           </a:solidFill>
           <a:ln>
             <a:noFill/>
@@ -20411,18 +22357,18 @@
             <a:r>
               <a:rPr sz="750" b="1">
                 <a:solidFill>
-                  <a:srgbClr val="B45309"/>
-                </a:solidFill>
-                <a:latin typeface="DM Sans"/>
-              </a:rPr>
-              <a:t>INTENDED · NOT CLINICALLY VALIDATED</a:t>
+                  <a:srgbClr val="0369A1"/>
+                </a:solidFill>
+                <a:latin typeface="DM Sans"/>
+              </a:rPr>
+              <a:t>CURRENT STATE · CITED</a:t>
             </a:r>
           </a:p>
         </p:txBody>
       </p:sp>
       <p:pic>
         <p:nvPicPr>
-          <p:cNvPr id="159" name="Picture 158" descr="fig_journey_after.png"/>
+          <p:cNvPr id="159" name="Picture 158" descr="fig_journey_before.png"/>
           <p:cNvPicPr>
             <a:picLocks noChangeAspect="1"/>
           </p:cNvPicPr>
@@ -20488,7 +22434,7 @@
                 </a:solidFill>
                 <a:latin typeface="DM Sans"/>
               </a:rPr>
-              <a:t>Same routine:  </a:t>
+              <a:t>Time:  </a:t>
             </a:r>
             <a:r>
               <a:rPr sz="1200" b="0">
@@ -20497,7 +22443,7 @@
                 </a:solidFill>
                 <a:latin typeface="DM Sans"/>
               </a:rPr>
-              <a:t>strip on the pad, reader clips on.</a:t>
+              <a:t>every check means unwrap, look, re-secure: about 18 min a visit¹³.</a:t>
             </a:r>
           </a:p>
           <a:p>
@@ -20525,7 +22471,7 @@
                 </a:solidFill>
                 <a:latin typeface="DM Sans"/>
               </a:rPr>
-              <a:t>Clear signal:  </a:t>
+              <a:t>Waste:  </a:t>
             </a:r>
             <a:r>
               <a:rPr sz="1200" b="0">
@@ -20534,7 +22480,7 @@
                 </a:solidFill>
                 <a:latin typeface="DM Sans"/>
               </a:rPr>
-              <a:t>CHANGE when the line is wet; CHECK if it wets first.</a:t>
+              <a:t>44.9 % of changes came while moisture was still optimal¹; each discards a dressing¹⁵.</a:t>
             </a:r>
           </a:p>
           <a:p>
@@ -20562,7 +22508,7 @@
                 </a:solidFill>
                 <a:latin typeface="DM Sans"/>
               </a:rPr>
-              <a:t>Remote:  </a:t>
+              <a:t>Risk:  </a:t>
             </a:r>
             <a:r>
               <a:rPr sz="1200" b="0">
@@ -20571,7 +22517,7 @@
                 </a:solidFill>
                 <a:latin typeface="DM Sans"/>
               </a:rPr>
-              <a:t>the state is broadcast over Bluetooth to a phone.</a:t>
+              <a:t>a late change can leak: wet skin, soiled clothing.</a:t>
             </a:r>
           </a:p>
           <a:p>
@@ -20599,7 +22545,7 @@
                 </a:solidFill>
                 <a:latin typeface="DM Sans"/>
               </a:rPr>
-              <a:t>Payback:  </a:t>
+              <a:t>Cause:  </a:t>
             </a:r>
             <a:r>
               <a:rPr sz="1200" b="0">
@@ -20608,7 +22554,7 @@
                 </a:solidFill>
                 <a:latin typeface="DM Sans"/>
               </a:rPr>
-              <a:t>a ≤ ₹100 strip pays for itself if 1 in 2–5 changes is avoided¹⁵.</a:t>
+              <a:t>reported exudate rates span over 10×⁶; a clock cannot follow.</a:t>
             </a:r>
           </a:p>
         </p:txBody>
@@ -20640,12 +22586,12 @@
       <p:grpSpPr/>
       <p:pic>
         <p:nvPicPr>
-          <p:cNvPr descr="image.png" id="234" name="Google Shape;234;p20"/>
+          <p:cNvPr descr="image.png" id="125" name="Google Shape;125;p16"/>
           <p:cNvPicPr preferRelativeResize="0"/>
           <p:nvPr/>
         </p:nvPicPr>
         <p:blipFill rotWithShape="1">
-          <a:blip r:embed="rId4">
+          <a:blip r:embed="rId6">
             <a:alphaModFix/>
           </a:blip>
           <a:srcRect b="0" l="0" r="0" t="0"/>
@@ -20667,34 +22613,7 @@
       </p:pic>
       <p:pic>
         <p:nvPicPr>
-          <p:cNvPr descr="image.png" id="235" name="Google Shape;235;p20"/>
-          <p:cNvPicPr preferRelativeResize="0"/>
-          <p:nvPr/>
-        </p:nvPicPr>
-        <p:blipFill rotWithShape="1">
-          <a:blip r:embed="rId5">
-            <a:alphaModFix/>
-          </a:blip>
-          <a:srcRect b="0" l="0" r="0" t="0"/>
-          <a:stretch/>
-        </p:blipFill>
-        <p:spPr>
-          <a:xfrm>
-            <a:off x="533400" y="5551726"/>
-            <a:ext cx="11125200" cy="363140"/>
-          </a:xfrm>
-          <a:prstGeom prst="rect">
-            <a:avLst/>
-          </a:prstGeom>
-          <a:noFill/>
-          <a:ln>
-            <a:noFill/>
-          </a:ln>
-        </p:spPr>
-      </p:pic>
-      <p:pic>
-        <p:nvPicPr>
-          <p:cNvPr descr="image.png" id="236" name="Google Shape;236;p20"/>
+          <p:cNvPr descr="image.png" id="126" name="Google Shape;126;p16"/>
           <p:cNvPicPr preferRelativeResize="0"/>
           <p:nvPr/>
         </p:nvPicPr>
@@ -20707,8 +22626,8 @@
         </p:blipFill>
         <p:spPr>
           <a:xfrm>
-            <a:off x="6229350" y="956224"/>
-            <a:ext cx="5429250" cy="4434840"/>
+            <a:off x="533400" y="5714641"/>
+            <a:ext cx="11125200" cy="363140"/>
           </a:xfrm>
           <a:prstGeom prst="rect">
             <a:avLst/>
@@ -20721,7 +22640,142 @@
       </p:pic>
       <p:pic>
         <p:nvPicPr>
-          <p:cNvPr descr="image.png" id="237" name="Google Shape;237;p20"/>
+          <p:cNvPr descr="image.png" id="127" name="Google Shape;127;p16"/>
+          <p:cNvPicPr preferRelativeResize="0"/>
+          <p:nvPr/>
+        </p:nvPicPr>
+        <p:blipFill rotWithShape="1">
+          <a:blip r:embed="rId10">
+            <a:alphaModFix/>
+          </a:blip>
+          <a:srcRect b="0" l="0" r="0" t="0"/>
+          <a:stretch/>
+        </p:blipFill>
+        <p:spPr>
+          <a:xfrm>
+            <a:off x="533400" y="956220"/>
+            <a:ext cx="2667000" cy="649485"/>
+          </a:xfrm>
+          <a:prstGeom prst="rect">
+            <a:avLst/>
+          </a:prstGeom>
+          <a:noFill/>
+          <a:ln>
+            <a:noFill/>
+          </a:ln>
+        </p:spPr>
+      </p:pic>
+      <p:pic>
+        <p:nvPicPr>
+          <p:cNvPr descr="image.png" id="128" name="Google Shape;128;p16"/>
+          <p:cNvPicPr preferRelativeResize="0"/>
+          <p:nvPr/>
+        </p:nvPicPr>
+        <p:blipFill rotWithShape="1">
+          <a:blip r:embed="rId11">
+            <a:alphaModFix/>
+          </a:blip>
+          <a:srcRect b="0" l="0" r="0" t="0"/>
+          <a:stretch/>
+        </p:blipFill>
+        <p:spPr>
+          <a:xfrm>
+            <a:off x="3352800" y="956220"/>
+            <a:ext cx="2667000" cy="649485"/>
+          </a:xfrm>
+          <a:prstGeom prst="rect">
+            <a:avLst/>
+          </a:prstGeom>
+          <a:noFill/>
+          <a:ln>
+            <a:noFill/>
+          </a:ln>
+        </p:spPr>
+      </p:pic>
+      <p:pic>
+        <p:nvPicPr>
+          <p:cNvPr descr="image.png" id="129" name="Google Shape;129;p16"/>
+          <p:cNvPicPr preferRelativeResize="0"/>
+          <p:nvPr/>
+        </p:nvPicPr>
+        <p:blipFill rotWithShape="1">
+          <a:blip r:embed="rId12">
+            <a:alphaModFix/>
+          </a:blip>
+          <a:srcRect b="0" l="0" r="0" t="0"/>
+          <a:stretch/>
+        </p:blipFill>
+        <p:spPr>
+          <a:xfrm>
+            <a:off x="6172200" y="956220"/>
+            <a:ext cx="2667000" cy="649485"/>
+          </a:xfrm>
+          <a:prstGeom prst="rect">
+            <a:avLst/>
+          </a:prstGeom>
+          <a:noFill/>
+          <a:ln>
+            <a:noFill/>
+          </a:ln>
+        </p:spPr>
+      </p:pic>
+      <p:pic>
+        <p:nvPicPr>
+          <p:cNvPr descr="image.png" id="130" name="Google Shape;130;p16"/>
+          <p:cNvPicPr preferRelativeResize="0"/>
+          <p:nvPr/>
+        </p:nvPicPr>
+        <p:blipFill rotWithShape="1">
+          <a:blip r:embed="rId12">
+            <a:alphaModFix/>
+          </a:blip>
+          <a:srcRect b="0" l="0" r="0" t="0"/>
+          <a:stretch/>
+        </p:blipFill>
+        <p:spPr>
+          <a:xfrm>
+            <a:off x="8991600" y="956220"/>
+            <a:ext cx="2667000" cy="649485"/>
+          </a:xfrm>
+          <a:prstGeom prst="rect">
+            <a:avLst/>
+          </a:prstGeom>
+          <a:noFill/>
+          <a:ln>
+            <a:noFill/>
+          </a:ln>
+        </p:spPr>
+      </p:pic>
+      <p:pic>
+        <p:nvPicPr>
+          <p:cNvPr descr="image.png" id="131" name="Google Shape;131;p16"/>
+          <p:cNvPicPr preferRelativeResize="0"/>
+          <p:nvPr/>
+        </p:nvPicPr>
+        <p:blipFill rotWithShape="1">
+          <a:blip r:embed="rId13">
+            <a:alphaModFix/>
+          </a:blip>
+          <a:srcRect b="0" l="0" r="0" t="0"/>
+          <a:stretch/>
+        </p:blipFill>
+        <p:spPr>
+          <a:xfrm>
+            <a:off x="6229350" y="1737360"/>
+            <a:ext cx="5429250" cy="3886200"/>
+          </a:xfrm>
+          <a:prstGeom prst="rect">
+            <a:avLst/>
+          </a:prstGeom>
+          <a:noFill/>
+          <a:ln>
+            <a:noFill/>
+          </a:ln>
+        </p:spPr>
+      </p:pic>
+      <p:pic>
+        <p:nvPicPr>
+          <p:cNvPr descr="image.png" id="132" name="Google Shape;132;p16"/>
           <p:cNvPicPr preferRelativeResize="0"/>
           <p:nvPr/>
         </p:nvPicPr>
@@ -20734,8 +22788,8 @@
         </p:blipFill>
         <p:spPr>
           <a:xfrm>
-            <a:off x="530352" y="960120"/>
-            <a:ext cx="5431536" cy="3895344"/>
+            <a:off x="530352" y="1737360"/>
+            <a:ext cx="5431536" cy="3611880"/>
           </a:xfrm>
           <a:prstGeom prst="rect">
             <a:avLst/>
@@ -20748,7 +22802,7 @@
       </p:pic>
       <p:sp>
         <p:nvSpPr>
-          <p:cNvPr id="238" name="Google Shape;238;p20"/>
+          <p:cNvPr id="133" name="Google Shape;133;p16"/>
           <p:cNvSpPr txBox="1"/>
           <p:nvPr/>
         </p:nvSpPr>
@@ -20790,7 +22844,7 @@
                 </a:solidFill>
                 <a:latin typeface="Poppins SemiBold"/>
               </a:rPr>
-              <a:t>System Architecture &amp; Specs: Firmware &amp; Data Flow</a:t>
+              <a:t>User Journey: After State (Intended)</a:t>
             </a:r>
             <a:endParaRPr/>
           </a:p>
@@ -20798,13 +22852,13 @@
       </p:sp>
       <p:sp>
         <p:nvSpPr>
-          <p:cNvPr id="240" name="Google Shape;240;p20"/>
+          <p:cNvPr id="135" name="Google Shape;135;p16"/>
           <p:cNvSpPr txBox="1"/>
           <p:nvPr/>
         </p:nvSpPr>
         <p:spPr>
           <a:xfrm>
-            <a:off x="723900" y="5646976"/>
+            <a:off x="695325" y="5838653"/>
             <a:ext cx="10698480" cy="329184"/>
           </a:xfrm>
           <a:prstGeom prst="rect">
@@ -20840,7 +22894,7 @@
                 </a:solidFill>
                 <a:latin typeface="DM Sans"/>
               </a:rPr>
-              <a:t>Software vs Hardware: </a:t>
+              <a:t>Design Principle: </a:t>
             </a:r>
             <a:r>
               <a:rPr sz="960" b="0">
@@ -20849,7 +22903,7 @@
                 </a:solidFill>
                 <a:latin typeface="DM Sans"/>
               </a:rPr>
-              <a:t>23 compile-time and 16 PC tests pass; not yet run on a wired board.</a:t>
+              <a:t>only film and carbon are disposable; the strip never touches the wound.</a:t>
             </a:r>
             <a:endParaRPr/>
           </a:p>
@@ -20857,13 +22911,401 @@
       </p:sp>
       <p:sp>
         <p:nvSpPr>
-          <p:cNvPr id="241" name="Google Shape;241;p20"/>
+          <p:cNvPr id="136" name="Google Shape;136;p16"/>
           <p:cNvSpPr txBox="1"/>
           <p:nvPr/>
         </p:nvSpPr>
         <p:spPr>
           <a:xfrm>
-            <a:off x="533400" y="4901184"/>
+            <a:off x="695325" y="1024128"/>
+            <a:ext cx="2343150" cy="301752"/>
+          </a:xfrm>
+          <a:prstGeom prst="rect">
+            <a:avLst/>
+          </a:prstGeom>
+          <a:noFill/>
+          <a:ln>
+            <a:noFill/>
+          </a:ln>
+        </p:spPr>
+        <p:txBody>
+          <a:bodyPr anchorCtr="0" anchor="t" bIns="0" lIns="0" spcFirstLastPara="1" rIns="0" wrap="square" tIns="0">
+            <a:spAutoFit/>
+          </a:bodyPr>
+          <a:lstStyle/>
+          <a:p>
+            <a:pPr indent="0" lvl="0" marL="0" marR="0" rtl="0" algn="ctr">
+              <a:lnSpc>
+                <a:spcPct val="109939"/>
+              </a:lnSpc>
+              <a:spcBef>
+                <a:spcPts val="0"/>
+              </a:spcBef>
+              <a:spcAft>
+                <a:spcPts val="0"/>
+              </a:spcAft>
+              <a:buNone/>
+            </a:pPr>
+            <a:r>
+              <a:rPr sz="1300" b="0">
+                <a:solidFill>
+                  <a:srgbClr val="0369A1"/>
+                </a:solidFill>
+                <a:latin typeface="Poppins SemiBold"/>
+              </a:rPr>
+              <a:t>up to 44.9 %</a:t>
+            </a:r>
+            <a:endParaRPr/>
+          </a:p>
+        </p:txBody>
+      </p:sp>
+      <p:sp>
+        <p:nvSpPr>
+          <p:cNvPr id="137" name="Google Shape;137;p16"/>
+          <p:cNvSpPr txBox="1"/>
+          <p:nvPr/>
+        </p:nvSpPr>
+        <p:spPr>
+          <a:xfrm>
+            <a:off x="695325" y="1344168"/>
+            <a:ext cx="2343150" cy="219456"/>
+          </a:xfrm>
+          <a:prstGeom prst="rect">
+            <a:avLst/>
+          </a:prstGeom>
+          <a:noFill/>
+          <a:ln>
+            <a:noFill/>
+          </a:ln>
+        </p:spPr>
+        <p:txBody>
+          <a:bodyPr anchorCtr="0" anchor="t" bIns="0" lIns="0" spcFirstLastPara="1" rIns="0" wrap="square" tIns="0">
+            <a:spAutoFit/>
+          </a:bodyPr>
+          <a:lstStyle/>
+          <a:p>
+            <a:pPr indent="0" lvl="0" marL="0" marR="0" rtl="0" algn="ctr">
+              <a:spcBef>
+                <a:spcPts val="0"/>
+              </a:spcBef>
+              <a:spcAft>
+                <a:spcPts val="0"/>
+              </a:spcAft>
+              <a:buNone/>
+            </a:pPr>
+            <a:r>
+              <a:rPr sz="760" b="0">
+                <a:solidFill>
+                  <a:srgbClr val="64748B"/>
+                </a:solidFill>
+                <a:latin typeface="DM Sans Medium"/>
+              </a:rPr>
+              <a:t>EARLY CHANGES A RELIABLE ALERT COULD AVOID¹</a:t>
+            </a:r>
+            <a:endParaRPr/>
+          </a:p>
+        </p:txBody>
+      </p:sp>
+      <p:sp>
+        <p:nvSpPr>
+          <p:cNvPr id="138" name="Google Shape;138;p16"/>
+          <p:cNvSpPr txBox="1"/>
+          <p:nvPr/>
+        </p:nvSpPr>
+        <p:spPr>
+          <a:xfrm>
+            <a:off x="3514725" y="1024128"/>
+            <a:ext cx="2343150" cy="301752"/>
+          </a:xfrm>
+          <a:prstGeom prst="rect">
+            <a:avLst/>
+          </a:prstGeom>
+          <a:noFill/>
+          <a:ln>
+            <a:noFill/>
+          </a:ln>
+        </p:spPr>
+        <p:txBody>
+          <a:bodyPr anchorCtr="0" anchor="t" bIns="0" lIns="0" spcFirstLastPara="1" rIns="0" wrap="square" tIns="0">
+            <a:spAutoFit/>
+          </a:bodyPr>
+          <a:lstStyle/>
+          <a:p>
+            <a:pPr indent="0" lvl="0" marL="0" marR="0" rtl="0" algn="ctr">
+              <a:lnSpc>
+                <a:spcPct val="109939"/>
+              </a:lnSpc>
+              <a:spcBef>
+                <a:spcPts val="0"/>
+              </a:spcBef>
+              <a:spcAft>
+                <a:spcPts val="0"/>
+              </a:spcAft>
+              <a:buNone/>
+            </a:pPr>
+            <a:r>
+              <a:rPr sz="1500" b="0">
+                <a:solidFill>
+                  <a:srgbClr val="0369A1"/>
+                </a:solidFill>
+                <a:latin typeface="Poppins SemiBold"/>
+              </a:rPr>
+              <a:t>≤ ₹100</a:t>
+            </a:r>
+            <a:endParaRPr/>
+          </a:p>
+        </p:txBody>
+      </p:sp>
+      <p:sp>
+        <p:nvSpPr>
+          <p:cNvPr id="139" name="Google Shape;139;p16"/>
+          <p:cNvSpPr txBox="1"/>
+          <p:nvPr/>
+        </p:nvSpPr>
+        <p:spPr>
+          <a:xfrm>
+            <a:off x="3514725" y="1344168"/>
+            <a:ext cx="2343150" cy="219456"/>
+          </a:xfrm>
+          <a:prstGeom prst="rect">
+            <a:avLst/>
+          </a:prstGeom>
+          <a:noFill/>
+          <a:ln>
+            <a:noFill/>
+          </a:ln>
+        </p:spPr>
+        <p:txBody>
+          <a:bodyPr anchorCtr="0" anchor="t" bIns="0" lIns="0" spcFirstLastPara="1" rIns="0" wrap="square" tIns="0">
+            <a:spAutoFit/>
+          </a:bodyPr>
+          <a:lstStyle/>
+          <a:p>
+            <a:pPr indent="0" lvl="0" marL="0" marR="0" rtl="0" algn="ctr">
+              <a:spcBef>
+                <a:spcPts val="0"/>
+              </a:spcBef>
+              <a:spcAft>
+                <a:spcPts val="0"/>
+              </a:spcAft>
+              <a:buNone/>
+            </a:pPr>
+            <a:r>
+              <a:rPr sz="760" b="0">
+                <a:solidFill>
+                  <a:srgbClr val="64748B"/>
+                </a:solidFill>
+                <a:latin typeface="DM Sans Medium"/>
+              </a:rPr>
+              <a:t>TARGET STRIP COST (ESTIMATE)</a:t>
+            </a:r>
+            <a:endParaRPr/>
+          </a:p>
+        </p:txBody>
+      </p:sp>
+      <p:sp>
+        <p:nvSpPr>
+          <p:cNvPr id="140" name="Google Shape;140;p16"/>
+          <p:cNvSpPr txBox="1"/>
+          <p:nvPr/>
+        </p:nvSpPr>
+        <p:spPr>
+          <a:xfrm>
+            <a:off x="6334125" y="1024128"/>
+            <a:ext cx="2343150" cy="301752"/>
+          </a:xfrm>
+          <a:prstGeom prst="rect">
+            <a:avLst/>
+          </a:prstGeom>
+          <a:noFill/>
+          <a:ln>
+            <a:noFill/>
+          </a:ln>
+        </p:spPr>
+        <p:txBody>
+          <a:bodyPr anchorCtr="0" anchor="t" bIns="0" lIns="0" spcFirstLastPara="1" rIns="0" wrap="square" tIns="0">
+            <a:spAutoFit/>
+          </a:bodyPr>
+          <a:lstStyle/>
+          <a:p>
+            <a:pPr indent="0" lvl="0" marL="0" marR="0" rtl="0" algn="ctr">
+              <a:lnSpc>
+                <a:spcPct val="109939"/>
+              </a:lnSpc>
+              <a:spcBef>
+                <a:spcPts val="0"/>
+              </a:spcBef>
+              <a:spcAft>
+                <a:spcPts val="0"/>
+              </a:spcAft>
+              <a:buNone/>
+            </a:pPr>
+            <a:r>
+              <a:rPr sz="1500" b="0">
+                <a:solidFill>
+                  <a:srgbClr val="0369A1"/>
+                </a:solidFill>
+                <a:latin typeface="Poppins SemiBold"/>
+              </a:rPr>
+              <a:t>±10 %</a:t>
+            </a:r>
+            <a:endParaRPr/>
+          </a:p>
+        </p:txBody>
+      </p:sp>
+      <p:sp>
+        <p:nvSpPr>
+          <p:cNvPr id="141" name="Google Shape;141;p16"/>
+          <p:cNvSpPr txBox="1"/>
+          <p:nvPr/>
+        </p:nvSpPr>
+        <p:spPr>
+          <a:xfrm>
+            <a:off x="6334125" y="1344168"/>
+            <a:ext cx="2343150" cy="219456"/>
+          </a:xfrm>
+          <a:prstGeom prst="rect">
+            <a:avLst/>
+          </a:prstGeom>
+          <a:noFill/>
+          <a:ln>
+            <a:noFill/>
+          </a:ln>
+        </p:spPr>
+        <p:txBody>
+          <a:bodyPr anchorCtr="0" anchor="t" bIns="0" lIns="0" spcFirstLastPara="1" rIns="0" wrap="square" tIns="0">
+            <a:spAutoFit/>
+          </a:bodyPr>
+          <a:lstStyle/>
+          <a:p>
+            <a:pPr indent="0" lvl="0" marL="0" marR="0" rtl="0" algn="ctr">
+              <a:spcBef>
+                <a:spcPts val="0"/>
+              </a:spcBef>
+              <a:spcAft>
+                <a:spcPts val="0"/>
+              </a:spcAft>
+              <a:buNone/>
+            </a:pPr>
+            <a:r>
+              <a:rPr sz="760" b="0">
+                <a:solidFill>
+                  <a:srgbClr val="64748B"/>
+                </a:solidFill>
+                <a:latin typeface="DM Sans Medium"/>
+              </a:rPr>
+              <a:t>TARGET ALERT ACCURACY (BENCH, E4)</a:t>
+            </a:r>
+            <a:endParaRPr/>
+          </a:p>
+        </p:txBody>
+      </p:sp>
+      <p:sp>
+        <p:nvSpPr>
+          <p:cNvPr id="142" name="Google Shape;142;p16"/>
+          <p:cNvSpPr txBox="1"/>
+          <p:nvPr/>
+        </p:nvSpPr>
+        <p:spPr>
+          <a:xfrm>
+            <a:off x="9153525" y="1024128"/>
+            <a:ext cx="2343150" cy="301752"/>
+          </a:xfrm>
+          <a:prstGeom prst="rect">
+            <a:avLst/>
+          </a:prstGeom>
+          <a:noFill/>
+          <a:ln>
+            <a:noFill/>
+          </a:ln>
+        </p:spPr>
+        <p:txBody>
+          <a:bodyPr anchorCtr="0" anchor="t" bIns="0" lIns="0" spcFirstLastPara="1" rIns="0" wrap="square" tIns="0">
+            <a:spAutoFit/>
+          </a:bodyPr>
+          <a:lstStyle/>
+          <a:p>
+            <a:pPr indent="0" lvl="0" marL="0" marR="0" rtl="0" algn="ctr">
+              <a:lnSpc>
+                <a:spcPct val="109939"/>
+              </a:lnSpc>
+              <a:spcBef>
+                <a:spcPts val="0"/>
+              </a:spcBef>
+              <a:spcAft>
+                <a:spcPts val="0"/>
+              </a:spcAft>
+              <a:buNone/>
+            </a:pPr>
+            <a:r>
+              <a:rPr sz="1500" b="0">
+                <a:solidFill>
+                  <a:srgbClr val="0369A1"/>
+                </a:solidFill>
+                <a:latin typeface="Poppins SemiBold"/>
+              </a:rPr>
+              <a:t>0</a:t>
+            </a:r>
+            <a:endParaRPr/>
+          </a:p>
+        </p:txBody>
+      </p:sp>
+      <p:sp>
+        <p:nvSpPr>
+          <p:cNvPr id="143" name="Google Shape;143;p16"/>
+          <p:cNvSpPr txBox="1"/>
+          <p:nvPr/>
+        </p:nvSpPr>
+        <p:spPr>
+          <a:xfrm>
+            <a:off x="9153525" y="1344168"/>
+            <a:ext cx="2343150" cy="219456"/>
+          </a:xfrm>
+          <a:prstGeom prst="rect">
+            <a:avLst/>
+          </a:prstGeom>
+          <a:noFill/>
+          <a:ln>
+            <a:noFill/>
+          </a:ln>
+        </p:spPr>
+        <p:txBody>
+          <a:bodyPr anchorCtr="0" anchor="t" bIns="0" lIns="0" spcFirstLastPara="1" rIns="0" wrap="square" tIns="0">
+            <a:spAutoFit/>
+          </a:bodyPr>
+          <a:lstStyle/>
+          <a:p>
+            <a:pPr indent="0" lvl="0" marL="0" marR="0" rtl="0" algn="ctr">
+              <a:spcBef>
+                <a:spcPts val="0"/>
+              </a:spcBef>
+              <a:spcAft>
+                <a:spcPts val="0"/>
+              </a:spcAft>
+              <a:buNone/>
+            </a:pPr>
+            <a:r>
+              <a:rPr sz="760" b="0">
+                <a:solidFill>
+                  <a:srgbClr val="64748B"/>
+                </a:solidFill>
+                <a:latin typeface="DM Sans Medium"/>
+              </a:rPr>
+              <a:t>CONTACT WITH THE WOUND BED (BY DESIGN)</a:t>
+            </a:r>
+            <a:endParaRPr/>
+          </a:p>
+        </p:txBody>
+      </p:sp>
+      <p:sp>
+        <p:nvSpPr>
+          <p:cNvPr id="144" name="Google Shape;144;p16"/>
+          <p:cNvSpPr txBox="1"/>
+          <p:nvPr/>
+        </p:nvSpPr>
+        <p:spPr>
+          <a:xfrm>
+            <a:off x="533400" y="5394960"/>
             <a:ext cx="5429250" cy="201168"/>
           </a:xfrm>
           <a:prstGeom prst="rect">
@@ -20899,7 +23341,7 @@
                 </a:solidFill>
                 <a:latin typeface="DM Sans"/>
               </a:rPr>
-              <a:t>Figure: one reader scan, from measurement to state.</a:t>
+              <a:t>Figure: the intended workflow; bench-testable, not clinically validated.</a:t>
             </a:r>
             <a:endParaRPr/>
           </a:p>
@@ -20907,12 +23349,12 @@
       </p:sp>
       <p:pic>
         <p:nvPicPr>
-          <p:cNvPr descr="image.png" id="243" name="Google Shape;243;p20"/>
+          <p:cNvPr descr="image.png" id="146" name="Google Shape;146;p16"/>
           <p:cNvPicPr preferRelativeResize="0"/>
           <p:nvPr/>
         </p:nvPicPr>
         <p:blipFill rotWithShape="1">
-          <a:blip r:embed="rId6">
+          <a:blip r:embed="rId5">
             <a:alphaModFix/>
           </a:blip>
           <a:srcRect b="0" l="0" r="0" t="0"/>
@@ -20920,7 +23362,7 @@
         </p:blipFill>
         <p:spPr>
           <a:xfrm>
-            <a:off x="6448425" y="1175295"/>
+            <a:off x="6448425" y="1958131"/>
             <a:ext cx="154334" cy="152400"/>
           </a:xfrm>
           <a:prstGeom prst="rect">
@@ -20934,13 +23376,13 @@
       </p:pic>
       <p:sp>
         <p:nvSpPr>
-          <p:cNvPr id="244" name="Google Shape;244;p20"/>
+          <p:cNvPr id="147" name="Google Shape;147;p16"/>
           <p:cNvSpPr txBox="1"/>
           <p:nvPr/>
         </p:nvSpPr>
         <p:spPr>
           <a:xfrm>
-            <a:off x="6698009" y="1156245"/>
+            <a:off x="6698009" y="1939081"/>
             <a:ext cx="4846320" cy="190500"/>
           </a:xfrm>
           <a:prstGeom prst="rect">
@@ -20973,7 +23415,7 @@
                 </a:solidFill>
                 <a:latin typeface="DM Sans"/>
               </a:rPr>
-              <a:t>Firmware Logic &amp; Data Flow</a:t>
+              <a:t>Future Solution Mapping &amp; Quantified Efficiency</a:t>
             </a:r>
             <a:endParaRPr/>
           </a:p>
@@ -20981,12 +23423,12 @@
       </p:sp>
       <p:pic>
         <p:nvPicPr>
-          <p:cNvPr id="255" name="Google Shape;255;p20" title="MBF_Logo_2020.png"/>
+          <p:cNvPr id="156" name="Google Shape;156;p16" title="MBF_Logo_2020.png"/>
           <p:cNvPicPr preferRelativeResize="0"/>
           <p:nvPr/>
         </p:nvPicPr>
         <p:blipFill>
-          <a:blip r:embed="rId3">
+          <a:blip r:embed="rId4">
             <a:alphaModFix/>
           </a:blip>
           <a:stretch>
@@ -21009,12 +23451,12 @@
       </p:pic>
       <p:pic>
         <p:nvPicPr>
-          <p:cNvPr id="256" name="Google Shape;256;p20" title="VK colored transparent logo.png"/>
+          <p:cNvPr id="157" name="Google Shape;157;p16" title="VK colored transparent logo.png"/>
           <p:cNvPicPr preferRelativeResize="0"/>
           <p:nvPr/>
         </p:nvPicPr>
         <p:blipFill rotWithShape="1">
-          <a:blip r:embed="rId2">
+          <a:blip r:embed="rId9">
             <a:alphaModFix/>
           </a:blip>
           <a:srcRect b="44466" l="14673" r="15820" t="33074"/>
@@ -21036,14 +23478,14 @@
       </p:pic>
       <p:sp>
         <p:nvSpPr>
-          <p:cNvPr id="257" name="Rounded Rectangle 256"/>
+          <p:cNvPr id="158" name="Rounded Rectangle 157"/>
           <p:cNvSpPr/>
           <p:nvPr/>
         </p:nvSpPr>
         <p:spPr>
           <a:xfrm>
-            <a:off x="8959291" y="457200"/>
-            <a:ext cx="2699308" cy="246888"/>
+            <a:off x="9208008" y="457200"/>
+            <a:ext cx="2450592" cy="246888"/>
           </a:xfrm>
           <a:prstGeom prst="roundRect">
             <a:avLst>
@@ -21051,7 +23493,7 @@
             </a:avLst>
           </a:prstGeom>
           <a:solidFill>
-            <a:srgbClr val="D1FAE5"/>
+            <a:srgbClr val="FEF3C7"/>
           </a:solidFill>
           <a:ln>
             <a:noFill/>
@@ -21080,33 +23522,33 @@
             <a:r>
               <a:rPr sz="750" b="1">
                 <a:solidFill>
-                  <a:srgbClr val="047857"/>
-                </a:solidFill>
-                <a:latin typeface="DM Sans"/>
-              </a:rPr>
-              <a:t>VERIFIED IN SOFTWARE · HARDWARE PENDING</a:t>
+                  <a:srgbClr val="B45309"/>
+                </a:solidFill>
+                <a:latin typeface="DM Sans"/>
+              </a:rPr>
+              <a:t>INTENDED · NOT CLINICALLY VALIDATED</a:t>
             </a:r>
           </a:p>
         </p:txBody>
       </p:sp>
       <p:pic>
         <p:nvPicPr>
-          <p:cNvPr id="258" name="Picture 257" descr="fig_dataflow.png"/>
+          <p:cNvPr id="159" name="Picture 158" descr="fig_journey_after.png"/>
           <p:cNvPicPr>
             <a:picLocks noChangeAspect="1"/>
           </p:cNvPicPr>
           <p:nvPr/>
         </p:nvPicPr>
         <p:blipFill>
-          <a:blip r:embed="rId11"/>
+          <a:blip r:embed="rId14"/>
           <a:stretch>
             <a:fillRect/>
           </a:stretch>
         </p:blipFill>
         <p:spPr>
           <a:xfrm>
-            <a:off x="539496" y="970048"/>
-            <a:ext cx="5413248" cy="3875487"/>
+            <a:off x="545756" y="1746504"/>
+            <a:ext cx="5400726" cy="3593591"/>
           </a:xfrm>
           <a:prstGeom prst="rect">
             <a:avLst/>
@@ -21115,14 +23557,14 @@
       </p:pic>
       <p:sp>
         <p:nvSpPr>
-          <p:cNvPr id="259" name="TextBox 258"/>
+          <p:cNvPr id="160" name="TextBox 159"/>
           <p:cNvSpPr txBox="1"/>
           <p:nvPr/>
         </p:nvSpPr>
         <p:spPr>
           <a:xfrm>
-            <a:off x="6464808" y="1572768"/>
-            <a:ext cx="5029200" cy="3657600"/>
+            <a:off x="6464808" y="2395728"/>
+            <a:ext cx="5029200" cy="3108960"/>
           </a:xfrm>
           <a:prstGeom prst="rect">
             <a:avLst/>
@@ -21138,7 +23580,7 @@
                 <a:spcPct val="108000"/>
               </a:lnSpc>
               <a:spcAft>
-                <a:spcPts val="1400"/>
+                <a:spcPts val="1200"/>
               </a:spcAft>
             </a:pPr>
             <a:r>
@@ -21157,7 +23599,7 @@
                 </a:solidFill>
                 <a:latin typeface="DM Sans"/>
               </a:rPr>
-              <a:t>Measure:  </a:t>
+              <a:t>Same routine:  </a:t>
             </a:r>
             <a:r>
               <a:rPr sz="1200" b="0">
@@ -21166,7 +23608,7 @@
                 </a:solidFill>
                 <a:latin typeface="DM Sans"/>
               </a:rPr>
-              <a:t>each zone driven both ways, so no net DC.</a:t>
+              <a:t>strip on the pad, reader clips on.</a:t>
             </a:r>
           </a:p>
           <a:p>
@@ -21175,7 +23617,7 @@
                 <a:spcPct val="108000"/>
               </a:lnSpc>
               <a:spcAft>
-                <a:spcPts val="1400"/>
+                <a:spcPts val="1200"/>
               </a:spcAft>
             </a:pPr>
             <a:r>
@@ -21194,7 +23636,7 @@
                 </a:solidFill>
                 <a:latin typeface="DM Sans"/>
               </a:rPr>
-              <a:t>Read:  </a:t>
+              <a:t>Clear signal:  </a:t>
             </a:r>
             <a:r>
               <a:rPr sz="1200" b="0">
@@ -21203,7 +23645,7 @@
                 </a:solidFill>
                 <a:latin typeface="DM Sans"/>
               </a:rPr>
-              <a:t>16-bit ADC, scaled to the 3V3 rail.</a:t>
+              <a:t>CHANGE when the line is wet; CHECK if it wets first.</a:t>
             </a:r>
           </a:p>
           <a:p>
@@ -21212,7 +23654,7 @@
                 <a:spcPct val="108000"/>
               </a:lnSpc>
               <a:spcAft>
-                <a:spcPts val="1400"/>
+                <a:spcPts val="1200"/>
               </a:spcAft>
             </a:pPr>
             <a:r>
@@ -21231,7 +23673,7 @@
                 </a:solidFill>
                 <a:latin typeface="DM Sans"/>
               </a:rPr>
-              <a:t>Decide:  </a:t>
+              <a:t>Remote:  </a:t>
             </a:r>
             <a:r>
               <a:rPr sz="1200" b="0">
@@ -21240,7 +23682,7 @@
                 </a:solidFill>
                 <a:latin typeface="DM Sans"/>
               </a:rPr>
-              <a:t>wet &lt; 100 kΩ, dry &gt; 300 kΩ, 3 scans in a row.</a:t>
+              <a:t>designed to broadcast the state to a nearby phone over Bluetooth (hardware test pending).</a:t>
             </a:r>
           </a:p>
           <a:p>
@@ -21249,7 +23691,7 @@
                 <a:spcPct val="108000"/>
               </a:lnSpc>
               <a:spcAft>
-                <a:spcPts val="1400"/>
+                <a:spcPts val="1200"/>
               </a:spcAft>
             </a:pPr>
             <a:r>
@@ -21268,7 +23710,7 @@
                 </a:solidFill>
                 <a:latin typeface="DM Sans"/>
               </a:rPr>
-              <a:t>Self-check:  </a:t>
+              <a:t>Payback:  </a:t>
             </a:r>
             <a:r>
               <a:rPr sz="1200" b="0">
@@ -21277,44 +23719,7 @@
                 </a:solidFill>
                 <a:latin typeface="DM Sans"/>
               </a:rPr>
-              <a:t>a known 100 kΩ every scan, else FAULT.</a:t>
-            </a:r>
-          </a:p>
-          <a:p>
-            <a:pPr>
-              <a:lnSpc>
-                <a:spcPct val="108000"/>
-              </a:lnSpc>
-              <a:spcAft>
-                <a:spcPts val="1400"/>
-              </a:spcAft>
-            </a:pPr>
-            <a:r>
-              <a:rPr sz="1200" b="0">
-                <a:solidFill>
-                  <a:srgbClr val="059669"/>
-                </a:solidFill>
-                <a:latin typeface="DM Sans"/>
-              </a:rPr>
-              <a:t>▪  </a:t>
-            </a:r>
-            <a:r>
-              <a:rPr sz="1200" b="1">
-                <a:solidFill>
-                  <a:srgbClr val="0F172A"/>
-                </a:solidFill>
-                <a:latin typeface="DM Sans"/>
-              </a:rPr>
-              <a:t>Share:  </a:t>
-            </a:r>
-            <a:r>
-              <a:rPr sz="1200" b="0">
-                <a:solidFill>
-                  <a:srgbClr val="334155"/>
-                </a:solidFill>
-                <a:latin typeface="DM Sans"/>
-              </a:rPr>
-              <a:t>CSV over USB, and a Bluetooth broadcast to a phone.</a:t>
+              <a:t>a ≤ ₹100 strip pays for itself if 1 in 2–5 changes is avoided¹⁵ (strip only; the reader is reused).</a:t>
             </a:r>
           </a:p>
         </p:txBody>
@@ -21496,7 +23901,7 @@
                 </a:solidFill>
                 <a:latin typeface="Poppins SemiBold"/>
               </a:rPr>
-              <a:t>CAD Design &amp; Mechanical Specs: Sensing Strip &amp; Laser Process</a:t>
+              <a:t>System Architecture &amp; Specs: Firmware &amp; Data Flow</a:t>
             </a:r>
             <a:endParaRPr/>
           </a:p>
@@ -21546,7 +23951,7 @@
                 </a:solidFill>
                 <a:latin typeface="DM Sans"/>
               </a:rPr>
-              <a:t>Laser Files Verified: </a:t>
+              <a:t>Software vs Hardware: </a:t>
             </a:r>
             <a:r>
               <a:rPr sz="960" b="0">
@@ -21555,7 +23960,7 @@
                 </a:solidFill>
                 <a:latin typeface="DM Sans"/>
               </a:rPr>
-              <a:t>35/35 file checks pass; LaserCAD import is checked at the machine.</a:t>
+              <a:t>23 compile-time and 16 PC tests pass; not yet run on a wired board.</a:t>
             </a:r>
             <a:endParaRPr/>
           </a:p>
@@ -21605,7 +24010,7 @@
                 </a:solidFill>
                 <a:latin typeface="DM Sans"/>
               </a:rPr>
-              <a:t>Figure: our laser files, drawn from the DXFs. Not yet lased.</a:t>
+              <a:t>Figure: one reader scan, from measurement to state.</a:t>
             </a:r>
             <a:endParaRPr/>
           </a:p>
@@ -21679,7 +24084,7 @@
                 </a:solidFill>
                 <a:latin typeface="DM Sans"/>
               </a:rPr>
-              <a:t>Fabrication &amp; Process Validation (E2)</a:t>
+              <a:t>Firmware Logic &amp; Data Flow</a:t>
             </a:r>
             <a:endParaRPr/>
           </a:p>
@@ -21748,8 +24153,8 @@
         </p:nvSpPr>
         <p:spPr>
           <a:xfrm>
-            <a:off x="9705441" y="457200"/>
-            <a:ext cx="1953158" cy="246888"/>
+            <a:off x="8959291" y="457200"/>
+            <a:ext cx="2699308" cy="246888"/>
           </a:xfrm>
           <a:prstGeom prst="roundRect">
             <a:avLst>
@@ -21757,7 +24162,7 @@
             </a:avLst>
           </a:prstGeom>
           <a:solidFill>
-            <a:srgbClr val="FEF3C7"/>
+            <a:srgbClr val="D1FAE5"/>
           </a:solidFill>
           <a:ln>
             <a:noFill/>
@@ -21786,18 +24191,18 @@
             <a:r>
               <a:rPr sz="750" b="1">
                 <a:solidFill>
-                  <a:srgbClr val="B45309"/>
-                </a:solidFill>
-                <a:latin typeface="DM Sans"/>
-              </a:rPr>
-              <a:t>DESIGNED · LAB TEST PENDING</a:t>
+                  <a:srgbClr val="047857"/>
+                </a:solidFill>
+                <a:latin typeface="DM Sans"/>
+              </a:rPr>
+              <a:t>VERIFIED IN SOFTWARE · HARDWARE PENDING</a:t>
             </a:r>
           </a:p>
         </p:txBody>
       </p:sp>
       <p:pic>
         <p:nvPicPr>
-          <p:cNvPr id="258" name="Picture 257" descr="fig_strip.png"/>
+          <p:cNvPr id="258" name="Picture 257" descr="fig_dataflow.png"/>
           <p:cNvPicPr>
             <a:picLocks noChangeAspect="1"/>
           </p:cNvPicPr>
@@ -21863,7 +24268,7 @@
                 </a:solidFill>
                 <a:latin typeface="DM Sans"/>
               </a:rPr>
-              <a:t>Material:  </a:t>
+              <a:t>Measure:  </a:t>
             </a:r>
             <a:r>
               <a:rPr sz="1200" b="0">
@@ -21872,7 +24277,7 @@
                 </a:solidFill>
                 <a:latin typeface="DM Sans"/>
               </a:rPr>
-              <a:t>laser-carbonised, LIG-like layer on polyimide⁷.</a:t>
+              <a:t>each zone driven both ways, so no net DC.</a:t>
             </a:r>
           </a:p>
           <a:p>
@@ -21900,7 +24305,7 @@
                 </a:solidFill>
                 <a:latin typeface="DM Sans"/>
               </a:rPr>
-              <a:t>Reference:  </a:t>
+              <a:t>Read:  </a:t>
             </a:r>
             <a:r>
               <a:rPr sz="1200" b="0">
@@ -21909,7 +24314,7 @@
                 </a:solidFill>
                 <a:latin typeface="DM Sans"/>
               </a:rPr>
-              <a:t>setting '12', most likely % PWM, not watts.</a:t>
+              <a:t>16-bit ADC, scaled to the 3V3 rail.</a:t>
             </a:r>
           </a:p>
           <a:p>
@@ -21937,7 +24342,7 @@
                 </a:solidFill>
                 <a:latin typeface="DM Sans"/>
               </a:rPr>
-              <a:t>E2 plan:  </a:t>
+              <a:t>Decide:  </a:t>
             </a:r>
             <a:r>
               <a:rPr sz="1200" b="0">
@@ -21946,7 +24351,7 @@
                 </a:solidFill>
                 <a:latin typeface="DM Sans"/>
               </a:rPr>
-              <a:t>7 coupons, 2 days, 72 pre-registered samples.</a:t>
+              <a:t>wet &lt; 100 kΩ, dry &gt; 300 kΩ, 3 scans in a row.</a:t>
             </a:r>
           </a:p>
           <a:p>
@@ -21974,7 +24379,7 @@
                 </a:solidFill>
                 <a:latin typeface="DM Sans"/>
               </a:rPr>
-              <a:t>Pass rules:  </a:t>
+              <a:t>Self-check:  </a:t>
             </a:r>
             <a:r>
               <a:rPr sz="1200" b="0">
@@ -21983,7 +24388,7 @@
                 </a:solidFill>
                 <a:latin typeface="DM Sans"/>
               </a:rPr>
-              <a:t>CV ≤ 20 %, gaps &gt; 3 MΩ, fixed beforehand.</a:t>
+              <a:t>a known 100 kΩ every scan, else FAULT.</a:t>
             </a:r>
           </a:p>
           <a:p>
@@ -22011,7 +24416,7 @@
                 </a:solidFill>
                 <a:latin typeface="DM Sans"/>
               </a:rPr>
-              <a:t>Sealed:  </a:t>
+              <a:t>Output:  </a:t>
             </a:r>
             <a:r>
               <a:rPr sz="1200" b="0">
@@ -22020,7 +24425,44 @@
                 </a:solidFill>
                 <a:latin typeface="DM Sans"/>
               </a:rPr>
-              <a:t>leads under tape; LIG made in air wets easily⁹.</a:t>
+              <a:t>LEDs; a CSV line over USB; a Bluetooth broadcast any scanner app can read (no custom app yet).</a:t>
+            </a:r>
+          </a:p>
+          <a:p>
+            <a:pPr>
+              <a:lnSpc>
+                <a:spcPct val="108000"/>
+              </a:lnSpc>
+              <a:spcAft>
+                <a:spcPts val="1400"/>
+              </a:spcAft>
+            </a:pPr>
+            <a:r>
+              <a:rPr sz="1200" b="0">
+                <a:solidFill>
+                  <a:srgbClr val="059669"/>
+                </a:solidFill>
+                <a:latin typeface="DM Sans"/>
+              </a:rPr>
+              <a:t>▪  </a:t>
+            </a:r>
+            <a:r>
+              <a:rPr sz="1200" b="1">
+                <a:solidFill>
+                  <a:srgbClr val="0F172A"/>
+                </a:solidFill>
+                <a:latin typeface="DM Sans"/>
+              </a:rPr>
+              <a:t>Why remote:  </a:t>
+            </a:r>
+            <a:r>
+              <a:rPr sz="1200" b="0">
+                <a:solidFill>
+                  <a:srgbClr val="334155"/>
+                </a:solidFill>
+                <a:latin typeface="DM Sans"/>
+              </a:rPr>
+              <a:t>a carer nearby can see the state without unwrapping or plugging in (to be bench-tested).</a:t>
             </a:r>
           </a:p>
         </p:txBody>
@@ -22052,7 +24494,7 @@
       <p:grpSpPr/>
       <p:pic>
         <p:nvPicPr>
-          <p:cNvPr descr="image.png" id="277" name="Google Shape;277;p22"/>
+          <p:cNvPr descr="image.png" id="234" name="Google Shape;234;p20"/>
           <p:cNvPicPr preferRelativeResize="0"/>
           <p:nvPr/>
         </p:nvPicPr>
@@ -22079,7 +24521,7 @@
       </p:pic>
       <p:pic>
         <p:nvPicPr>
-          <p:cNvPr descr="image.png" id="278" name="Google Shape;278;p22"/>
+          <p:cNvPr descr="image.png" id="235" name="Google Shape;235;p20"/>
           <p:cNvPicPr preferRelativeResize="0"/>
           <p:nvPr/>
         </p:nvPicPr>
@@ -22092,7 +24534,7 @@
         </p:blipFill>
         <p:spPr>
           <a:xfrm>
-            <a:off x="533400" y="5749634"/>
+            <a:off x="533400" y="5551726"/>
             <a:ext cx="11125200" cy="363140"/>
           </a:xfrm>
           <a:prstGeom prst="rect">
@@ -22106,7 +24548,7 @@
       </p:pic>
       <p:pic>
         <p:nvPicPr>
-          <p:cNvPr descr="image.png" id="279" name="Google Shape;279;p22"/>
+          <p:cNvPr descr="image.png" id="236" name="Google Shape;236;p20"/>
           <p:cNvPicPr preferRelativeResize="0"/>
           <p:nvPr/>
         </p:nvPicPr>
@@ -22119,8 +24561,8 @@
         </p:blipFill>
         <p:spPr>
           <a:xfrm>
-            <a:off x="6229350" y="956226"/>
-            <a:ext cx="5429250" cy="4468100"/>
+            <a:off x="6229350" y="956224"/>
+            <a:ext cx="5429250" cy="4434840"/>
           </a:xfrm>
           <a:prstGeom prst="rect">
             <a:avLst/>
@@ -22133,7 +24575,7 @@
       </p:pic>
       <p:pic>
         <p:nvPicPr>
-          <p:cNvPr descr="image.png" id="280" name="Google Shape;280;p22"/>
+          <p:cNvPr descr="image.png" id="237" name="Google Shape;237;p20"/>
           <p:cNvPicPr preferRelativeResize="0"/>
           <p:nvPr/>
         </p:nvPicPr>
@@ -22160,7 +24602,7 @@
       </p:pic>
       <p:sp>
         <p:nvSpPr>
-          <p:cNvPr id="281" name="Google Shape;281;p22"/>
+          <p:cNvPr id="238" name="Google Shape;238;p20"/>
           <p:cNvSpPr txBox="1"/>
           <p:nvPr/>
         </p:nvSpPr>
@@ -22202,7 +24644,7 @@
                 </a:solidFill>
                 <a:latin typeface="Poppins SemiBold"/>
               </a:rPr>
-              <a:t>Electronics Schematics &amp; BOM: Bill of Materials</a:t>
+              <a:t>CAD Design &amp; Mechanical Specs: Sensing Strip &amp; Laser Process</a:t>
             </a:r>
             <a:endParaRPr/>
           </a:p>
@@ -22210,14 +24652,14 @@
       </p:sp>
       <p:sp>
         <p:nvSpPr>
-          <p:cNvPr id="283" name="Google Shape;283;p22"/>
+          <p:cNvPr id="240" name="Google Shape;240;p20"/>
           <p:cNvSpPr txBox="1"/>
           <p:nvPr/>
         </p:nvSpPr>
         <p:spPr>
           <a:xfrm>
-            <a:off x="723900" y="5844884"/>
-            <a:ext cx="10698480" cy="353400"/>
+            <a:off x="723900" y="5646976"/>
+            <a:ext cx="10698480" cy="329184"/>
           </a:xfrm>
           <a:prstGeom prst="rect">
             <a:avLst/>
@@ -22252,6 +24694,712 @@
                 </a:solidFill>
                 <a:latin typeface="DM Sans"/>
               </a:rPr>
+              <a:t>Laser Files Checked: </a:t>
+            </a:r>
+            <a:r>
+              <a:rPr sz="960" b="0">
+                <a:solidFill>
+                  <a:srgbClr val="334155"/>
+                </a:solidFill>
+                <a:latin typeface="DM Sans"/>
+              </a:rPr>
+              <a:t>35/35 file checks pass (files only; nothing lased yet). LaserCAD import is checked at the machine.</a:t>
+            </a:r>
+            <a:endParaRPr/>
+          </a:p>
+        </p:txBody>
+      </p:sp>
+      <p:sp>
+        <p:nvSpPr>
+          <p:cNvPr id="241" name="Google Shape;241;p20"/>
+          <p:cNvSpPr txBox="1"/>
+          <p:nvPr/>
+        </p:nvSpPr>
+        <p:spPr>
+          <a:xfrm>
+            <a:off x="533400" y="4901184"/>
+            <a:ext cx="5429250" cy="201168"/>
+          </a:xfrm>
+          <a:prstGeom prst="rect">
+            <a:avLst/>
+          </a:prstGeom>
+          <a:noFill/>
+          <a:ln>
+            <a:noFill/>
+          </a:ln>
+        </p:spPr>
+        <p:txBody>
+          <a:bodyPr anchorCtr="0" anchor="t" bIns="0" lIns="0" spcFirstLastPara="1" rIns="0" wrap="square" tIns="0">
+            <a:spAutoFit/>
+          </a:bodyPr>
+          <a:lstStyle/>
+          <a:p>
+            <a:pPr indent="0" lvl="0" marL="0" marR="0" rtl="0" algn="r">
+              <a:lnSpc>
+                <a:spcPct val="145011"/>
+              </a:lnSpc>
+              <a:spcBef>
+                <a:spcPts val="0"/>
+              </a:spcBef>
+              <a:spcAft>
+                <a:spcPts val="0"/>
+              </a:spcAft>
+              <a:buNone/>
+            </a:pPr>
+            <a:r>
+              <a:rPr sz="760" b="0">
+                <a:solidFill>
+                  <a:srgbClr val="64748B"/>
+                </a:solidFill>
+                <a:latin typeface="DM Sans"/>
+              </a:rPr>
+              <a:t>Figure: our laser files, drawn from the DXFs. Not yet lased.</a:t>
+            </a:r>
+            <a:endParaRPr/>
+          </a:p>
+        </p:txBody>
+      </p:sp>
+      <p:pic>
+        <p:nvPicPr>
+          <p:cNvPr descr="image.png" id="243" name="Google Shape;243;p20"/>
+          <p:cNvPicPr preferRelativeResize="0"/>
+          <p:nvPr/>
+        </p:nvPicPr>
+        <p:blipFill rotWithShape="1">
+          <a:blip r:embed="rId6">
+            <a:alphaModFix/>
+          </a:blip>
+          <a:srcRect b="0" l="0" r="0" t="0"/>
+          <a:stretch/>
+        </p:blipFill>
+        <p:spPr>
+          <a:xfrm>
+            <a:off x="6448425" y="1175295"/>
+            <a:ext cx="154334" cy="152400"/>
+          </a:xfrm>
+          <a:prstGeom prst="rect">
+            <a:avLst/>
+          </a:prstGeom>
+          <a:noFill/>
+          <a:ln>
+            <a:noFill/>
+          </a:ln>
+        </p:spPr>
+      </p:pic>
+      <p:sp>
+        <p:nvSpPr>
+          <p:cNvPr id="244" name="Google Shape;244;p20"/>
+          <p:cNvSpPr txBox="1"/>
+          <p:nvPr/>
+        </p:nvSpPr>
+        <p:spPr>
+          <a:xfrm>
+            <a:off x="6698009" y="1156245"/>
+            <a:ext cx="4846320" cy="190500"/>
+          </a:xfrm>
+          <a:prstGeom prst="rect">
+            <a:avLst/>
+          </a:prstGeom>
+          <a:noFill/>
+          <a:ln>
+            <a:noFill/>
+          </a:ln>
+        </p:spPr>
+        <p:txBody>
+          <a:bodyPr anchorCtr="0" anchor="t" bIns="0" lIns="0" spcFirstLastPara="1" rIns="0" wrap="square" tIns="0">
+            <a:spAutoFit/>
+          </a:bodyPr>
+          <a:lstStyle/>
+          <a:p>
+            <a:pPr indent="0" lvl="0" marL="0" marR="0" rtl="0" algn="l">
+              <a:spcBef>
+                <a:spcPts val="0"/>
+              </a:spcBef>
+              <a:spcAft>
+                <a:spcPts val="0"/>
+              </a:spcAft>
+              <a:buNone/>
+            </a:pPr>
+            <a:r>
+              <a:rPr sz="1150" b="1">
+                <a:solidFill>
+                  <a:srgbClr val="0F172A"/>
+                </a:solidFill>
+                <a:latin typeface="DM Sans"/>
+              </a:rPr>
+              <a:t>Fabrication &amp; Process Validation (E2)</a:t>
+            </a:r>
+            <a:endParaRPr/>
+          </a:p>
+        </p:txBody>
+      </p:sp>
+      <p:pic>
+        <p:nvPicPr>
+          <p:cNvPr id="255" name="Google Shape;255;p20" title="MBF_Logo_2020.png"/>
+          <p:cNvPicPr preferRelativeResize="0"/>
+          <p:nvPr/>
+        </p:nvPicPr>
+        <p:blipFill>
+          <a:blip r:embed="rId3">
+            <a:alphaModFix/>
+          </a:blip>
+          <a:stretch>
+            <a:fillRect/>
+          </a:stretch>
+        </p:blipFill>
+        <p:spPr>
+          <a:xfrm>
+            <a:off x="11095194" y="6280800"/>
+            <a:ext cx="1096806" cy="577200"/>
+          </a:xfrm>
+          <a:prstGeom prst="rect">
+            <a:avLst/>
+          </a:prstGeom>
+          <a:noFill/>
+          <a:ln>
+            <a:noFill/>
+          </a:ln>
+        </p:spPr>
+      </p:pic>
+      <p:pic>
+        <p:nvPicPr>
+          <p:cNvPr id="256" name="Google Shape;256;p20" title="VK colored transparent logo.png"/>
+          <p:cNvPicPr preferRelativeResize="0"/>
+          <p:nvPr/>
+        </p:nvPicPr>
+        <p:blipFill rotWithShape="1">
+          <a:blip r:embed="rId2">
+            <a:alphaModFix/>
+          </a:blip>
+          <a:srcRect b="44466" l="14673" r="15820" t="33074"/>
+          <a:stretch/>
+        </p:blipFill>
+        <p:spPr>
+          <a:xfrm>
+            <a:off x="0" y="6280800"/>
+            <a:ext cx="1786280" cy="577200"/>
+          </a:xfrm>
+          <a:prstGeom prst="rect">
+            <a:avLst/>
+          </a:prstGeom>
+          <a:noFill/>
+          <a:ln>
+            <a:noFill/>
+          </a:ln>
+        </p:spPr>
+      </p:pic>
+      <p:sp>
+        <p:nvSpPr>
+          <p:cNvPr id="257" name="Rounded Rectangle 256"/>
+          <p:cNvSpPr/>
+          <p:nvPr/>
+        </p:nvSpPr>
+        <p:spPr>
+          <a:xfrm>
+            <a:off x="9705441" y="457200"/>
+            <a:ext cx="1953158" cy="246888"/>
+          </a:xfrm>
+          <a:prstGeom prst="roundRect">
+            <a:avLst>
+              <a:gd name="adj" fmla="val 50000"/>
+            </a:avLst>
+          </a:prstGeom>
+          <a:solidFill>
+            <a:srgbClr val="FEF3C7"/>
+          </a:solidFill>
+          <a:ln>
+            <a:noFill/>
+          </a:ln>
+          <a:effectLst/>
+        </p:spPr>
+        <p:style>
+          <a:lnRef idx="1">
+            <a:schemeClr val="accent1"/>
+          </a:lnRef>
+          <a:fillRef idx="3">
+            <a:schemeClr val="accent1"/>
+          </a:fillRef>
+          <a:effectRef idx="2">
+            <a:schemeClr val="accent1"/>
+          </a:effectRef>
+          <a:fontRef idx="minor">
+            <a:schemeClr val="lt1"/>
+          </a:fontRef>
+        </p:style>
+        <p:txBody>
+          <a:bodyPr rtlCol="0" anchor="ctr" lIns="45720" rIns="45720" tIns="0" bIns="0"/>
+          <a:lstStyle/>
+          <a:p>
+            <a:pPr algn="ctr"/>
+            <a:r>
+              <a:rPr sz="750" b="1">
+                <a:solidFill>
+                  <a:srgbClr val="B45309"/>
+                </a:solidFill>
+                <a:latin typeface="DM Sans"/>
+              </a:rPr>
+              <a:t>DESIGNED · LAB TEST PENDING</a:t>
+            </a:r>
+          </a:p>
+        </p:txBody>
+      </p:sp>
+      <p:pic>
+        <p:nvPicPr>
+          <p:cNvPr id="258" name="Picture 257" descr="fig_strip.png"/>
+          <p:cNvPicPr>
+            <a:picLocks noChangeAspect="1"/>
+          </p:cNvPicPr>
+          <p:nvPr/>
+        </p:nvPicPr>
+        <p:blipFill>
+          <a:blip r:embed="rId11"/>
+          <a:stretch>
+            <a:fillRect/>
+          </a:stretch>
+        </p:blipFill>
+        <p:spPr>
+          <a:xfrm>
+            <a:off x="539496" y="970048"/>
+            <a:ext cx="5413248" cy="3875487"/>
+          </a:xfrm>
+          <a:prstGeom prst="rect">
+            <a:avLst/>
+          </a:prstGeom>
+        </p:spPr>
+      </p:pic>
+      <p:sp>
+        <p:nvSpPr>
+          <p:cNvPr id="259" name="TextBox 258"/>
+          <p:cNvSpPr txBox="1"/>
+          <p:nvPr/>
+        </p:nvSpPr>
+        <p:spPr>
+          <a:xfrm>
+            <a:off x="6464808" y="1572768"/>
+            <a:ext cx="5029200" cy="3657600"/>
+          </a:xfrm>
+          <a:prstGeom prst="rect">
+            <a:avLst/>
+          </a:prstGeom>
+          <a:noFill/>
+        </p:spPr>
+        <p:txBody>
+          <a:bodyPr wrap="square" lIns="18288" rIns="18288" tIns="9144" bIns="9144" anchor="t"/>
+          <a:lstStyle/>
+          <a:p>
+            <a:pPr>
+              <a:lnSpc>
+                <a:spcPct val="108000"/>
+              </a:lnSpc>
+              <a:spcAft>
+                <a:spcPts val="1400"/>
+              </a:spcAft>
+            </a:pPr>
+            <a:r>
+              <a:rPr sz="1200" b="0">
+                <a:solidFill>
+                  <a:srgbClr val="059669"/>
+                </a:solidFill>
+                <a:latin typeface="DM Sans"/>
+              </a:rPr>
+              <a:t>▪  </a:t>
+            </a:r>
+            <a:r>
+              <a:rPr sz="1200" b="1">
+                <a:solidFill>
+                  <a:srgbClr val="0F172A"/>
+                </a:solidFill>
+                <a:latin typeface="DM Sans"/>
+              </a:rPr>
+              <a:t>Material:  </a:t>
+            </a:r>
+            <a:r>
+              <a:rPr sz="1200" b="0">
+                <a:solidFill>
+                  <a:srgbClr val="334155"/>
+                </a:solidFill>
+                <a:latin typeface="DM Sans"/>
+              </a:rPr>
+              <a:t>laser-carbonised, LIG-like layer on polyimide⁷.</a:t>
+            </a:r>
+          </a:p>
+          <a:p>
+            <a:pPr>
+              <a:lnSpc>
+                <a:spcPct val="108000"/>
+              </a:lnSpc>
+              <a:spcAft>
+                <a:spcPts val="1400"/>
+              </a:spcAft>
+            </a:pPr>
+            <a:r>
+              <a:rPr sz="1200" b="0">
+                <a:solidFill>
+                  <a:srgbClr val="059669"/>
+                </a:solidFill>
+                <a:latin typeface="DM Sans"/>
+              </a:rPr>
+              <a:t>▪  </a:t>
+            </a:r>
+            <a:r>
+              <a:rPr sz="1200" b="1">
+                <a:solidFill>
+                  <a:srgbClr val="0F172A"/>
+                </a:solidFill>
+                <a:latin typeface="DM Sans"/>
+              </a:rPr>
+              <a:t>Reference:  </a:t>
+            </a:r>
+            <a:r>
+              <a:rPr sz="1200" b="0">
+                <a:solidFill>
+                  <a:srgbClr val="334155"/>
+                </a:solidFill>
+                <a:latin typeface="DM Sans"/>
+              </a:rPr>
+              <a:t>setting '12', most likely % PWM, not watts.</a:t>
+            </a:r>
+          </a:p>
+          <a:p>
+            <a:pPr>
+              <a:lnSpc>
+                <a:spcPct val="108000"/>
+              </a:lnSpc>
+              <a:spcAft>
+                <a:spcPts val="1400"/>
+              </a:spcAft>
+            </a:pPr>
+            <a:r>
+              <a:rPr sz="1200" b="0">
+                <a:solidFill>
+                  <a:srgbClr val="059669"/>
+                </a:solidFill>
+                <a:latin typeface="DM Sans"/>
+              </a:rPr>
+              <a:t>▪  </a:t>
+            </a:r>
+            <a:r>
+              <a:rPr sz="1200" b="1">
+                <a:solidFill>
+                  <a:srgbClr val="0F172A"/>
+                </a:solidFill>
+                <a:latin typeface="DM Sans"/>
+              </a:rPr>
+              <a:t>E2 plan:  </a:t>
+            </a:r>
+            <a:r>
+              <a:rPr sz="1200" b="0">
+                <a:solidFill>
+                  <a:srgbClr val="334155"/>
+                </a:solidFill>
+                <a:latin typeface="DM Sans"/>
+              </a:rPr>
+              <a:t>7 coupons, 2 days, 72 pre-registered samples.</a:t>
+            </a:r>
+          </a:p>
+          <a:p>
+            <a:pPr>
+              <a:lnSpc>
+                <a:spcPct val="108000"/>
+              </a:lnSpc>
+              <a:spcAft>
+                <a:spcPts val="1400"/>
+              </a:spcAft>
+            </a:pPr>
+            <a:r>
+              <a:rPr sz="1200" b="0">
+                <a:solidFill>
+                  <a:srgbClr val="059669"/>
+                </a:solidFill>
+                <a:latin typeface="DM Sans"/>
+              </a:rPr>
+              <a:t>▪  </a:t>
+            </a:r>
+            <a:r>
+              <a:rPr sz="1200" b="1">
+                <a:solidFill>
+                  <a:srgbClr val="0F172A"/>
+                </a:solidFill>
+                <a:latin typeface="DM Sans"/>
+              </a:rPr>
+              <a:t>Pass rules:  </a:t>
+            </a:r>
+            <a:r>
+              <a:rPr sz="1200" b="0">
+                <a:solidFill>
+                  <a:srgbClr val="334155"/>
+                </a:solidFill>
+                <a:latin typeface="DM Sans"/>
+              </a:rPr>
+              <a:t>CV ≤ 20 %, gaps &gt; 3 MΩ, fixed beforehand.</a:t>
+            </a:r>
+          </a:p>
+          <a:p>
+            <a:pPr>
+              <a:lnSpc>
+                <a:spcPct val="108000"/>
+              </a:lnSpc>
+              <a:spcAft>
+                <a:spcPts val="1400"/>
+              </a:spcAft>
+            </a:pPr>
+            <a:r>
+              <a:rPr sz="1200" b="0">
+                <a:solidFill>
+                  <a:srgbClr val="059669"/>
+                </a:solidFill>
+                <a:latin typeface="DM Sans"/>
+              </a:rPr>
+              <a:t>▪  </a:t>
+            </a:r>
+            <a:r>
+              <a:rPr sz="1200" b="1">
+                <a:solidFill>
+                  <a:srgbClr val="0F172A"/>
+                </a:solidFill>
+                <a:latin typeface="DM Sans"/>
+              </a:rPr>
+              <a:t>Sealed:  </a:t>
+            </a:r>
+            <a:r>
+              <a:rPr sz="1200" b="0">
+                <a:solidFill>
+                  <a:srgbClr val="334155"/>
+                </a:solidFill>
+                <a:latin typeface="DM Sans"/>
+              </a:rPr>
+              <a:t>leads under tape; LIG made in air wets easily⁹.</a:t>
+            </a:r>
+          </a:p>
+        </p:txBody>
+      </p:sp>
+    </p:spTree>
+  </p:cSld>
+  <p:clrMapOvr>
+    <a:masterClrMapping/>
+  </p:clrMapOvr>
+</p:sld>
+</file>
+
+<file path=ppt/slides/slide26.xml><?xml version="1.0" encoding="utf-8"?>
+<p:sld xmlns:a="http://schemas.openxmlformats.org/drawingml/2006/main" xmlns:p="http://schemas.openxmlformats.org/presentationml/2006/main" xmlns:r="http://schemas.openxmlformats.org/officeDocument/2006/relationships">
+  <p:cSld>
+    <p:bg>
+      <p:bgPr>
+        <a:solidFill>
+          <a:srgbClr val="FFFFFF"/>
+        </a:solidFill>
+      </p:bgPr>
+    </p:bg>
+    <p:spTree>
+      <p:nvGrpSpPr>
+        <p:cNvPr id="1" name=""/>
+        <p:cNvGrpSpPr/>
+        <p:nvPr/>
+      </p:nvGrpSpPr>
+      <p:grpSpPr/>
+      <p:pic>
+        <p:nvPicPr>
+          <p:cNvPr descr="image.png" id="277" name="Google Shape;277;p22"/>
+          <p:cNvPicPr preferRelativeResize="0"/>
+          <p:nvPr/>
+        </p:nvPicPr>
+        <p:blipFill rotWithShape="1">
+          <a:blip r:embed="rId4">
+            <a:alphaModFix/>
+          </a:blip>
+          <a:srcRect b="0" l="0" r="0" t="0"/>
+          <a:stretch/>
+        </p:blipFill>
+        <p:spPr>
+          <a:xfrm>
+            <a:off x="0" y="0"/>
+            <a:ext cx="12192000" cy="6858000"/>
+          </a:xfrm>
+          <a:prstGeom prst="rect">
+            <a:avLst/>
+          </a:prstGeom>
+          <a:noFill/>
+          <a:ln>
+            <a:noFill/>
+          </a:ln>
+        </p:spPr>
+      </p:pic>
+      <p:pic>
+        <p:nvPicPr>
+          <p:cNvPr descr="image.png" id="278" name="Google Shape;278;p22"/>
+          <p:cNvPicPr preferRelativeResize="0"/>
+          <p:nvPr/>
+        </p:nvPicPr>
+        <p:blipFill rotWithShape="1">
+          <a:blip r:embed="rId5">
+            <a:alphaModFix/>
+          </a:blip>
+          <a:srcRect b="0" l="0" r="0" t="0"/>
+          <a:stretch/>
+        </p:blipFill>
+        <p:spPr>
+          <a:xfrm>
+            <a:off x="533400" y="5749634"/>
+            <a:ext cx="11125200" cy="363140"/>
+          </a:xfrm>
+          <a:prstGeom prst="rect">
+            <a:avLst/>
+          </a:prstGeom>
+          <a:noFill/>
+          <a:ln>
+            <a:noFill/>
+          </a:ln>
+        </p:spPr>
+      </p:pic>
+      <p:pic>
+        <p:nvPicPr>
+          <p:cNvPr descr="image.png" id="279" name="Google Shape;279;p22"/>
+          <p:cNvPicPr preferRelativeResize="0"/>
+          <p:nvPr/>
+        </p:nvPicPr>
+        <p:blipFill rotWithShape="1">
+          <a:blip r:embed="rId7">
+            <a:alphaModFix/>
+          </a:blip>
+          <a:srcRect b="0" l="0" r="0" t="0"/>
+          <a:stretch/>
+        </p:blipFill>
+        <p:spPr>
+          <a:xfrm>
+            <a:off x="6229350" y="956226"/>
+            <a:ext cx="5429250" cy="4468100"/>
+          </a:xfrm>
+          <a:prstGeom prst="rect">
+            <a:avLst/>
+          </a:prstGeom>
+          <a:noFill/>
+          <a:ln>
+            <a:noFill/>
+          </a:ln>
+        </p:spPr>
+      </p:pic>
+      <p:pic>
+        <p:nvPicPr>
+          <p:cNvPr descr="image.png" id="280" name="Google Shape;280;p22"/>
+          <p:cNvPicPr preferRelativeResize="0"/>
+          <p:nvPr/>
+        </p:nvPicPr>
+        <p:blipFill rotWithShape="1">
+          <a:blip r:embed="rId8">
+            <a:alphaModFix/>
+          </a:blip>
+          <a:srcRect b="0" l="0" r="0" t="0"/>
+          <a:stretch/>
+        </p:blipFill>
+        <p:spPr>
+          <a:xfrm>
+            <a:off x="530352" y="960120"/>
+            <a:ext cx="5431536" cy="3895344"/>
+          </a:xfrm>
+          <a:prstGeom prst="rect">
+            <a:avLst/>
+          </a:prstGeom>
+          <a:noFill/>
+          <a:ln>
+            <a:noFill/>
+          </a:ln>
+        </p:spPr>
+      </p:pic>
+      <p:sp>
+        <p:nvSpPr>
+          <p:cNvPr id="281" name="Google Shape;281;p22"/>
+          <p:cNvSpPr txBox="1"/>
+          <p:nvPr/>
+        </p:nvSpPr>
+        <p:spPr>
+          <a:xfrm>
+            <a:off x="533400" y="438150"/>
+            <a:ext cx="8595360" cy="308520"/>
+          </a:xfrm>
+          <a:prstGeom prst="rect">
+            <a:avLst/>
+          </a:prstGeom>
+          <a:noFill/>
+          <a:ln>
+            <a:noFill/>
+          </a:ln>
+        </p:spPr>
+        <p:txBody>
+          <a:bodyPr anchorCtr="0" anchor="ctr" bIns="0" lIns="0" spcFirstLastPara="1" rIns="0" wrap="square" tIns="0">
+            <a:spAutoFit/>
+          </a:bodyPr>
+          <a:lstStyle/>
+          <a:p>
+            <a:pPr indent="0" lvl="0" marL="0" marR="0" rtl="0" algn="l">
+              <a:lnSpc>
+                <a:spcPct val="119950"/>
+              </a:lnSpc>
+              <a:spcBef>
+                <a:spcPts val="0"/>
+              </a:spcBef>
+              <a:spcAft>
+                <a:spcPts val="0"/>
+              </a:spcAft>
+              <a:buNone/>
+            </a:pPr>
+            <a:r>
+              <a:rPr sz="2025" b="0">
+                <a:solidFill>
+                  <a:srgbClr val="0F172A"/>
+                </a:solidFill>
+                <a:latin typeface="Poppins SemiBold"/>
+              </a:rPr>
+              <a:t>Electronics Schematics &amp; BOM: Bill of Materials</a:t>
+            </a:r>
+            <a:endParaRPr/>
+          </a:p>
+        </p:txBody>
+      </p:sp>
+      <p:sp>
+        <p:nvSpPr>
+          <p:cNvPr id="283" name="Google Shape;283;p22"/>
+          <p:cNvSpPr txBox="1"/>
+          <p:nvPr/>
+        </p:nvSpPr>
+        <p:spPr>
+          <a:xfrm>
+            <a:off x="723900" y="5844884"/>
+            <a:ext cx="10698480" cy="353400"/>
+          </a:xfrm>
+          <a:prstGeom prst="rect">
+            <a:avLst/>
+          </a:prstGeom>
+          <a:noFill/>
+          <a:ln>
+            <a:noFill/>
+          </a:ln>
+        </p:spPr>
+        <p:txBody>
+          <a:bodyPr anchorCtr="0" anchor="t" bIns="0" lIns="0" spcFirstLastPara="1" rIns="0" wrap="square" tIns="0">
+            <a:spAutoFit/>
+          </a:bodyPr>
+          <a:lstStyle/>
+          <a:p>
+            <a:pPr indent="0" lvl="0" marL="0" marR="0" rtl="0" algn="l">
+              <a:lnSpc>
+                <a:spcPct val="145037"/>
+              </a:lnSpc>
+              <a:spcBef>
+                <a:spcPts val="0"/>
+              </a:spcBef>
+              <a:spcAft>
+                <a:spcPts val="0"/>
+              </a:spcAft>
+              <a:buNone/>
+            </a:pPr>
+            <a:r>
+              <a:rPr sz="960" b="1">
+                <a:solidFill>
+                  <a:srgbClr val="0F172A"/>
+                </a:solidFill>
+                <a:latin typeface="DM Sans"/>
+              </a:rPr>
               <a:t>Procurement Status: </a:t>
             </a:r>
             <a:r>
@@ -22261,7 +25409,7 @@
                 </a:solidFill>
                 <a:latin typeface="DM Sans"/>
               </a:rPr>
-              <a:t>reader parts and pins quoted 19 Oct, in stock in India; the rest are estimates.</a:t>
+              <a:t>reader parts and pins quoted 19 Oct, in stock in India; the rest are estimates. The reader is reused; only the strip is consumed.</a:t>
             </a:r>
             <a:endParaRPr/>
           </a:p>
@@ -22700,7 +25848,7 @@
                           </a:solidFill>
                           <a:latin typeface="DM Sans"/>
                         </a:rPr>
-                        <a:t>ESP32-C3 SuperMini</a:t>
+                        <a:t>ESP32-C3 SuperMini (PRO4607)</a:t>
                       </a:r>
                     </a:p>
                   </a:txBody>
@@ -22838,7 +25986,7 @@
                           </a:solidFill>
                           <a:latin typeface="DM Sans"/>
                         </a:rPr>
-                        <a:t>ADS1115 16-bit ADC</a:t>
+                        <a:t>ADS1115 module (PRO789)</a:t>
                       </a:r>
                     </a:p>
                   </a:txBody>
@@ -22976,7 +26124,7 @@
                           </a:solidFill>
                           <a:latin typeface="DM Sans"/>
                         </a:rPr>
-                        <a:t>P75-B1 pogo pins</a:t>
+                        <a:t>P75-B1 pogo pins (05880)</a:t>
                       </a:r>
                     </a:p>
                   </a:txBody>
@@ -23803,7 +26951,7 @@
 </p:sld>
 </file>
 
-<file path=ppt/slides/slide26.xml><?xml version="1.0" encoding="utf-8"?>
+<file path=ppt/slides/slide27.xml><?xml version="1.0" encoding="utf-8"?>
 <p:sld xmlns:a="http://schemas.openxmlformats.org/drawingml/2006/main" xmlns:p="http://schemas.openxmlformats.org/presentationml/2006/main" xmlns:r="http://schemas.openxmlformats.org/officeDocument/2006/relationships">
   <p:cSld>
     <p:bg>
@@ -24422,7 +27570,7 @@
                 </a:solidFill>
                 <a:latin typeface="DM Sans"/>
               </a:rPr>
-              <a:t>Stage 1's Bluetooth telemetry, now a state broadcast.</a:t>
+              <a:t>Stage 1's Bluetooth telemetry, now a state broadcast (compiled; hardware test pending).</a:t>
             </a:r>
           </a:p>
           <a:p>
@@ -24509,7 +27657,7 @@
 </p:sld>
 </file>
 
-<file path=ppt/slides/slide27.xml><?xml version="1.0" encoding="utf-8"?>
+<file path=ppt/slides/slide28.xml><?xml version="1.0" encoding="utf-8"?>
 <p:sld xmlns:a="http://schemas.openxmlformats.org/drawingml/2006/main" xmlns:p="http://schemas.openxmlformats.org/presentationml/2006/main" xmlns:r="http://schemas.openxmlformats.org/officeDocument/2006/relationships">
   <p:cSld>
     <p:bg>
@@ -25262,7 +28410,7 @@
                 </a:solidFill>
                 <a:latin typeface="DM Sans"/>
               </a:rPr>
-              <a:t>OK → CHANGE live on a dressing at IIT Indore.</a:t>
+              <a:t>working strip + reader: OK → CHANGE live on a dressing, raw data logged.</a:t>
             </a:r>
           </a:p>
         </p:txBody>
@@ -25275,7 +28423,7 @@
 </p:sld>
 </file>
 
-<file path=ppt/slides/slide28.xml><?xml version="1.0" encoding="utf-8"?>
+<file path=ppt/slides/slide29.xml><?xml version="1.0" encoding="utf-8"?>
 <p:sld xmlns:a="http://schemas.openxmlformats.org/drawingml/2006/main" xmlns:p="http://schemas.openxmlformats.org/presentationml/2006/main" xmlns:r="http://schemas.openxmlformats.org/officeDocument/2006/relationships">
   <p:cSld>
     <p:bg>
@@ -28000,7 +31148,7 @@
                 </a:solidFill>
                 <a:latin typeface="DM Sans"/>
               </a:rPr>
-              <a:t>Figure: subsystems; ✓ = verified in software, ◐ = hardware still to prove.</a:t>
+              <a:t>Figure: how a wet pad becomes a state (concept drawing; values calculated, to be measured).</a:t>
             </a:r>
             <a:endParaRPr/>
           </a:p>
@@ -28192,7 +31340,7 @@
       </p:sp>
       <p:pic>
         <p:nvPicPr>
-          <p:cNvPr id="215" name="Picture 214" descr="fig_block.png"/>
+          <p:cNvPr id="215" name="Picture 214" descr="fig_howitworks.png"/>
           <p:cNvPicPr>
             <a:picLocks noChangeAspect="1"/>
           </p:cNvPicPr>
@@ -28223,8 +31371,8 @@
           <p:nvPr/>
         </p:nvGraphicFramePr>
         <p:xfrm>
-          <a:off x="6446520" y="1554480"/>
-          <a:ext cx="5010910" cy="3200400"/>
+          <a:off x="6446520" y="1481328"/>
+          <a:ext cx="5010911" cy="3374136"/>
         </p:xfrm>
         <a:graphic>
           <a:graphicData uri="http://schemas.openxmlformats.org/drawingml/2006/table">
@@ -28233,17 +31381,18 @@
                 <a:tableStyleId>{2D5ABB26-0587-4C30-8999-92F81FD0307C}</a:tableStyleId>
               </a:tblPr>
               <a:tblGrid>
-                <a:gridCol w="1670303"/>
-                <a:gridCol w="3340607"/>
+                <a:gridCol w="1179038"/>
+                <a:gridCol w="2407202"/>
+                <a:gridCol w="1424671"/>
               </a:tblGrid>
-              <a:tr h="457200">
+              <a:tr h="374904">
                 <a:tc>
                   <a:txBody>
                     <a:bodyPr wrap="square"/>
                     <a:lstStyle/>
                     <a:p>
                       <a:r>
-                        <a:rPr sz="950" b="1">
+                        <a:rPr sz="900" b="1">
                           <a:solidFill>
                             <a:srgbClr val="0F172A"/>
                           </a:solidFill>
@@ -28277,7 +31426,7 @@
                     <a:lstStyle/>
                     <a:p>
                       <a:r>
-                        <a:rPr sz="950" b="1">
+                        <a:rPr sz="900" b="1">
                           <a:solidFill>
                             <a:srgbClr val="0F172A"/>
                           </a:solidFill>
@@ -28305,15 +31454,49 @@
                     </a:lnB>
                   </a:tcPr>
                 </a:tc>
-              </a:tr>
-              <a:tr h="457200">
                 <a:tc>
                   <a:txBody>
                     <a:bodyPr wrap="square"/>
                     <a:lstStyle/>
                     <a:p>
                       <a:r>
-                        <a:rPr sz="1050" b="1">
+                        <a:rPr sz="900" b="1">
+                          <a:solidFill>
+                            <a:srgbClr val="0F172A"/>
+                          </a:solidFill>
+                          <a:latin typeface="DM Sans"/>
+                        </a:rPr>
+                        <a:t>Basis</a:t>
+                      </a:r>
+                    </a:p>
+                  </a:txBody>
+                  <a:tcPr marL="36576" marR="36576" marT="22860" marB="18288" anchor="ctr">
+                    <a:noFill/>
+                    <a:lnL w="12700">
+                      <a:noFill/>
+                    </a:lnL>
+                    <a:lnR w="12700">
+                      <a:noFill/>
+                    </a:lnR>
+                    <a:lnT w="12700">
+                      <a:noFill/>
+                    </a:lnT>
+                    <a:lnB w="12700">
+                      <a:solidFill>
+                        <a:srgbClr val="CBD5E1"/>
+                      </a:solidFill>
+                    </a:lnB>
+                  </a:tcPr>
+                </a:tc>
+              </a:tr>
+              <a:tr h="374904">
+                <a:tc>
+                  <a:txBody>
+                    <a:bodyPr wrap="square"/>
+                    <a:lstStyle/>
+                    <a:p>
+                      <a:r>
+                        <a:rPr sz="960" b="1">
                           <a:solidFill>
                             <a:srgbClr val="0F172A"/>
                           </a:solidFill>
@@ -28347,49 +31530,13 @@
                     <a:lstStyle/>
                     <a:p>
                       <a:r>
-                        <a:rPr sz="1050" b="0">
+                        <a:rPr sz="960" b="0">
                           <a:solidFill>
                             <a:srgbClr val="334155"/>
                           </a:solidFill>
                           <a:latin typeface="DM Sans"/>
                         </a:rPr>
-                        <a:t>2: pad centre C, change line A</a:t>
-                      </a:r>
-                    </a:p>
-                  </a:txBody>
-                  <a:tcPr marL="36576" marR="36576" marT="22860" marB="18288" anchor="ctr">
-                    <a:noFill/>
-                    <a:lnL w="7620">
-                      <a:noFill/>
-                    </a:lnL>
-                    <a:lnR w="7620">
-                      <a:noFill/>
-                    </a:lnR>
-                    <a:lnT w="7620">
-                      <a:noFill/>
-                    </a:lnT>
-                    <a:lnB w="7620">
-                      <a:solidFill>
-                        <a:srgbClr val="E2E8F0"/>
-                      </a:solidFill>
-                    </a:lnB>
-                  </a:tcPr>
-                </a:tc>
-              </a:tr>
-              <a:tr h="457200">
-                <a:tc>
-                  <a:txBody>
-                    <a:bodyPr wrap="square"/>
-                    <a:lstStyle/>
-                    <a:p>
-                      <a:r>
-                        <a:rPr sz="1050" b="1">
-                          <a:solidFill>
-                            <a:srgbClr val="0F172A"/>
-                          </a:solidFill>
-                          <a:latin typeface="DM Sans"/>
-                        </a:rPr>
-                        <a:t>Wet / dry</a:t>
+                        <a:t>2: centre C, change line A</a:t>
                       </a:r>
                     </a:p>
                   </a:txBody>
@@ -28417,13 +31564,13 @@
                     <a:lstStyle/>
                     <a:p>
                       <a:r>
-                        <a:rPr sz="1050" b="0">
+                        <a:rPr sz="960" b="0">
                           <a:solidFill>
                             <a:srgbClr val="334155"/>
                           </a:solidFill>
                           <a:latin typeface="DM Sans"/>
                         </a:rPr>
-                        <a:t>&lt; 100 kΩ / &gt; 300 kΩ, 3 scans</a:t>
+                        <a:t>decision D-012</a:t>
                       </a:r>
                     </a:p>
                   </a:txBody>
@@ -28446,20 +31593,20 @@
                   </a:tcPr>
                 </a:tc>
               </a:tr>
-              <a:tr h="457200">
+              <a:tr h="374904">
                 <a:tc>
                   <a:txBody>
                     <a:bodyPr wrap="square"/>
                     <a:lstStyle/>
                     <a:p>
                       <a:r>
-                        <a:rPr sz="1050" b="1">
+                        <a:rPr sz="960" b="1">
                           <a:solidFill>
                             <a:srgbClr val="0F172A"/>
                           </a:solidFill>
                           <a:latin typeface="DM Sans"/>
                         </a:rPr>
-                        <a:t>Drive</a:t>
+                        <a:t>Electrodes</a:t>
                       </a:r>
                     </a:p>
                   </a:txBody>
@@ -28487,49 +31634,13 @@
                     <a:lstStyle/>
                     <a:p>
                       <a:r>
-                        <a:rPr sz="1050" b="0">
+                        <a:rPr sz="960" b="0">
                           <a:solidFill>
                             <a:srgbClr val="334155"/>
                           </a:solidFill>
                           <a:latin typeface="DM Sans"/>
                         </a:rPr>
-                        <a:t>bipolar, ≤ 33 µA, no net DC</a:t>
-                      </a:r>
-                    </a:p>
-                  </a:txBody>
-                  <a:tcPr marL="36576" marR="36576" marT="22860" marB="18288" anchor="ctr">
-                    <a:noFill/>
-                    <a:lnL w="7620">
-                      <a:noFill/>
-                    </a:lnL>
-                    <a:lnR w="7620">
-                      <a:noFill/>
-                    </a:lnR>
-                    <a:lnT w="7620">
-                      <a:noFill/>
-                    </a:lnT>
-                    <a:lnB w="7620">
-                      <a:solidFill>
-                        <a:srgbClr val="E2E8F0"/>
-                      </a:solidFill>
-                    </a:lnB>
-                  </a:tcPr>
-                </a:tc>
-              </a:tr>
-              <a:tr h="457200">
-                <a:tc>
-                  <a:txBody>
-                    <a:bodyPr wrap="square"/>
-                    <a:lstStyle/>
-                    <a:p>
-                      <a:r>
-                        <a:rPr sz="1050" b="1">
-                          <a:solidFill>
-                            <a:srgbClr val="0F172A"/>
-                          </a:solidFill>
-                          <a:latin typeface="DM Sans"/>
-                        </a:rPr>
-                        <a:t>ADC / MCU</a:t>
+                        <a:t>1.0 mm lines and gaps</a:t>
                       </a:r>
                     </a:p>
                   </a:txBody>
@@ -28557,13 +31668,13 @@
                     <a:lstStyle/>
                     <a:p>
                       <a:r>
-                        <a:rPr sz="1050" b="0">
+                        <a:rPr sz="960" b="0">
                           <a:solidFill>
                             <a:srgbClr val="334155"/>
                           </a:solidFill>
                           <a:latin typeface="DM Sans"/>
                         </a:rPr>
-                        <a:t>ADS1115 16-bit (I²C) · ESP32-C3</a:t>
+                        <a:t>E2 confirms</a:t>
                       </a:r>
                     </a:p>
                   </a:txBody>
@@ -28586,20 +31697,20 @@
                   </a:tcPr>
                 </a:tc>
               </a:tr>
-              <a:tr h="457200">
+              <a:tr h="374904">
                 <a:tc>
                   <a:txBody>
                     <a:bodyPr wrap="square"/>
                     <a:lstStyle/>
                     <a:p>
                       <a:r>
-                        <a:rPr sz="1050" b="1">
+                        <a:rPr sz="960" b="1">
                           <a:solidFill>
                             <a:srgbClr val="0F172A"/>
                           </a:solidFill>
                           <a:latin typeface="DM Sans"/>
                         </a:rPr>
-                        <a:t>Contacts</a:t>
+                        <a:t>Wet / dry</a:t>
                       </a:r>
                     </a:p>
                   </a:txBody>
@@ -28627,49 +31738,13 @@
                     <a:lstStyle/>
                     <a:p>
                       <a:r>
-                        <a:rPr sz="1050" b="0">
+                        <a:rPr sz="960" b="0">
                           <a:solidFill>
                             <a:srgbClr val="334155"/>
                           </a:solidFill>
                           <a:latin typeface="DM Sans"/>
                         </a:rPr>
-                        <a:t>4 pogo pins + 2 dowels</a:t>
-                      </a:r>
-                    </a:p>
-                  </a:txBody>
-                  <a:tcPr marL="36576" marR="36576" marT="22860" marB="18288" anchor="ctr">
-                    <a:noFill/>
-                    <a:lnL w="7620">
-                      <a:noFill/>
-                    </a:lnL>
-                    <a:lnR w="7620">
-                      <a:noFill/>
-                    </a:lnR>
-                    <a:lnT w="7620">
-                      <a:noFill/>
-                    </a:lnT>
-                    <a:lnB w="7620">
-                      <a:solidFill>
-                        <a:srgbClr val="E2E8F0"/>
-                      </a:solidFill>
-                    </a:lnB>
-                  </a:tcPr>
-                </a:tc>
-              </a:tr>
-              <a:tr h="457200">
-                <a:tc>
-                  <a:txBody>
-                    <a:bodyPr wrap="square"/>
-                    <a:lstStyle/>
-                    <a:p>
-                      <a:r>
-                        <a:rPr sz="1050" b="1">
-                          <a:solidFill>
-                            <a:srgbClr val="0F172A"/>
-                          </a:solidFill>
-                          <a:latin typeface="DM Sans"/>
-                        </a:rPr>
-                        <a:t>Output</a:t>
+                        <a:t>&lt; 100 kΩ / &gt; 300 kΩ, 3 scans</a:t>
                       </a:r>
                     </a:p>
                   </a:txBody>
@@ -28697,13 +31772,533 @@
                     <a:lstStyle/>
                     <a:p>
                       <a:r>
-                        <a:rPr sz="1050" b="0">
+                        <a:rPr sz="960" b="0">
+                          <a:solidFill>
+                            <a:srgbClr val="334155"/>
+                          </a:solidFill>
+                          <a:latin typeface="DM Sans"/>
+                        </a:rPr>
+                        <a:t>calc: wet 4–15 kΩ</a:t>
+                      </a:r>
+                    </a:p>
+                  </a:txBody>
+                  <a:tcPr marL="36576" marR="36576" marT="22860" marB="18288" anchor="ctr">
+                    <a:noFill/>
+                    <a:lnL w="7620">
+                      <a:noFill/>
+                    </a:lnL>
+                    <a:lnR w="7620">
+                      <a:noFill/>
+                    </a:lnR>
+                    <a:lnT w="7620">
+                      <a:noFill/>
+                    </a:lnT>
+                    <a:lnB w="7620">
+                      <a:solidFill>
+                        <a:srgbClr val="E2E8F0"/>
+                      </a:solidFill>
+                    </a:lnB>
+                  </a:tcPr>
+                </a:tc>
+              </a:tr>
+              <a:tr h="374904">
+                <a:tc>
+                  <a:txBody>
+                    <a:bodyPr wrap="square"/>
+                    <a:lstStyle/>
+                    <a:p>
+                      <a:r>
+                        <a:rPr sz="960" b="1">
+                          <a:solidFill>
+                            <a:srgbClr val="0F172A"/>
+                          </a:solidFill>
+                          <a:latin typeface="DM Sans"/>
+                        </a:rPr>
+                        <a:t>Drive</a:t>
+                      </a:r>
+                    </a:p>
+                  </a:txBody>
+                  <a:tcPr marL="36576" marR="36576" marT="22860" marB="18288" anchor="ctr">
+                    <a:noFill/>
+                    <a:lnL w="7620">
+                      <a:noFill/>
+                    </a:lnL>
+                    <a:lnR w="7620">
+                      <a:noFill/>
+                    </a:lnR>
+                    <a:lnT w="7620">
+                      <a:noFill/>
+                    </a:lnT>
+                    <a:lnB w="7620">
+                      <a:solidFill>
+                        <a:srgbClr val="E2E8F0"/>
+                      </a:solidFill>
+                    </a:lnB>
+                  </a:tcPr>
+                </a:tc>
+                <a:tc>
+                  <a:txBody>
+                    <a:bodyPr wrap="square"/>
+                    <a:lstStyle/>
+                    <a:p>
+                      <a:r>
+                        <a:rPr sz="960" b="0">
+                          <a:solidFill>
+                            <a:srgbClr val="334155"/>
+                          </a:solidFill>
+                          <a:latin typeface="DM Sans"/>
+                        </a:rPr>
+                        <a:t>bipolar, ≤ 33 µA, no net DC</a:t>
+                      </a:r>
+                    </a:p>
+                  </a:txBody>
+                  <a:tcPr marL="36576" marR="36576" marT="22860" marB="18288" anchor="ctr">
+                    <a:noFill/>
+                    <a:lnL w="7620">
+                      <a:noFill/>
+                    </a:lnL>
+                    <a:lnR w="7620">
+                      <a:noFill/>
+                    </a:lnR>
+                    <a:lnT w="7620">
+                      <a:noFill/>
+                    </a:lnT>
+                    <a:lnB w="7620">
+                      <a:solidFill>
+                        <a:srgbClr val="E2E8F0"/>
+                      </a:solidFill>
+                    </a:lnB>
+                  </a:tcPr>
+                </a:tc>
+                <a:tc>
+                  <a:txBody>
+                    <a:bodyPr wrap="square"/>
+                    <a:lstStyle/>
+                    <a:p>
+                      <a:r>
+                        <a:rPr sz="960" b="0">
+                          <a:solidFill>
+                            <a:srgbClr val="334155"/>
+                          </a:solidFill>
+                          <a:latin typeface="DM Sans"/>
+                        </a:rPr>
+                        <a:t>calc · bench T8</a:t>
+                      </a:r>
+                    </a:p>
+                  </a:txBody>
+                  <a:tcPr marL="36576" marR="36576" marT="22860" marB="18288" anchor="ctr">
+                    <a:noFill/>
+                    <a:lnL w="7620">
+                      <a:noFill/>
+                    </a:lnL>
+                    <a:lnR w="7620">
+                      <a:noFill/>
+                    </a:lnR>
+                    <a:lnT w="7620">
+                      <a:noFill/>
+                    </a:lnT>
+                    <a:lnB w="7620">
+                      <a:solidFill>
+                        <a:srgbClr val="E2E8F0"/>
+                      </a:solidFill>
+                    </a:lnB>
+                  </a:tcPr>
+                </a:tc>
+              </a:tr>
+              <a:tr h="374904">
+                <a:tc>
+                  <a:txBody>
+                    <a:bodyPr wrap="square"/>
+                    <a:lstStyle/>
+                    <a:p>
+                      <a:r>
+                        <a:rPr sz="960" b="1">
+                          <a:solidFill>
+                            <a:srgbClr val="0F172A"/>
+                          </a:solidFill>
+                          <a:latin typeface="DM Sans"/>
+                        </a:rPr>
+                        <a:t>ADC / MCU</a:t>
+                      </a:r>
+                    </a:p>
+                  </a:txBody>
+                  <a:tcPr marL="36576" marR="36576" marT="22860" marB="18288" anchor="ctr">
+                    <a:noFill/>
+                    <a:lnL w="7620">
+                      <a:noFill/>
+                    </a:lnL>
+                    <a:lnR w="7620">
+                      <a:noFill/>
+                    </a:lnR>
+                    <a:lnT w="7620">
+                      <a:noFill/>
+                    </a:lnT>
+                    <a:lnB w="7620">
+                      <a:solidFill>
+                        <a:srgbClr val="E2E8F0"/>
+                      </a:solidFill>
+                    </a:lnB>
+                  </a:tcPr>
+                </a:tc>
+                <a:tc>
+                  <a:txBody>
+                    <a:bodyPr wrap="square"/>
+                    <a:lstStyle/>
+                    <a:p>
+                      <a:r>
+                        <a:rPr sz="960" b="0">
+                          <a:solidFill>
+                            <a:srgbClr val="334155"/>
+                          </a:solidFill>
+                          <a:latin typeface="DM Sans"/>
+                        </a:rPr>
+                        <a:t>ADS1115 16-bit (I²C) · ESP32-C3</a:t>
+                      </a:r>
+                    </a:p>
+                  </a:txBody>
+                  <a:tcPr marL="36576" marR="36576" marT="22860" marB="18288" anchor="ctr">
+                    <a:noFill/>
+                    <a:lnL w="7620">
+                      <a:noFill/>
+                    </a:lnL>
+                    <a:lnR w="7620">
+                      <a:noFill/>
+                    </a:lnR>
+                    <a:lnT w="7620">
+                      <a:noFill/>
+                    </a:lnT>
+                    <a:lnB w="7620">
+                      <a:solidFill>
+                        <a:srgbClr val="E2E8F0"/>
+                      </a:solidFill>
+                    </a:lnB>
+                  </a:tcPr>
+                </a:tc>
+                <a:tc>
+                  <a:txBody>
+                    <a:bodyPr wrap="square"/>
+                    <a:lstStyle/>
+                    <a:p>
+                      <a:r>
+                        <a:rPr sz="960" b="0">
+                          <a:solidFill>
+                            <a:srgbClr val="334155"/>
+                          </a:solidFill>
+                          <a:latin typeface="DM Sans"/>
+                        </a:rPr>
+                        <a:t>datasheets</a:t>
+                      </a:r>
+                    </a:p>
+                  </a:txBody>
+                  <a:tcPr marL="36576" marR="36576" marT="22860" marB="18288" anchor="ctr">
+                    <a:noFill/>
+                    <a:lnL w="7620">
+                      <a:noFill/>
+                    </a:lnL>
+                    <a:lnR w="7620">
+                      <a:noFill/>
+                    </a:lnR>
+                    <a:lnT w="7620">
+                      <a:noFill/>
+                    </a:lnT>
+                    <a:lnB w="7620">
+                      <a:solidFill>
+                        <a:srgbClr val="E2E8F0"/>
+                      </a:solidFill>
+                    </a:lnB>
+                  </a:tcPr>
+                </a:tc>
+              </a:tr>
+              <a:tr h="374904">
+                <a:tc>
+                  <a:txBody>
+                    <a:bodyPr wrap="square"/>
+                    <a:lstStyle/>
+                    <a:p>
+                      <a:r>
+                        <a:rPr sz="960" b="1">
+                          <a:solidFill>
+                            <a:srgbClr val="0F172A"/>
+                          </a:solidFill>
+                          <a:latin typeface="DM Sans"/>
+                        </a:rPr>
+                        <a:t>Self-test</a:t>
+                      </a:r>
+                    </a:p>
+                  </a:txBody>
+                  <a:tcPr marL="36576" marR="36576" marT="22860" marB="18288" anchor="ctr">
+                    <a:noFill/>
+                    <a:lnL w="7620">
+                      <a:noFill/>
+                    </a:lnL>
+                    <a:lnR w="7620">
+                      <a:noFill/>
+                    </a:lnR>
+                    <a:lnT w="7620">
+                      <a:noFill/>
+                    </a:lnT>
+                    <a:lnB w="7620">
+                      <a:solidFill>
+                        <a:srgbClr val="E2E8F0"/>
+                      </a:solidFill>
+                    </a:lnB>
+                  </a:tcPr>
+                </a:tc>
+                <a:tc>
+                  <a:txBody>
+                    <a:bodyPr wrap="square"/>
+                    <a:lstStyle/>
+                    <a:p>
+                      <a:r>
+                        <a:rPr sz="960" b="0">
+                          <a:solidFill>
+                            <a:srgbClr val="334155"/>
+                          </a:solidFill>
+                          <a:latin typeface="DM Sans"/>
+                        </a:rPr>
+                        <a:t>100 kΩ check ±5 % + strip loop</a:t>
+                      </a:r>
+                    </a:p>
+                  </a:txBody>
+                  <a:tcPr marL="36576" marR="36576" marT="22860" marB="18288" anchor="ctr">
+                    <a:noFill/>
+                    <a:lnL w="7620">
+                      <a:noFill/>
+                    </a:lnL>
+                    <a:lnR w="7620">
+                      <a:noFill/>
+                    </a:lnR>
+                    <a:lnT w="7620">
+                      <a:noFill/>
+                    </a:lnT>
+                    <a:lnB w="7620">
+                      <a:solidFill>
+                        <a:srgbClr val="E2E8F0"/>
+                      </a:solidFill>
+                    </a:lnB>
+                  </a:tcPr>
+                </a:tc>
+                <a:tc>
+                  <a:txBody>
+                    <a:bodyPr wrap="square"/>
+                    <a:lstStyle/>
+                    <a:p>
+                      <a:r>
+                        <a:rPr sz="960" b="0">
+                          <a:solidFill>
+                            <a:srgbClr val="334155"/>
+                          </a:solidFill>
+                          <a:latin typeface="DM Sans"/>
+                        </a:rPr>
+                        <a:t>else FAULT</a:t>
+                      </a:r>
+                    </a:p>
+                  </a:txBody>
+                  <a:tcPr marL="36576" marR="36576" marT="22860" marB="18288" anchor="ctr">
+                    <a:noFill/>
+                    <a:lnL w="7620">
+                      <a:noFill/>
+                    </a:lnL>
+                    <a:lnR w="7620">
+                      <a:noFill/>
+                    </a:lnR>
+                    <a:lnT w="7620">
+                      <a:noFill/>
+                    </a:lnT>
+                    <a:lnB w="7620">
+                      <a:solidFill>
+                        <a:srgbClr val="E2E8F0"/>
+                      </a:solidFill>
+                    </a:lnB>
+                  </a:tcPr>
+                </a:tc>
+              </a:tr>
+              <a:tr h="374904">
+                <a:tc>
+                  <a:txBody>
+                    <a:bodyPr wrap="square"/>
+                    <a:lstStyle/>
+                    <a:p>
+                      <a:r>
+                        <a:rPr sz="960" b="1">
+                          <a:solidFill>
+                            <a:srgbClr val="0F172A"/>
+                          </a:solidFill>
+                          <a:latin typeface="DM Sans"/>
+                        </a:rPr>
+                        <a:t>Contacts</a:t>
+                      </a:r>
+                    </a:p>
+                  </a:txBody>
+                  <a:tcPr marL="36576" marR="36576" marT="22860" marB="18288" anchor="ctr">
+                    <a:noFill/>
+                    <a:lnL w="7620">
+                      <a:noFill/>
+                    </a:lnL>
+                    <a:lnR w="7620">
+                      <a:noFill/>
+                    </a:lnR>
+                    <a:lnT w="7620">
+                      <a:noFill/>
+                    </a:lnT>
+                    <a:lnB w="7620">
+                      <a:solidFill>
+                        <a:srgbClr val="E2E8F0"/>
+                      </a:solidFill>
+                    </a:lnB>
+                  </a:tcPr>
+                </a:tc>
+                <a:tc>
+                  <a:txBody>
+                    <a:bodyPr wrap="square"/>
+                    <a:lstStyle/>
+                    <a:p>
+                      <a:r>
+                        <a:rPr sz="960" b="0">
+                          <a:solidFill>
+                            <a:srgbClr val="334155"/>
+                          </a:solidFill>
+                          <a:latin typeface="DM Sans"/>
+                        </a:rPr>
+                        <a:t>4 pogo pins + 2 dowels</a:t>
+                      </a:r>
+                    </a:p>
+                  </a:txBody>
+                  <a:tcPr marL="36576" marR="36576" marT="22860" marB="18288" anchor="ctr">
+                    <a:noFill/>
+                    <a:lnL w="7620">
+                      <a:noFill/>
+                    </a:lnL>
+                    <a:lnR w="7620">
+                      <a:noFill/>
+                    </a:lnR>
+                    <a:lnT w="7620">
+                      <a:noFill/>
+                    </a:lnT>
+                    <a:lnB w="7620">
+                      <a:solidFill>
+                        <a:srgbClr val="E2E8F0"/>
+                      </a:solidFill>
+                    </a:lnB>
+                  </a:tcPr>
+                </a:tc>
+                <a:tc>
+                  <a:txBody>
+                    <a:bodyPr wrap="square"/>
+                    <a:lstStyle/>
+                    <a:p>
+                      <a:r>
+                        <a:rPr sz="960" b="0">
+                          <a:solidFill>
+                            <a:srgbClr val="334155"/>
+                          </a:solidFill>
+                          <a:latin typeface="DM Sans"/>
+                        </a:rPr>
+                        <a:t>CAD checked</a:t>
+                      </a:r>
+                    </a:p>
+                  </a:txBody>
+                  <a:tcPr marL="36576" marR="36576" marT="22860" marB="18288" anchor="ctr">
+                    <a:noFill/>
+                    <a:lnL w="7620">
+                      <a:noFill/>
+                    </a:lnL>
+                    <a:lnR w="7620">
+                      <a:noFill/>
+                    </a:lnR>
+                    <a:lnT w="7620">
+                      <a:noFill/>
+                    </a:lnT>
+                    <a:lnB w="7620">
+                      <a:solidFill>
+                        <a:srgbClr val="E2E8F0"/>
+                      </a:solidFill>
+                    </a:lnB>
+                  </a:tcPr>
+                </a:tc>
+              </a:tr>
+              <a:tr h="374904">
+                <a:tc>
+                  <a:txBody>
+                    <a:bodyPr wrap="square"/>
+                    <a:lstStyle/>
+                    <a:p>
+                      <a:r>
+                        <a:rPr sz="960" b="1">
+                          <a:solidFill>
+                            <a:srgbClr val="0F172A"/>
+                          </a:solidFill>
+                          <a:latin typeface="DM Sans"/>
+                        </a:rPr>
+                        <a:t>Output</a:t>
+                      </a:r>
+                    </a:p>
+                  </a:txBody>
+                  <a:tcPr marL="36576" marR="36576" marT="22860" marB="18288" anchor="ctr">
+                    <a:noFill/>
+                    <a:lnL w="7620">
+                      <a:noFill/>
+                    </a:lnL>
+                    <a:lnR w="7620">
+                      <a:noFill/>
+                    </a:lnR>
+                    <a:lnT w="7620">
+                      <a:noFill/>
+                    </a:lnT>
+                    <a:lnB w="7620">
+                      <a:solidFill>
+                        <a:srgbClr val="E2E8F0"/>
+                      </a:solidFill>
+                    </a:lnB>
+                  </a:tcPr>
+                </a:tc>
+                <a:tc>
+                  <a:txBody>
+                    <a:bodyPr wrap="square"/>
+                    <a:lstStyle/>
+                    <a:p>
+                      <a:r>
+                        <a:rPr sz="960" b="0">
                           <a:solidFill>
                             <a:srgbClr val="334155"/>
                           </a:solidFill>
                           <a:latin typeface="DM Sans"/>
                         </a:rPr>
                         <a:t>LEDs · USB log · BLE broadcast</a:t>
+                      </a:r>
+                    </a:p>
+                  </a:txBody>
+                  <a:tcPr marL="36576" marR="36576" marT="22860" marB="18288" anchor="ctr">
+                    <a:noFill/>
+                    <a:lnL w="7620">
+                      <a:noFill/>
+                    </a:lnL>
+                    <a:lnR w="7620">
+                      <a:noFill/>
+                    </a:lnR>
+                    <a:lnT w="7620">
+                      <a:noFill/>
+                    </a:lnT>
+                    <a:lnB w="7620">
+                      <a:solidFill>
+                        <a:srgbClr val="E2E8F0"/>
+                      </a:solidFill>
+                    </a:lnB>
+                  </a:tcPr>
+                </a:tc>
+                <a:tc>
+                  <a:txBody>
+                    <a:bodyPr wrap="square"/>
+                    <a:lstStyle/>
+                    <a:p>
+                      <a:r>
+                        <a:rPr sz="960" b="0">
+                          <a:solidFill>
+                            <a:srgbClr val="334155"/>
+                          </a:solidFill>
+                          <a:latin typeface="DM Sans"/>
+                        </a:rPr>
+                        <a:t>BLE compiled only</a:t>
                       </a:r>
                     </a:p>
                   </a:txBody>
@@ -28973,7 +32568,7 @@
                 </a:solidFill>
                 <a:latin typeface="DM Sans"/>
               </a:rPr>
-              <a:t>a clash check moved the seal tape off the clamp (decision D-013).</a:t>
+              <a:t>a clash check found the seal tape trapped under the clamp (9.0 mm³); moved to x = 23 mm, now 0 clash (decision D-013).</a:t>
             </a:r>
             <a:endParaRPr/>
           </a:p>
@@ -29023,7 +32618,7 @@
                 </a:solidFill>
                 <a:latin typeface="DM Sans"/>
               </a:rPr>
-              <a:t>Figure: our SolidWorks 2019 models: exploded stack, clamp, drawing, assembly.</a:t>
+              <a:t>Figure: our SolidWorks 2019 models (9 parts, 1 assembly, 7 A3 drawings, STEP); not yet built.</a:t>
             </a:r>
             <a:endParaRPr/>
           </a:p>
@@ -29097,7 +32692,7 @@
                 </a:solidFill>
                 <a:latin typeface="DM Sans"/>
               </a:rPr>
-              <a:t>Materials &amp; Mechanical Checks</a:t>
+              <a:t>A clip-on clamp: 4 spring pins, 2 dowels</a:t>
             </a:r>
             <a:endParaRPr/>
           </a:p>
@@ -29237,212 +32832,865 @@
           </a:prstGeom>
         </p:spPr>
       </p:pic>
-      <p:sp>
-        <p:nvSpPr>
-          <p:cNvPr id="259" name="TextBox 258"/>
-          <p:cNvSpPr txBox="1"/>
-          <p:nvPr/>
-        </p:nvSpPr>
-        <p:spPr>
-          <a:xfrm>
-            <a:off x="6464808" y="1572768"/>
-            <a:ext cx="5029200" cy="3657600"/>
-          </a:xfrm>
-          <a:prstGeom prst="rect">
-            <a:avLst/>
-          </a:prstGeom>
-          <a:noFill/>
-        </p:spPr>
-        <p:txBody>
-          <a:bodyPr wrap="square" lIns="18288" rIns="18288" tIns="9144" bIns="9144" anchor="t"/>
-          <a:lstStyle/>
-          <a:p>
-            <a:pPr>
-              <a:lnSpc>
-                <a:spcPct val="108000"/>
-              </a:lnSpc>
-              <a:spcAft>
-                <a:spcPts val="1400"/>
-              </a:spcAft>
-            </a:pPr>
-            <a:r>
-              <a:rPr sz="1200" b="0">
-                <a:solidFill>
-                  <a:srgbClr val="059669"/>
-                </a:solidFill>
-                <a:latin typeface="DM Sans"/>
-              </a:rPr>
-              <a:t>▪  </a:t>
-            </a:r>
-            <a:r>
-              <a:rPr sz="1200" b="1">
-                <a:solidFill>
-                  <a:srgbClr val="0F172A"/>
-                </a:solidFill>
-                <a:latin typeface="DM Sans"/>
-              </a:rPr>
-              <a:t>Materials:  </a:t>
-            </a:r>
-            <a:r>
-              <a:rPr sz="1200" b="0">
-                <a:solidFill>
-                  <a:srgbClr val="334155"/>
-                </a:solidFill>
-                <a:latin typeface="DM Sans"/>
-              </a:rPr>
-              <a:t>polyimide strip · PETG clamp · acrylic rig.</a:t>
-            </a:r>
-          </a:p>
-          <a:p>
-            <a:pPr>
-              <a:lnSpc>
-                <a:spcPct val="108000"/>
-              </a:lnSpc>
-              <a:spcAft>
-                <a:spcPts val="1400"/>
-              </a:spcAft>
-            </a:pPr>
-            <a:r>
-              <a:rPr sz="1200" b="0">
-                <a:solidFill>
-                  <a:srgbClr val="059669"/>
-                </a:solidFill>
-                <a:latin typeface="DM Sans"/>
-              </a:rPr>
-              <a:t>▪  </a:t>
-            </a:r>
-            <a:r>
-              <a:rPr sz="1200" b="1">
-                <a:solidFill>
-                  <a:srgbClr val="0F172A"/>
-                </a:solidFill>
-                <a:latin typeface="DM Sans"/>
-              </a:rPr>
-              <a:t>Contact:  </a:t>
-            </a:r>
-            <a:r>
-              <a:rPr sz="1200" b="0">
-                <a:solidFill>
-                  <a:srgbClr val="334155"/>
-                </a:solidFill>
-                <a:latin typeface="DM Sans"/>
-              </a:rPr>
-              <a:t>4 pogo pins, 0.72 N each (calculated).</a:t>
-            </a:r>
-          </a:p>
-          <a:p>
-            <a:pPr>
-              <a:lnSpc>
-                <a:spcPct val="108000"/>
-              </a:lnSpc>
-              <a:spcAft>
-                <a:spcPts val="1400"/>
-              </a:spcAft>
-            </a:pPr>
-            <a:r>
-              <a:rPr sz="1200" b="0">
-                <a:solidFill>
-                  <a:srgbClr val="059669"/>
-                </a:solidFill>
-                <a:latin typeface="DM Sans"/>
-              </a:rPr>
-              <a:t>▪  </a:t>
-            </a:r>
-            <a:r>
-              <a:rPr sz="1200" b="1">
-                <a:solidFill>
-                  <a:srgbClr val="0F172A"/>
-                </a:solidFill>
-                <a:latin typeface="DM Sans"/>
-              </a:rPr>
-              <a:t>Alignment:  </a:t>
-            </a:r>
-            <a:r>
-              <a:rPr sz="1200" b="0">
-                <a:solidFill>
-                  <a:srgbClr val="334155"/>
-                </a:solidFill>
-                <a:latin typeface="DM Sans"/>
-              </a:rPr>
-              <a:t>2.8× tolerance margin on 3 mm pads.</a:t>
-            </a:r>
-          </a:p>
-          <a:p>
-            <a:pPr>
-              <a:lnSpc>
-                <a:spcPct val="108000"/>
-              </a:lnSpc>
-              <a:spcAft>
-                <a:spcPts val="1400"/>
-              </a:spcAft>
-            </a:pPr>
-            <a:r>
-              <a:rPr sz="1200" b="0">
-                <a:solidFill>
-                  <a:srgbClr val="059669"/>
-                </a:solidFill>
-                <a:latin typeface="DM Sans"/>
-              </a:rPr>
-              <a:t>▪  </a:t>
-            </a:r>
-            <a:r>
-              <a:rPr sz="1200" b="1">
-                <a:solidFill>
-                  <a:srgbClr val="0F172A"/>
-                </a:solidFill>
-                <a:latin typeface="DM Sans"/>
-              </a:rPr>
-              <a:t>Verified:  </a:t>
-            </a:r>
-            <a:r>
-              <a:rPr sz="1200" b="0">
-                <a:solidFill>
-                  <a:srgbClr val="334155"/>
-                </a:solidFill>
-                <a:latin typeface="DM Sans"/>
-              </a:rPr>
-              <a:t>99 automated CAD checks pass, 0 fail.</a:t>
-            </a:r>
-          </a:p>
-          <a:p>
-            <a:pPr>
-              <a:lnSpc>
-                <a:spcPct val="108000"/>
-              </a:lnSpc>
-              <a:spcAft>
-                <a:spcPts val="1400"/>
-              </a:spcAft>
-            </a:pPr>
-            <a:r>
-              <a:rPr sz="1200" b="0">
-                <a:solidFill>
-                  <a:srgbClr val="059669"/>
-                </a:solidFill>
-                <a:latin typeface="DM Sans"/>
-              </a:rPr>
-              <a:t>▪  </a:t>
-            </a:r>
-            <a:r>
-              <a:rPr sz="1200" b="1">
-                <a:solidFill>
-                  <a:srgbClr val="0F172A"/>
-                </a:solidFill>
-                <a:latin typeface="DM Sans"/>
-              </a:rPr>
-              <a:t>Provisional:  </a:t>
-            </a:r>
-            <a:r>
-              <a:rPr sz="1200" b="0">
-                <a:solidFill>
-                  <a:srgbClr val="334155"/>
-                </a:solidFill>
-                <a:latin typeface="DM Sans"/>
-              </a:rPr>
-              <a:t>strip sizes wait for E2 laser data.</a:t>
-            </a:r>
-          </a:p>
-        </p:txBody>
-      </p:sp>
+      <p:graphicFrame>
+        <p:nvGraphicFramePr>
+          <p:cNvPr id="259" name="Table 258"/>
+          <p:cNvGraphicFramePr>
+            <a:graphicFrameLocks noGrp="1"/>
+          </p:cNvGraphicFramePr>
+          <p:nvPr/>
+        </p:nvGraphicFramePr>
+        <p:xfrm>
+          <a:off x="6446520" y="1517904"/>
+          <a:ext cx="5010910" cy="3291840"/>
+        </p:xfrm>
+        <a:graphic>
+          <a:graphicData uri="http://schemas.openxmlformats.org/drawingml/2006/table">
+            <a:tbl>
+              <a:tblPr firstRow="0" bandRow="0">
+                <a:tableStyleId>{2D5ABB26-0587-4C30-8999-92F81FD0307C}</a:tableStyleId>
+              </a:tblPr>
+              <a:tblGrid>
+                <a:gridCol w="1129911"/>
+                <a:gridCol w="2554582"/>
+                <a:gridCol w="1326417"/>
+              </a:tblGrid>
+              <a:tr h="411480">
+                <a:tc>
+                  <a:txBody>
+                    <a:bodyPr wrap="square"/>
+                    <a:lstStyle/>
+                    <a:p>
+                      <a:r>
+                        <a:rPr sz="900" b="1">
+                          <a:solidFill>
+                            <a:srgbClr val="0F172A"/>
+                          </a:solidFill>
+                          <a:latin typeface="DM Sans"/>
+                        </a:rPr>
+                        <a:t>Check</a:t>
+                      </a:r>
+                    </a:p>
+                  </a:txBody>
+                  <a:tcPr marL="36576" marR="36576" marT="22860" marB="18288" anchor="ctr">
+                    <a:noFill/>
+                    <a:lnL w="12700">
+                      <a:noFill/>
+                    </a:lnL>
+                    <a:lnR w="12700">
+                      <a:noFill/>
+                    </a:lnR>
+                    <a:lnT w="12700">
+                      <a:noFill/>
+                    </a:lnT>
+                    <a:lnB w="12700">
+                      <a:solidFill>
+                        <a:srgbClr val="CBD5E1"/>
+                      </a:solidFill>
+                    </a:lnB>
+                  </a:tcPr>
+                </a:tc>
+                <a:tc>
+                  <a:txBody>
+                    <a:bodyPr wrap="square"/>
+                    <a:lstStyle/>
+                    <a:p>
+                      <a:r>
+                        <a:rPr sz="900" b="1">
+                          <a:solidFill>
+                            <a:srgbClr val="0F172A"/>
+                          </a:solidFill>
+                          <a:latin typeface="DM Sans"/>
+                        </a:rPr>
+                        <a:t>Result</a:t>
+                      </a:r>
+                    </a:p>
+                  </a:txBody>
+                  <a:tcPr marL="36576" marR="36576" marT="22860" marB="18288" anchor="ctr">
+                    <a:noFill/>
+                    <a:lnL w="12700">
+                      <a:noFill/>
+                    </a:lnL>
+                    <a:lnR w="12700">
+                      <a:noFill/>
+                    </a:lnR>
+                    <a:lnT w="12700">
+                      <a:noFill/>
+                    </a:lnT>
+                    <a:lnB w="12700">
+                      <a:solidFill>
+                        <a:srgbClr val="CBD5E1"/>
+                      </a:solidFill>
+                    </a:lnB>
+                  </a:tcPr>
+                </a:tc>
+                <a:tc>
+                  <a:txBody>
+                    <a:bodyPr wrap="square"/>
+                    <a:lstStyle/>
+                    <a:p>
+                      <a:r>
+                        <a:rPr sz="900" b="1">
+                          <a:solidFill>
+                            <a:srgbClr val="0F172A"/>
+                          </a:solidFill>
+                          <a:latin typeface="DM Sans"/>
+                        </a:rPr>
+                        <a:t>Basis</a:t>
+                      </a:r>
+                    </a:p>
+                  </a:txBody>
+                  <a:tcPr marL="36576" marR="36576" marT="22860" marB="18288" anchor="ctr">
+                    <a:noFill/>
+                    <a:lnL w="12700">
+                      <a:noFill/>
+                    </a:lnL>
+                    <a:lnR w="12700">
+                      <a:noFill/>
+                    </a:lnR>
+                    <a:lnT w="12700">
+                      <a:noFill/>
+                    </a:lnT>
+                    <a:lnB w="12700">
+                      <a:solidFill>
+                        <a:srgbClr val="CBD5E1"/>
+                      </a:solidFill>
+                    </a:lnB>
+                  </a:tcPr>
+                </a:tc>
+              </a:tr>
+              <a:tr h="411480">
+                <a:tc>
+                  <a:txBody>
+                    <a:bodyPr wrap="square"/>
+                    <a:lstStyle/>
+                    <a:p>
+                      <a:r>
+                        <a:rPr sz="980" b="1">
+                          <a:solidFill>
+                            <a:srgbClr val="0F172A"/>
+                          </a:solidFill>
+                          <a:latin typeface="DM Sans"/>
+                        </a:rPr>
+                        <a:t>Materials</a:t>
+                      </a:r>
+                    </a:p>
+                  </a:txBody>
+                  <a:tcPr marL="36576" marR="36576" marT="22860" marB="18288" anchor="ctr">
+                    <a:noFill/>
+                    <a:lnL w="7620">
+                      <a:noFill/>
+                    </a:lnL>
+                    <a:lnR w="7620">
+                      <a:noFill/>
+                    </a:lnR>
+                    <a:lnT w="7620">
+                      <a:noFill/>
+                    </a:lnT>
+                    <a:lnB w="7620">
+                      <a:solidFill>
+                        <a:srgbClr val="E2E8F0"/>
+                      </a:solidFill>
+                    </a:lnB>
+                  </a:tcPr>
+                </a:tc>
+                <a:tc>
+                  <a:txBody>
+                    <a:bodyPr wrap="square"/>
+                    <a:lstStyle/>
+                    <a:p>
+                      <a:r>
+                        <a:rPr sz="980" b="0">
+                          <a:solidFill>
+                            <a:srgbClr val="334155"/>
+                          </a:solidFill>
+                          <a:latin typeface="DM Sans"/>
+                        </a:rPr>
+                        <a:t>polyimide strip · PETG clamp · acrylic rig</a:t>
+                      </a:r>
+                    </a:p>
+                  </a:txBody>
+                  <a:tcPr marL="36576" marR="36576" marT="22860" marB="18288" anchor="ctr">
+                    <a:noFill/>
+                    <a:lnL w="7620">
+                      <a:noFill/>
+                    </a:lnL>
+                    <a:lnR w="7620">
+                      <a:noFill/>
+                    </a:lnR>
+                    <a:lnT w="7620">
+                      <a:noFill/>
+                    </a:lnT>
+                    <a:lnB w="7620">
+                      <a:solidFill>
+                        <a:srgbClr val="E2E8F0"/>
+                      </a:solidFill>
+                    </a:lnB>
+                  </a:tcPr>
+                </a:tc>
+                <a:tc>
+                  <a:txBody>
+                    <a:bodyPr wrap="square"/>
+                    <a:lstStyle/>
+                    <a:p>
+                      <a:r>
+                        <a:rPr sz="980" b="0">
+                          <a:solidFill>
+                            <a:srgbClr val="334155"/>
+                          </a:solidFill>
+                          <a:latin typeface="DM Sans"/>
+                        </a:rPr>
+                        <a:t>printable, laser-cut</a:t>
+                      </a:r>
+                    </a:p>
+                  </a:txBody>
+                  <a:tcPr marL="36576" marR="36576" marT="22860" marB="18288" anchor="ctr">
+                    <a:noFill/>
+                    <a:lnL w="7620">
+                      <a:noFill/>
+                    </a:lnL>
+                    <a:lnR w="7620">
+                      <a:noFill/>
+                    </a:lnR>
+                    <a:lnT w="7620">
+                      <a:noFill/>
+                    </a:lnT>
+                    <a:lnB w="7620">
+                      <a:solidFill>
+                        <a:srgbClr val="E2E8F0"/>
+                      </a:solidFill>
+                    </a:lnB>
+                  </a:tcPr>
+                </a:tc>
+              </a:tr>
+              <a:tr h="411480">
+                <a:tc>
+                  <a:txBody>
+                    <a:bodyPr wrap="square"/>
+                    <a:lstStyle/>
+                    <a:p>
+                      <a:r>
+                        <a:rPr sz="980" b="1">
+                          <a:solidFill>
+                            <a:srgbClr val="0F172A"/>
+                          </a:solidFill>
+                          <a:latin typeface="DM Sans"/>
+                        </a:rPr>
+                        <a:t>Pin force</a:t>
+                      </a:r>
+                    </a:p>
+                  </a:txBody>
+                  <a:tcPr marL="36576" marR="36576" marT="22860" marB="18288" anchor="ctr">
+                    <a:noFill/>
+                    <a:lnL w="7620">
+                      <a:noFill/>
+                    </a:lnL>
+                    <a:lnR w="7620">
+                      <a:noFill/>
+                    </a:lnR>
+                    <a:lnT w="7620">
+                      <a:noFill/>
+                    </a:lnT>
+                    <a:lnB w="7620">
+                      <a:solidFill>
+                        <a:srgbClr val="E2E8F0"/>
+                      </a:solidFill>
+                    </a:lnB>
+                  </a:tcPr>
+                </a:tc>
+                <a:tc>
+                  <a:txBody>
+                    <a:bodyPr wrap="square"/>
+                    <a:lstStyle/>
+                    <a:p>
+                      <a:r>
+                        <a:rPr sz="980" b="0">
+                          <a:solidFill>
+                            <a:srgbClr val="334155"/>
+                          </a:solidFill>
+                          <a:latin typeface="DM Sans"/>
+                        </a:rPr>
+                        <a:t>0.72 N each · 2.9 N total</a:t>
+                      </a:r>
+                    </a:p>
+                  </a:txBody>
+                  <a:tcPr marL="36576" marR="36576" marT="22860" marB="18288" anchor="ctr">
+                    <a:noFill/>
+                    <a:lnL w="7620">
+                      <a:noFill/>
+                    </a:lnL>
+                    <a:lnR w="7620">
+                      <a:noFill/>
+                    </a:lnR>
+                    <a:lnT w="7620">
+                      <a:noFill/>
+                    </a:lnT>
+                    <a:lnB w="7620">
+                      <a:solidFill>
+                        <a:srgbClr val="E2E8F0"/>
+                      </a:solidFill>
+                    </a:lnB>
+                  </a:tcPr>
+                </a:tc>
+                <a:tc>
+                  <a:txBody>
+                    <a:bodyPr wrap="square"/>
+                    <a:lstStyle/>
+                    <a:p>
+                      <a:r>
+                        <a:rPr sz="980" b="0">
+                          <a:solidFill>
+                            <a:srgbClr val="334155"/>
+                          </a:solidFill>
+                          <a:latin typeface="DM Sans"/>
+                        </a:rPr>
+                        <a:t>calc</a:t>
+                      </a:r>
+                    </a:p>
+                  </a:txBody>
+                  <a:tcPr marL="36576" marR="36576" marT="22860" marB="18288" anchor="ctr">
+                    <a:noFill/>
+                    <a:lnL w="7620">
+                      <a:noFill/>
+                    </a:lnL>
+                    <a:lnR w="7620">
+                      <a:noFill/>
+                    </a:lnR>
+                    <a:lnT w="7620">
+                      <a:noFill/>
+                    </a:lnT>
+                    <a:lnB w="7620">
+                      <a:solidFill>
+                        <a:srgbClr val="E2E8F0"/>
+                      </a:solidFill>
+                    </a:lnB>
+                  </a:tcPr>
+                </a:tc>
+              </a:tr>
+              <a:tr h="411480">
+                <a:tc>
+                  <a:txBody>
+                    <a:bodyPr wrap="square"/>
+                    <a:lstStyle/>
+                    <a:p>
+                      <a:r>
+                        <a:rPr sz="980" b="1">
+                          <a:solidFill>
+                            <a:srgbClr val="0F172A"/>
+                          </a:solidFill>
+                          <a:latin typeface="DM Sans"/>
+                        </a:rPr>
+                        <a:t>Lid bending</a:t>
+                      </a:r>
+                    </a:p>
+                  </a:txBody>
+                  <a:tcPr marL="36576" marR="36576" marT="22860" marB="18288" anchor="ctr">
+                    <a:noFill/>
+                    <a:lnL w="7620">
+                      <a:noFill/>
+                    </a:lnL>
+                    <a:lnR w="7620">
+                      <a:noFill/>
+                    </a:lnR>
+                    <a:lnT w="7620">
+                      <a:noFill/>
+                    </a:lnT>
+                    <a:lnB w="7620">
+                      <a:solidFill>
+                        <a:srgbClr val="E2E8F0"/>
+                      </a:solidFill>
+                    </a:lnB>
+                  </a:tcPr>
+                </a:tc>
+                <a:tc>
+                  <a:txBody>
+                    <a:bodyPr wrap="square"/>
+                    <a:lstStyle/>
+                    <a:p>
+                      <a:r>
+                        <a:rPr sz="980" b="0">
+                          <a:solidFill>
+                            <a:srgbClr val="334155"/>
+                          </a:solidFill>
+                          <a:latin typeface="DM Sans"/>
+                        </a:rPr>
+                        <a:t>11 µm vs 1.48 mm pin travel</a:t>
+                      </a:r>
+                    </a:p>
+                  </a:txBody>
+                  <a:tcPr marL="36576" marR="36576" marT="22860" marB="18288" anchor="ctr">
+                    <a:noFill/>
+                    <a:lnL w="7620">
+                      <a:noFill/>
+                    </a:lnL>
+                    <a:lnR w="7620">
+                      <a:noFill/>
+                    </a:lnR>
+                    <a:lnT w="7620">
+                      <a:noFill/>
+                    </a:lnT>
+                    <a:lnB w="7620">
+                      <a:solidFill>
+                        <a:srgbClr val="E2E8F0"/>
+                      </a:solidFill>
+                    </a:lnB>
+                  </a:tcPr>
+                </a:tc>
+                <a:tc>
+                  <a:txBody>
+                    <a:bodyPr wrap="square"/>
+                    <a:lstStyle/>
+                    <a:p>
+                      <a:r>
+                        <a:rPr sz="980" b="0">
+                          <a:solidFill>
+                            <a:srgbClr val="334155"/>
+                          </a:solidFill>
+                          <a:latin typeface="DM Sans"/>
+                        </a:rPr>
+                        <a:t>calc</a:t>
+                      </a:r>
+                    </a:p>
+                  </a:txBody>
+                  <a:tcPr marL="36576" marR="36576" marT="22860" marB="18288" anchor="ctr">
+                    <a:noFill/>
+                    <a:lnL w="7620">
+                      <a:noFill/>
+                    </a:lnL>
+                    <a:lnR w="7620">
+                      <a:noFill/>
+                    </a:lnR>
+                    <a:lnT w="7620">
+                      <a:noFill/>
+                    </a:lnT>
+                    <a:lnB w="7620">
+                      <a:solidFill>
+                        <a:srgbClr val="E2E8F0"/>
+                      </a:solidFill>
+                    </a:lnB>
+                  </a:tcPr>
+                </a:tc>
+              </a:tr>
+              <a:tr h="411480">
+                <a:tc>
+                  <a:txBody>
+                    <a:bodyPr wrap="square"/>
+                    <a:lstStyle/>
+                    <a:p>
+                      <a:r>
+                        <a:rPr sz="980" b="1">
+                          <a:solidFill>
+                            <a:srgbClr val="0F172A"/>
+                          </a:solidFill>
+                          <a:latin typeface="DM Sans"/>
+                        </a:rPr>
+                        <a:t>Alignment</a:t>
+                      </a:r>
+                    </a:p>
+                  </a:txBody>
+                  <a:tcPr marL="36576" marR="36576" marT="22860" marB="18288" anchor="ctr">
+                    <a:noFill/>
+                    <a:lnL w="7620">
+                      <a:noFill/>
+                    </a:lnL>
+                    <a:lnR w="7620">
+                      <a:noFill/>
+                    </a:lnR>
+                    <a:lnT w="7620">
+                      <a:noFill/>
+                    </a:lnT>
+                    <a:lnB w="7620">
+                      <a:solidFill>
+                        <a:srgbClr val="E2E8F0"/>
+                      </a:solidFill>
+                    </a:lnB>
+                  </a:tcPr>
+                </a:tc>
+                <a:tc>
+                  <a:txBody>
+                    <a:bodyPr wrap="square"/>
+                    <a:lstStyle/>
+                    <a:p>
+                      <a:r>
+                        <a:rPr sz="980" b="0">
+                          <a:solidFill>
+                            <a:srgbClr val="334155"/>
+                          </a:solidFill>
+                          <a:latin typeface="DM Sans"/>
+                        </a:rPr>
+                        <a:t>0.49 mm used of ±1.35 mm</a:t>
+                      </a:r>
+                    </a:p>
+                  </a:txBody>
+                  <a:tcPr marL="36576" marR="36576" marT="22860" marB="18288" anchor="ctr">
+                    <a:noFill/>
+                    <a:lnL w="7620">
+                      <a:noFill/>
+                    </a:lnL>
+                    <a:lnR w="7620">
+                      <a:noFill/>
+                    </a:lnR>
+                    <a:lnT w="7620">
+                      <a:noFill/>
+                    </a:lnT>
+                    <a:lnB w="7620">
+                      <a:solidFill>
+                        <a:srgbClr val="E2E8F0"/>
+                      </a:solidFill>
+                    </a:lnB>
+                  </a:tcPr>
+                </a:tc>
+                <a:tc>
+                  <a:txBody>
+                    <a:bodyPr wrap="square"/>
+                    <a:lstStyle/>
+                    <a:p>
+                      <a:r>
+                        <a:rPr sz="980" b="0">
+                          <a:solidFill>
+                            <a:srgbClr val="334155"/>
+                          </a:solidFill>
+                          <a:latin typeface="DM Sans"/>
+                        </a:rPr>
+                        <a:t>calc · 2.8× margin</a:t>
+                      </a:r>
+                    </a:p>
+                  </a:txBody>
+                  <a:tcPr marL="36576" marR="36576" marT="22860" marB="18288" anchor="ctr">
+                    <a:noFill/>
+                    <a:lnL w="7620">
+                      <a:noFill/>
+                    </a:lnL>
+                    <a:lnR w="7620">
+                      <a:noFill/>
+                    </a:lnR>
+                    <a:lnT w="7620">
+                      <a:noFill/>
+                    </a:lnT>
+                    <a:lnB w="7620">
+                      <a:solidFill>
+                        <a:srgbClr val="E2E8F0"/>
+                      </a:solidFill>
+                    </a:lnB>
+                  </a:tcPr>
+                </a:tc>
+              </a:tr>
+              <a:tr h="411480">
+                <a:tc>
+                  <a:txBody>
+                    <a:bodyPr wrap="square"/>
+                    <a:lstStyle/>
+                    <a:p>
+                      <a:r>
+                        <a:rPr sz="980" b="1">
+                          <a:solidFill>
+                            <a:srgbClr val="0F172A"/>
+                          </a:solidFill>
+                          <a:latin typeface="DM Sans"/>
+                        </a:rPr>
+                        <a:t>Strip bending</a:t>
+                      </a:r>
+                    </a:p>
+                  </a:txBody>
+                  <a:tcPr marL="36576" marR="36576" marT="22860" marB="18288" anchor="ctr">
+                    <a:noFill/>
+                    <a:lnL w="7620">
+                      <a:noFill/>
+                    </a:lnL>
+                    <a:lnR w="7620">
+                      <a:noFill/>
+                    </a:lnR>
+                    <a:lnT w="7620">
+                      <a:noFill/>
+                    </a:lnT>
+                    <a:lnB w="7620">
+                      <a:solidFill>
+                        <a:srgbClr val="E2E8F0"/>
+                      </a:solidFill>
+                    </a:lnB>
+                  </a:tcPr>
+                </a:tc>
+                <a:tc>
+                  <a:txBody>
+                    <a:bodyPr wrap="square"/>
+                    <a:lstStyle/>
+                    <a:p>
+                      <a:r>
+                        <a:rPr sz="980" b="0">
+                          <a:solidFill>
+                            <a:srgbClr val="334155"/>
+                          </a:solidFill>
+                          <a:latin typeface="DM Sans"/>
+                        </a:rPr>
+                        <a:t>0.62 % strain at 10 mm radius</a:t>
+                      </a:r>
+                    </a:p>
+                  </a:txBody>
+                  <a:tcPr marL="36576" marR="36576" marT="22860" marB="18288" anchor="ctr">
+                    <a:noFill/>
+                    <a:lnL w="7620">
+                      <a:noFill/>
+                    </a:lnL>
+                    <a:lnR w="7620">
+                      <a:noFill/>
+                    </a:lnR>
+                    <a:lnT w="7620">
+                      <a:noFill/>
+                    </a:lnT>
+                    <a:lnB w="7620">
+                      <a:solidFill>
+                        <a:srgbClr val="E2E8F0"/>
+                      </a:solidFill>
+                    </a:lnB>
+                  </a:tcPr>
+                </a:tc>
+                <a:tc>
+                  <a:txBody>
+                    <a:bodyPr wrap="square"/>
+                    <a:lstStyle/>
+                    <a:p>
+                      <a:r>
+                        <a:rPr sz="980" b="0">
+                          <a:solidFill>
+                            <a:srgbClr val="334155"/>
+                          </a:solidFill>
+                          <a:latin typeface="DM Sans"/>
+                        </a:rPr>
+                        <a:t>calc · yield ≈ 3 %</a:t>
+                      </a:r>
+                    </a:p>
+                  </a:txBody>
+                  <a:tcPr marL="36576" marR="36576" marT="22860" marB="18288" anchor="ctr">
+                    <a:noFill/>
+                    <a:lnL w="7620">
+                      <a:noFill/>
+                    </a:lnL>
+                    <a:lnR w="7620">
+                      <a:noFill/>
+                    </a:lnR>
+                    <a:lnT w="7620">
+                      <a:noFill/>
+                    </a:lnT>
+                    <a:lnB w="7620">
+                      <a:solidFill>
+                        <a:srgbClr val="E2E8F0"/>
+                      </a:solidFill>
+                    </a:lnB>
+                  </a:tcPr>
+                </a:tc>
+              </a:tr>
+              <a:tr h="411480">
+                <a:tc>
+                  <a:txBody>
+                    <a:bodyPr wrap="square"/>
+                    <a:lstStyle/>
+                    <a:p>
+                      <a:r>
+                        <a:rPr sz="980" b="1">
+                          <a:solidFill>
+                            <a:srgbClr val="0F172A"/>
+                          </a:solidFill>
+                          <a:latin typeface="DM Sans"/>
+                        </a:rPr>
+                        <a:t>CAD checks</a:t>
+                      </a:r>
+                    </a:p>
+                  </a:txBody>
+                  <a:tcPr marL="36576" marR="36576" marT="22860" marB="18288" anchor="ctr">
+                    <a:noFill/>
+                    <a:lnL w="7620">
+                      <a:noFill/>
+                    </a:lnL>
+                    <a:lnR w="7620">
+                      <a:noFill/>
+                    </a:lnR>
+                    <a:lnT w="7620">
+                      <a:noFill/>
+                    </a:lnT>
+                    <a:lnB w="7620">
+                      <a:solidFill>
+                        <a:srgbClr val="E2E8F0"/>
+                      </a:solidFill>
+                    </a:lnB>
+                  </a:tcPr>
+                </a:tc>
+                <a:tc>
+                  <a:txBody>
+                    <a:bodyPr wrap="square"/>
+                    <a:lstStyle/>
+                    <a:p>
+                      <a:r>
+                        <a:rPr sz="980" b="0">
+                          <a:solidFill>
+                            <a:srgbClr val="334155"/>
+                          </a:solidFill>
+                          <a:latin typeface="DM Sans"/>
+                        </a:rPr>
+                        <a:t>99 pass · 0 fail · 5 wait for E2</a:t>
+                      </a:r>
+                    </a:p>
+                  </a:txBody>
+                  <a:tcPr marL="36576" marR="36576" marT="22860" marB="18288" anchor="ctr">
+                    <a:noFill/>
+                    <a:lnL w="7620">
+                      <a:noFill/>
+                    </a:lnL>
+                    <a:lnR w="7620">
+                      <a:noFill/>
+                    </a:lnR>
+                    <a:lnT w="7620">
+                      <a:noFill/>
+                    </a:lnT>
+                    <a:lnB w="7620">
+                      <a:solidFill>
+                        <a:srgbClr val="E2E8F0"/>
+                      </a:solidFill>
+                    </a:lnB>
+                  </a:tcPr>
+                </a:tc>
+                <a:tc>
+                  <a:txBody>
+                    <a:bodyPr wrap="square"/>
+                    <a:lstStyle/>
+                    <a:p>
+                      <a:r>
+                        <a:rPr sz="980" b="0">
+                          <a:solidFill>
+                            <a:srgbClr val="334155"/>
+                          </a:solidFill>
+                          <a:latin typeface="DM Sans"/>
+                        </a:rPr>
+                        <a:t>verify_cad.py</a:t>
+                      </a:r>
+                    </a:p>
+                  </a:txBody>
+                  <a:tcPr marL="36576" marR="36576" marT="22860" marB="18288" anchor="ctr">
+                    <a:noFill/>
+                    <a:lnL w="7620">
+                      <a:noFill/>
+                    </a:lnL>
+                    <a:lnR w="7620">
+                      <a:noFill/>
+                    </a:lnR>
+                    <a:lnT w="7620">
+                      <a:noFill/>
+                    </a:lnT>
+                    <a:lnB w="7620">
+                      <a:solidFill>
+                        <a:srgbClr val="E2E8F0"/>
+                      </a:solidFill>
+                    </a:lnB>
+                  </a:tcPr>
+                </a:tc>
+              </a:tr>
+              <a:tr h="411480">
+                <a:tc>
+                  <a:txBody>
+                    <a:bodyPr wrap="square"/>
+                    <a:lstStyle/>
+                    <a:p>
+                      <a:r>
+                        <a:rPr sz="980" b="1">
+                          <a:solidFill>
+                            <a:srgbClr val="0F172A"/>
+                          </a:solidFill>
+                          <a:latin typeface="DM Sans"/>
+                        </a:rPr>
+                        <a:t>FEA</a:t>
+                      </a:r>
+                    </a:p>
+                  </a:txBody>
+                  <a:tcPr marL="36576" marR="36576" marT="22860" marB="18288" anchor="ctr">
+                    <a:noFill/>
+                    <a:lnL w="7620">
+                      <a:noFill/>
+                    </a:lnL>
+                    <a:lnR w="7620">
+                      <a:noFill/>
+                    </a:lnR>
+                    <a:lnT w="7620">
+                      <a:noFill/>
+                    </a:lnT>
+                    <a:lnB w="7620">
+                      <a:solidFill>
+                        <a:srgbClr val="E2E8F0"/>
+                      </a:solidFill>
+                    </a:lnB>
+                  </a:tcPr>
+                </a:tc>
+                <a:tc>
+                  <a:txBody>
+                    <a:bodyPr wrap="square"/>
+                    <a:lstStyle/>
+                    <a:p>
+                      <a:r>
+                        <a:rPr sz="980" b="0">
+                          <a:solidFill>
+                            <a:srgbClr val="334155"/>
+                          </a:solidFill>
+                          <a:latin typeface="DM Sans"/>
+                        </a:rPr>
+                        <a:t>not run: loads are under 3 N</a:t>
+                      </a:r>
+                    </a:p>
+                  </a:txBody>
+                  <a:tcPr marL="36576" marR="36576" marT="22860" marB="18288" anchor="ctr">
+                    <a:noFill/>
+                    <a:lnL w="7620">
+                      <a:noFill/>
+                    </a:lnL>
+                    <a:lnR w="7620">
+                      <a:noFill/>
+                    </a:lnR>
+                    <a:lnT w="7620">
+                      <a:noFill/>
+                    </a:lnT>
+                    <a:lnB w="7620">
+                      <a:solidFill>
+                        <a:srgbClr val="E2E8F0"/>
+                      </a:solidFill>
+                    </a:lnB>
+                  </a:tcPr>
+                </a:tc>
+                <a:tc>
+                  <a:txBody>
+                    <a:bodyPr wrap="square"/>
+                    <a:lstStyle/>
+                    <a:p>
+                      <a:r>
+                        <a:rPr sz="980" b="0">
+                          <a:solidFill>
+                            <a:srgbClr val="334155"/>
+                          </a:solidFill>
+                          <a:latin typeface="DM Sans"/>
+                        </a:rPr>
+                        <a:t>hand calcs above</a:t>
+                      </a:r>
+                    </a:p>
+                  </a:txBody>
+                  <a:tcPr marL="36576" marR="36576" marT="22860" marB="18288" anchor="ctr">
+                    <a:noFill/>
+                    <a:lnL w="7620">
+                      <a:noFill/>
+                    </a:lnL>
+                    <a:lnR w="7620">
+                      <a:noFill/>
+                    </a:lnR>
+                    <a:lnT w="7620">
+                      <a:noFill/>
+                    </a:lnT>
+                    <a:lnB w="7620">
+                      <a:solidFill>
+                        <a:srgbClr val="E2E8F0"/>
+                      </a:solidFill>
+                    </a:lnB>
+                  </a:tcPr>
+                </a:tc>
+              </a:tr>
+            </a:tbl>
+          </a:graphicData>
+        </a:graphic>
+      </p:graphicFrame>
     </p:spTree>
   </p:cSld>
   <p:clrMapOvr>
